--- a/deliverables/SRAM_AI_Adoption_Playbook.pptx
+++ b/deliverables/SRAM_AI_Adoption_Playbook.pptx
@@ -10527,7 +10527,7 @@
               </a:defRPr>
             </a:pPr>
             <a:r>
-              <a:t>Every function at SRAM has AI potential. Ordered by implementation complexity and time to return.</a:t>
+              <a:t>Start where domain knowledge is high and outcomes are measurable. Support is the proving ground for everything that follows.</a:t>
             </a:r>
           </a:p>
         </p:txBody>
@@ -10735,7 +10735,7 @@
         <p:spPr>
           <a:xfrm>
             <a:off x="731520" y="1920240"/>
-            <a:ext cx="50800" cy="960120"/>
+            <a:ext cx="50800" cy="822960"/>
           </a:xfrm>
           <a:prstGeom prst="rect">
             <a:avLst/>
@@ -10777,8 +10777,8 @@
         </p:nvSpPr>
         <p:spPr>
           <a:xfrm>
-            <a:off x="868680" y="2194560"/>
-            <a:ext cx="1234440" cy="411480"/>
+            <a:off x="868680" y="2148840"/>
+            <a:ext cx="1234440" cy="365760"/>
           </a:xfrm>
           <a:prstGeom prst="rect">
             <a:avLst/>
@@ -10814,7 +10814,7 @@
         <p:spPr>
           <a:xfrm>
             <a:off x="2194560" y="1920240"/>
-            <a:ext cx="2926080" cy="960120"/>
+            <a:ext cx="2926080" cy="822960"/>
           </a:xfrm>
           <a:prstGeom prst="roundRect">
             <a:avLst>
@@ -10861,7 +10861,7 @@
         <p:spPr>
           <a:xfrm>
             <a:off x="2194560" y="1920240"/>
-            <a:ext cx="50800" cy="960120"/>
+            <a:ext cx="50800" cy="822960"/>
           </a:xfrm>
           <a:prstGeom prst="rect">
             <a:avLst/>
@@ -10939,7 +10939,7 @@
         </p:nvSpPr>
         <p:spPr>
           <a:xfrm>
-            <a:off x="2377440" y="2194560"/>
+            <a:off x="2377440" y="2148840"/>
             <a:ext cx="2560320" cy="274320"/>
           </a:xfrm>
           <a:prstGeom prst="rect">
@@ -10954,7 +10954,7 @@
           <a:lstStyle/>
           <a:p>
             <a:pPr algn="l">
-              <a:defRPr sz="1300" b="1" i="0">
+              <a:defRPr sz="1200" b="1" i="0">
                 <a:solidFill>
                   <a:srgbClr val="1C1C1E"/>
                 </a:solidFill>
@@ -10975,22 +10975,22 @@
         </p:nvSpPr>
         <p:spPr>
           <a:xfrm>
-            <a:off x="2377440" y="2514600"/>
-            <a:ext cx="2560320" cy="320040"/>
-          </a:xfrm>
-          <a:prstGeom prst="rect">
-            <a:avLst/>
-          </a:prstGeom>
-          <a:noFill/>
-        </p:spPr>
-        <p:txBody>
-          <a:bodyPr wrap="square">
-            <a:spAutoFit/>
-          </a:bodyPr>
-          <a:lstStyle/>
-          <a:p>
-            <a:pPr algn="l">
-              <a:defRPr sz="1000" b="0" i="0">
+            <a:off x="2377440" y="2423160"/>
+            <a:ext cx="2560320" cy="274320"/>
+          </a:xfrm>
+          <a:prstGeom prst="rect">
+            <a:avLst/>
+          </a:prstGeom>
+          <a:noFill/>
+        </p:spPr>
+        <p:txBody>
+          <a:bodyPr wrap="square">
+            <a:spAutoFit/>
+          </a:bodyPr>
+          <a:lstStyle/>
+          <a:p>
+            <a:pPr algn="l">
+              <a:defRPr sz="900" b="0" i="0">
                 <a:solidFill>
                   <a:srgbClr val="767676"/>
                 </a:solidFill>
@@ -11012,7 +11012,7 @@
         <p:spPr>
           <a:xfrm>
             <a:off x="5257800" y="1920240"/>
-            <a:ext cx="2926080" cy="960120"/>
+            <a:ext cx="2926080" cy="822960"/>
           </a:xfrm>
           <a:prstGeom prst="roundRect">
             <a:avLst>
@@ -11058,7 +11058,7 @@
         </p:nvSpPr>
         <p:spPr>
           <a:xfrm>
-            <a:off x="5440680" y="2194560"/>
+            <a:off x="5440680" y="2148840"/>
             <a:ext cx="2560320" cy="274320"/>
           </a:xfrm>
           <a:prstGeom prst="rect">
@@ -11073,7 +11073,7 @@
           <a:lstStyle/>
           <a:p>
             <a:pPr algn="l">
-              <a:defRPr sz="1300" b="1" i="0">
+              <a:defRPr sz="1200" b="1" i="0">
                 <a:solidFill>
                   <a:srgbClr val="1C1C1E"/>
                 </a:solidFill>
@@ -11094,22 +11094,22 @@
         </p:nvSpPr>
         <p:spPr>
           <a:xfrm>
-            <a:off x="5440680" y="2514600"/>
-            <a:ext cx="2560320" cy="320040"/>
-          </a:xfrm>
-          <a:prstGeom prst="rect">
-            <a:avLst/>
-          </a:prstGeom>
-          <a:noFill/>
-        </p:spPr>
-        <p:txBody>
-          <a:bodyPr wrap="square">
-            <a:spAutoFit/>
-          </a:bodyPr>
-          <a:lstStyle/>
-          <a:p>
-            <a:pPr algn="l">
-              <a:defRPr sz="1000" b="0" i="0">
+            <a:off x="5440680" y="2423160"/>
+            <a:ext cx="2560320" cy="274320"/>
+          </a:xfrm>
+          <a:prstGeom prst="rect">
+            <a:avLst/>
+          </a:prstGeom>
+          <a:noFill/>
+        </p:spPr>
+        <p:txBody>
+          <a:bodyPr wrap="square">
+            <a:spAutoFit/>
+          </a:bodyPr>
+          <a:lstStyle/>
+          <a:p>
+            <a:pPr algn="l">
+              <a:defRPr sz="900" b="0" i="0">
                 <a:solidFill>
                   <a:srgbClr val="767676"/>
                 </a:solidFill>
@@ -11131,7 +11131,7 @@
         <p:spPr>
           <a:xfrm>
             <a:off x="8321040" y="1920240"/>
-            <a:ext cx="2926080" cy="960120"/>
+            <a:ext cx="2926080" cy="822960"/>
           </a:xfrm>
           <a:prstGeom prst="roundRect">
             <a:avLst>
@@ -11177,7 +11177,7 @@
         </p:nvSpPr>
         <p:spPr>
           <a:xfrm>
-            <a:off x="8503920" y="2194560"/>
+            <a:off x="8503920" y="2148840"/>
             <a:ext cx="2560320" cy="274320"/>
           </a:xfrm>
           <a:prstGeom prst="rect">
@@ -11192,7 +11192,7 @@
           <a:lstStyle/>
           <a:p>
             <a:pPr algn="l">
-              <a:defRPr sz="1300" b="1" i="0">
+              <a:defRPr sz="1200" b="1" i="0">
                 <a:solidFill>
                   <a:srgbClr val="1C1C1E"/>
                 </a:solidFill>
@@ -11213,22 +11213,22 @@
         </p:nvSpPr>
         <p:spPr>
           <a:xfrm>
-            <a:off x="8503920" y="2514600"/>
-            <a:ext cx="2560320" cy="320040"/>
-          </a:xfrm>
-          <a:prstGeom prst="rect">
-            <a:avLst/>
-          </a:prstGeom>
-          <a:noFill/>
-        </p:spPr>
-        <p:txBody>
-          <a:bodyPr wrap="square">
-            <a:spAutoFit/>
-          </a:bodyPr>
-          <a:lstStyle/>
-          <a:p>
-            <a:pPr algn="l">
-              <a:defRPr sz="1000" b="0" i="0">
+            <a:off x="8503920" y="2423160"/>
+            <a:ext cx="2560320" cy="274320"/>
+          </a:xfrm>
+          <a:prstGeom prst="rect">
+            <a:avLst/>
+          </a:prstGeom>
+          <a:noFill/>
+        </p:spPr>
+        <p:txBody>
+          <a:bodyPr wrap="square">
+            <a:spAutoFit/>
+          </a:bodyPr>
+          <a:lstStyle/>
+          <a:p>
+            <a:pPr algn="l">
+              <a:defRPr sz="900" b="0" i="0">
                 <a:solidFill>
                   <a:srgbClr val="767676"/>
                 </a:solidFill>
@@ -11249,8 +11249,8 @@
         </p:nvSpPr>
         <p:spPr>
           <a:xfrm>
-            <a:off x="731520" y="3017520"/>
-            <a:ext cx="50800" cy="960120"/>
+            <a:off x="731520" y="3154680"/>
+            <a:ext cx="50800" cy="822960"/>
           </a:xfrm>
           <a:prstGeom prst="rect">
             <a:avLst/>
@@ -11292,8 +11292,8 @@
         </p:nvSpPr>
         <p:spPr>
           <a:xfrm>
-            <a:off x="868680" y="3291840"/>
-            <a:ext cx="1234440" cy="411480"/>
+            <a:off x="868680" y="3383280"/>
+            <a:ext cx="1234440" cy="365760"/>
           </a:xfrm>
           <a:prstGeom prst="rect">
             <a:avLst/>
@@ -11328,8 +11328,8 @@
         </p:nvSpPr>
         <p:spPr>
           <a:xfrm>
-            <a:off x="2194560" y="3017520"/>
-            <a:ext cx="2926080" cy="960120"/>
+            <a:off x="2194560" y="3154680"/>
+            <a:ext cx="2926080" cy="822960"/>
           </a:xfrm>
           <a:prstGeom prst="roundRect">
             <a:avLst>
@@ -11375,7 +11375,7 @@
         </p:nvSpPr>
         <p:spPr>
           <a:xfrm>
-            <a:off x="2377440" y="3291840"/>
+            <a:off x="2377440" y="3383280"/>
             <a:ext cx="2560320" cy="274320"/>
           </a:xfrm>
           <a:prstGeom prst="rect">
@@ -11390,7 +11390,7 @@
           <a:lstStyle/>
           <a:p>
             <a:pPr algn="l">
-              <a:defRPr sz="1300" b="1" i="0">
+              <a:defRPr sz="1200" b="1" i="0">
                 <a:solidFill>
                   <a:srgbClr val="1C1C1E"/>
                 </a:solidFill>
@@ -11411,22 +11411,22 @@
         </p:nvSpPr>
         <p:spPr>
           <a:xfrm>
-            <a:off x="2377440" y="3611880"/>
-            <a:ext cx="2560320" cy="320040"/>
-          </a:xfrm>
-          <a:prstGeom prst="rect">
-            <a:avLst/>
-          </a:prstGeom>
-          <a:noFill/>
-        </p:spPr>
-        <p:txBody>
-          <a:bodyPr wrap="square">
-            <a:spAutoFit/>
-          </a:bodyPr>
-          <a:lstStyle/>
-          <a:p>
-            <a:pPr algn="l">
-              <a:defRPr sz="1000" b="0" i="0">
+            <a:off x="2377440" y="3657600"/>
+            <a:ext cx="2560320" cy="274320"/>
+          </a:xfrm>
+          <a:prstGeom prst="rect">
+            <a:avLst/>
+          </a:prstGeom>
+          <a:noFill/>
+        </p:spPr>
+        <p:txBody>
+          <a:bodyPr wrap="square">
+            <a:spAutoFit/>
+          </a:bodyPr>
+          <a:lstStyle/>
+          <a:p>
+            <a:pPr algn="l">
+              <a:defRPr sz="900" b="0" i="0">
                 <a:solidFill>
                   <a:srgbClr val="767676"/>
                 </a:solidFill>
@@ -11447,8 +11447,8 @@
         </p:nvSpPr>
         <p:spPr>
           <a:xfrm>
-            <a:off x="5257800" y="3017520"/>
-            <a:ext cx="2926080" cy="960120"/>
+            <a:off x="5257800" y="3154680"/>
+            <a:ext cx="2926080" cy="822960"/>
           </a:xfrm>
           <a:prstGeom prst="roundRect">
             <a:avLst>
@@ -11494,7 +11494,7 @@
         </p:nvSpPr>
         <p:spPr>
           <a:xfrm>
-            <a:off x="5440680" y="3291840"/>
+            <a:off x="5440680" y="3383280"/>
             <a:ext cx="2560320" cy="274320"/>
           </a:xfrm>
           <a:prstGeom prst="rect">
@@ -11509,7 +11509,7 @@
           <a:lstStyle/>
           <a:p>
             <a:pPr algn="l">
-              <a:defRPr sz="1300" b="1" i="0">
+              <a:defRPr sz="1200" b="1" i="0">
                 <a:solidFill>
                   <a:srgbClr val="1C1C1E"/>
                 </a:solidFill>
@@ -11530,22 +11530,22 @@
         </p:nvSpPr>
         <p:spPr>
           <a:xfrm>
-            <a:off x="5440680" y="3611880"/>
-            <a:ext cx="2560320" cy="320040"/>
-          </a:xfrm>
-          <a:prstGeom prst="rect">
-            <a:avLst/>
-          </a:prstGeom>
-          <a:noFill/>
-        </p:spPr>
-        <p:txBody>
-          <a:bodyPr wrap="square">
-            <a:spAutoFit/>
-          </a:bodyPr>
-          <a:lstStyle/>
-          <a:p>
-            <a:pPr algn="l">
-              <a:defRPr sz="1000" b="0" i="0">
+            <a:off x="5440680" y="3657600"/>
+            <a:ext cx="2560320" cy="274320"/>
+          </a:xfrm>
+          <a:prstGeom prst="rect">
+            <a:avLst/>
+          </a:prstGeom>
+          <a:noFill/>
+        </p:spPr>
+        <p:txBody>
+          <a:bodyPr wrap="square">
+            <a:spAutoFit/>
+          </a:bodyPr>
+          <a:lstStyle/>
+          <a:p>
+            <a:pPr algn="l">
+              <a:defRPr sz="900" b="0" i="0">
                 <a:solidFill>
                   <a:srgbClr val="767676"/>
                 </a:solidFill>
@@ -11566,8 +11566,8 @@
         </p:nvSpPr>
         <p:spPr>
           <a:xfrm>
-            <a:off x="8321040" y="3017520"/>
-            <a:ext cx="2926080" cy="960120"/>
+            <a:off x="8321040" y="3154680"/>
+            <a:ext cx="2926080" cy="822960"/>
           </a:xfrm>
           <a:prstGeom prst="roundRect">
             <a:avLst>
@@ -11613,7 +11613,7 @@
         </p:nvSpPr>
         <p:spPr>
           <a:xfrm>
-            <a:off x="8503920" y="3291840"/>
+            <a:off x="8503920" y="3383280"/>
             <a:ext cx="2560320" cy="274320"/>
           </a:xfrm>
           <a:prstGeom prst="rect">
@@ -11628,7 +11628,7 @@
           <a:lstStyle/>
           <a:p>
             <a:pPr algn="l">
-              <a:defRPr sz="1300" b="1" i="0">
+              <a:defRPr sz="1200" b="1" i="0">
                 <a:solidFill>
                   <a:srgbClr val="1C1C1E"/>
                 </a:solidFill>
@@ -11649,22 +11649,22 @@
         </p:nvSpPr>
         <p:spPr>
           <a:xfrm>
-            <a:off x="8503920" y="3611880"/>
-            <a:ext cx="2560320" cy="320040"/>
-          </a:xfrm>
-          <a:prstGeom prst="rect">
-            <a:avLst/>
-          </a:prstGeom>
-          <a:noFill/>
-        </p:spPr>
-        <p:txBody>
-          <a:bodyPr wrap="square">
-            <a:spAutoFit/>
-          </a:bodyPr>
-          <a:lstStyle/>
-          <a:p>
-            <a:pPr algn="l">
-              <a:defRPr sz="1000" b="0" i="0">
+            <a:off x="8503920" y="3657600"/>
+            <a:ext cx="2560320" cy="274320"/>
+          </a:xfrm>
+          <a:prstGeom prst="rect">
+            <a:avLst/>
+          </a:prstGeom>
+          <a:noFill/>
+        </p:spPr>
+        <p:txBody>
+          <a:bodyPr wrap="square">
+            <a:spAutoFit/>
+          </a:bodyPr>
+          <a:lstStyle/>
+          <a:p>
+            <a:pPr algn="l">
+              <a:defRPr sz="900" b="0" i="0">
                 <a:solidFill>
                   <a:srgbClr val="767676"/>
                 </a:solidFill>
@@ -11685,8 +11685,8 @@
         </p:nvSpPr>
         <p:spPr>
           <a:xfrm>
-            <a:off x="731520" y="4114800"/>
-            <a:ext cx="50800" cy="960120"/>
+            <a:off x="731520" y="4069080"/>
+            <a:ext cx="50800" cy="822960"/>
           </a:xfrm>
           <a:prstGeom prst="rect">
             <a:avLst/>
@@ -11728,8 +11728,8 @@
         </p:nvSpPr>
         <p:spPr>
           <a:xfrm>
-            <a:off x="868680" y="4389120"/>
-            <a:ext cx="1234440" cy="411480"/>
+            <a:off x="868680" y="4297680"/>
+            <a:ext cx="1234440" cy="365760"/>
           </a:xfrm>
           <a:prstGeom prst="rect">
             <a:avLst/>
@@ -11764,8 +11764,8 @@
         </p:nvSpPr>
         <p:spPr>
           <a:xfrm>
-            <a:off x="2194560" y="4114800"/>
-            <a:ext cx="2926080" cy="960120"/>
+            <a:off x="2194560" y="4069080"/>
+            <a:ext cx="2926080" cy="822960"/>
           </a:xfrm>
           <a:prstGeom prst="roundRect">
             <a:avLst>
@@ -11811,7 +11811,7 @@
         </p:nvSpPr>
         <p:spPr>
           <a:xfrm>
-            <a:off x="2377440" y="4389120"/>
+            <a:off x="2377440" y="4297680"/>
             <a:ext cx="2560320" cy="274320"/>
           </a:xfrm>
           <a:prstGeom prst="rect">
@@ -11826,7 +11826,7 @@
           <a:lstStyle/>
           <a:p>
             <a:pPr algn="l">
-              <a:defRPr sz="1300" b="1" i="0">
+              <a:defRPr sz="1200" b="1" i="0">
                 <a:solidFill>
                   <a:srgbClr val="1C1C1E"/>
                 </a:solidFill>
@@ -11847,22 +11847,22 @@
         </p:nvSpPr>
         <p:spPr>
           <a:xfrm>
-            <a:off x="2377440" y="4709160"/>
-            <a:ext cx="2560320" cy="320040"/>
-          </a:xfrm>
-          <a:prstGeom prst="rect">
-            <a:avLst/>
-          </a:prstGeom>
-          <a:noFill/>
-        </p:spPr>
-        <p:txBody>
-          <a:bodyPr wrap="square">
-            <a:spAutoFit/>
-          </a:bodyPr>
-          <a:lstStyle/>
-          <a:p>
-            <a:pPr algn="l">
-              <a:defRPr sz="1000" b="0" i="0">
+            <a:off x="2377440" y="4572000"/>
+            <a:ext cx="2560320" cy="274320"/>
+          </a:xfrm>
+          <a:prstGeom prst="rect">
+            <a:avLst/>
+          </a:prstGeom>
+          <a:noFill/>
+        </p:spPr>
+        <p:txBody>
+          <a:bodyPr wrap="square">
+            <a:spAutoFit/>
+          </a:bodyPr>
+          <a:lstStyle/>
+          <a:p>
+            <a:pPr algn="l">
+              <a:defRPr sz="900" b="0" i="0">
                 <a:solidFill>
                   <a:srgbClr val="767676"/>
                 </a:solidFill>
@@ -11883,8 +11883,8 @@
         </p:nvSpPr>
         <p:spPr>
           <a:xfrm>
-            <a:off x="5257800" y="4114800"/>
-            <a:ext cx="2926080" cy="960120"/>
+            <a:off x="5257800" y="4069080"/>
+            <a:ext cx="2926080" cy="822960"/>
           </a:xfrm>
           <a:prstGeom prst="roundRect">
             <a:avLst>
@@ -11930,7 +11930,7 @@
         </p:nvSpPr>
         <p:spPr>
           <a:xfrm>
-            <a:off x="5440680" y="4389120"/>
+            <a:off x="5440680" y="4297680"/>
             <a:ext cx="2560320" cy="274320"/>
           </a:xfrm>
           <a:prstGeom prst="rect">
@@ -11945,7 +11945,7 @@
           <a:lstStyle/>
           <a:p>
             <a:pPr algn="l">
-              <a:defRPr sz="1300" b="1" i="0">
+              <a:defRPr sz="1200" b="1" i="0">
                 <a:solidFill>
                   <a:srgbClr val="1C1C1E"/>
                 </a:solidFill>
@@ -11966,22 +11966,22 @@
         </p:nvSpPr>
         <p:spPr>
           <a:xfrm>
-            <a:off x="5440680" y="4709160"/>
-            <a:ext cx="2560320" cy="320040"/>
-          </a:xfrm>
-          <a:prstGeom prst="rect">
-            <a:avLst/>
-          </a:prstGeom>
-          <a:noFill/>
-        </p:spPr>
-        <p:txBody>
-          <a:bodyPr wrap="square">
-            <a:spAutoFit/>
-          </a:bodyPr>
-          <a:lstStyle/>
-          <a:p>
-            <a:pPr algn="l">
-              <a:defRPr sz="1000" b="0" i="0">
+            <a:off x="5440680" y="4572000"/>
+            <a:ext cx="2560320" cy="274320"/>
+          </a:xfrm>
+          <a:prstGeom prst="rect">
+            <a:avLst/>
+          </a:prstGeom>
+          <a:noFill/>
+        </p:spPr>
+        <p:txBody>
+          <a:bodyPr wrap="square">
+            <a:spAutoFit/>
+          </a:bodyPr>
+          <a:lstStyle/>
+          <a:p>
+            <a:pPr algn="l">
+              <a:defRPr sz="900" b="0" i="0">
                 <a:solidFill>
                   <a:srgbClr val="767676"/>
                 </a:solidFill>
@@ -12002,8 +12002,8 @@
         </p:nvSpPr>
         <p:spPr>
           <a:xfrm>
-            <a:off x="8321040" y="4114800"/>
-            <a:ext cx="2926080" cy="960120"/>
+            <a:off x="8321040" y="4069080"/>
+            <a:ext cx="2926080" cy="822960"/>
           </a:xfrm>
           <a:prstGeom prst="roundRect">
             <a:avLst>
@@ -12049,7 +12049,7 @@
         </p:nvSpPr>
         <p:spPr>
           <a:xfrm>
-            <a:off x="8503920" y="4389120"/>
+            <a:off x="8503920" y="4297680"/>
             <a:ext cx="2560320" cy="274320"/>
           </a:xfrm>
           <a:prstGeom prst="rect">
@@ -12064,7 +12064,7 @@
           <a:lstStyle/>
           <a:p>
             <a:pPr algn="l">
-              <a:defRPr sz="1300" b="1" i="0">
+              <a:defRPr sz="1200" b="1" i="0">
                 <a:solidFill>
                   <a:srgbClr val="1C1C1E"/>
                 </a:solidFill>
@@ -12085,22 +12085,22 @@
         </p:nvSpPr>
         <p:spPr>
           <a:xfrm>
-            <a:off x="8503920" y="4709160"/>
-            <a:ext cx="2560320" cy="320040"/>
-          </a:xfrm>
-          <a:prstGeom prst="rect">
-            <a:avLst/>
-          </a:prstGeom>
-          <a:noFill/>
-        </p:spPr>
-        <p:txBody>
-          <a:bodyPr wrap="square">
-            <a:spAutoFit/>
-          </a:bodyPr>
-          <a:lstStyle/>
-          <a:p>
-            <a:pPr algn="l">
-              <a:defRPr sz="1000" b="0" i="0">
+            <a:off x="8503920" y="4572000"/>
+            <a:ext cx="2560320" cy="274320"/>
+          </a:xfrm>
+          <a:prstGeom prst="rect">
+            <a:avLst/>
+          </a:prstGeom>
+          <a:noFill/>
+        </p:spPr>
+        <p:txBody>
+          <a:bodyPr wrap="square">
+            <a:spAutoFit/>
+          </a:bodyPr>
+          <a:lstStyle/>
+          <a:p>
+            <a:pPr algn="l">
+              <a:defRPr sz="900" b="0" i="0">
                 <a:solidFill>
                   <a:srgbClr val="767676"/>
                 </a:solidFill>
@@ -12121,8 +12121,8 @@
         </p:nvSpPr>
         <p:spPr>
           <a:xfrm>
-            <a:off x="731520" y="5212079"/>
-            <a:ext cx="50800" cy="960120"/>
+            <a:off x="731520" y="4983480"/>
+            <a:ext cx="50800" cy="822960"/>
           </a:xfrm>
           <a:prstGeom prst="rect">
             <a:avLst/>
@@ -12164,8 +12164,8 @@
         </p:nvSpPr>
         <p:spPr>
           <a:xfrm>
-            <a:off x="868680" y="5486399"/>
-            <a:ext cx="1234440" cy="411480"/>
+            <a:off x="868680" y="5212080"/>
+            <a:ext cx="1234440" cy="365760"/>
           </a:xfrm>
           <a:prstGeom prst="rect">
             <a:avLst/>
@@ -12200,8 +12200,8 @@
         </p:nvSpPr>
         <p:spPr>
           <a:xfrm>
-            <a:off x="2194560" y="5212079"/>
-            <a:ext cx="2926080" cy="960120"/>
+            <a:off x="2194560" y="4983480"/>
+            <a:ext cx="2926080" cy="822960"/>
           </a:xfrm>
           <a:prstGeom prst="roundRect">
             <a:avLst>
@@ -12247,7 +12247,7 @@
         </p:nvSpPr>
         <p:spPr>
           <a:xfrm>
-            <a:off x="2377440" y="5486399"/>
+            <a:off x="2377440" y="5212080"/>
             <a:ext cx="2560320" cy="274320"/>
           </a:xfrm>
           <a:prstGeom prst="rect">
@@ -12262,7 +12262,7 @@
           <a:lstStyle/>
           <a:p>
             <a:pPr algn="l">
-              <a:defRPr sz="1300" b="1" i="0">
+              <a:defRPr sz="1200" b="1" i="0">
                 <a:solidFill>
                   <a:srgbClr val="1C1C1E"/>
                 </a:solidFill>
@@ -12283,22 +12283,22 @@
         </p:nvSpPr>
         <p:spPr>
           <a:xfrm>
-            <a:off x="2377440" y="5806439"/>
-            <a:ext cx="2560320" cy="320040"/>
-          </a:xfrm>
-          <a:prstGeom prst="rect">
-            <a:avLst/>
-          </a:prstGeom>
-          <a:noFill/>
-        </p:spPr>
-        <p:txBody>
-          <a:bodyPr wrap="square">
-            <a:spAutoFit/>
-          </a:bodyPr>
-          <a:lstStyle/>
-          <a:p>
-            <a:pPr algn="l">
-              <a:defRPr sz="1000" b="0" i="0">
+            <a:off x="2377440" y="5486400"/>
+            <a:ext cx="2560320" cy="274320"/>
+          </a:xfrm>
+          <a:prstGeom prst="rect">
+            <a:avLst/>
+          </a:prstGeom>
+          <a:noFill/>
+        </p:spPr>
+        <p:txBody>
+          <a:bodyPr wrap="square">
+            <a:spAutoFit/>
+          </a:bodyPr>
+          <a:lstStyle/>
+          <a:p>
+            <a:pPr algn="l">
+              <a:defRPr sz="900" b="0" i="0">
                 <a:solidFill>
                   <a:srgbClr val="767676"/>
                 </a:solidFill>
@@ -12319,8 +12319,8 @@
         </p:nvSpPr>
         <p:spPr>
           <a:xfrm>
-            <a:off x="5257800" y="5212079"/>
-            <a:ext cx="2926080" cy="960120"/>
+            <a:off x="5257800" y="4983480"/>
+            <a:ext cx="2926080" cy="822960"/>
           </a:xfrm>
           <a:prstGeom prst="roundRect">
             <a:avLst>
@@ -12366,7 +12366,7 @@
         </p:nvSpPr>
         <p:spPr>
           <a:xfrm>
-            <a:off x="5440680" y="5486399"/>
+            <a:off x="5440680" y="5212080"/>
             <a:ext cx="2560320" cy="274320"/>
           </a:xfrm>
           <a:prstGeom prst="rect">
@@ -12381,7 +12381,7 @@
           <a:lstStyle/>
           <a:p>
             <a:pPr algn="l">
-              <a:defRPr sz="1300" b="1" i="0">
+              <a:defRPr sz="1200" b="1" i="0">
                 <a:solidFill>
                   <a:srgbClr val="1C1C1E"/>
                 </a:solidFill>
@@ -12402,22 +12402,22 @@
         </p:nvSpPr>
         <p:spPr>
           <a:xfrm>
-            <a:off x="5440680" y="5806439"/>
-            <a:ext cx="2560320" cy="320040"/>
-          </a:xfrm>
-          <a:prstGeom prst="rect">
-            <a:avLst/>
-          </a:prstGeom>
-          <a:noFill/>
-        </p:spPr>
-        <p:txBody>
-          <a:bodyPr wrap="square">
-            <a:spAutoFit/>
-          </a:bodyPr>
-          <a:lstStyle/>
-          <a:p>
-            <a:pPr algn="l">
-              <a:defRPr sz="1000" b="0" i="0">
+            <a:off x="5440680" y="5486400"/>
+            <a:ext cx="2560320" cy="274320"/>
+          </a:xfrm>
+          <a:prstGeom prst="rect">
+            <a:avLst/>
+          </a:prstGeom>
+          <a:noFill/>
+        </p:spPr>
+        <p:txBody>
+          <a:bodyPr wrap="square">
+            <a:spAutoFit/>
+          </a:bodyPr>
+          <a:lstStyle/>
+          <a:p>
+            <a:pPr algn="l">
+              <a:defRPr sz="900" b="0" i="0">
                 <a:solidFill>
                   <a:srgbClr val="767676"/>
                 </a:solidFill>
@@ -12438,8 +12438,8 @@
         </p:nvSpPr>
         <p:spPr>
           <a:xfrm>
-            <a:off x="8321040" y="5212079"/>
-            <a:ext cx="2926080" cy="960120"/>
+            <a:off x="8321040" y="4983480"/>
+            <a:ext cx="2926080" cy="822960"/>
           </a:xfrm>
           <a:prstGeom prst="roundRect">
             <a:avLst>
@@ -12485,7 +12485,7 @@
         </p:nvSpPr>
         <p:spPr>
           <a:xfrm>
-            <a:off x="8503920" y="5486399"/>
+            <a:off x="8503920" y="5212080"/>
             <a:ext cx="2560320" cy="274320"/>
           </a:xfrm>
           <a:prstGeom prst="rect">
@@ -12500,7 +12500,7 @@
           <a:lstStyle/>
           <a:p>
             <a:pPr algn="l">
-              <a:defRPr sz="1300" b="1" i="0">
+              <a:defRPr sz="1200" b="1" i="0">
                 <a:solidFill>
                   <a:srgbClr val="1C1C1E"/>
                 </a:solidFill>
@@ -12521,22 +12521,22 @@
         </p:nvSpPr>
         <p:spPr>
           <a:xfrm>
-            <a:off x="8503920" y="5806439"/>
-            <a:ext cx="2560320" cy="320040"/>
-          </a:xfrm>
-          <a:prstGeom prst="rect">
-            <a:avLst/>
-          </a:prstGeom>
-          <a:noFill/>
-        </p:spPr>
-        <p:txBody>
-          <a:bodyPr wrap="square">
-            <a:spAutoFit/>
-          </a:bodyPr>
-          <a:lstStyle/>
-          <a:p>
-            <a:pPr algn="l">
-              <a:defRPr sz="1000" b="0" i="0">
+            <a:off x="8503920" y="5486400"/>
+            <a:ext cx="2560320" cy="274320"/>
+          </a:xfrm>
+          <a:prstGeom prst="rect">
+            <a:avLst/>
+          </a:prstGeom>
+          <a:noFill/>
+        </p:spPr>
+        <p:txBody>
+          <a:bodyPr wrap="square">
+            <a:spAutoFit/>
+          </a:bodyPr>
+          <a:lstStyle/>
+          <a:p>
+            <a:pPr algn="l">
+              <a:defRPr sz="900" b="0" i="0">
                 <a:solidFill>
                   <a:srgbClr val="767676"/>
                 </a:solidFill>
@@ -12551,7 +12551,122 @@
       </p:sp>
       <p:sp>
         <p:nvSpPr>
-          <p:cNvPr id="57" name="Oval 56"/>
+          <p:cNvPr id="57" name="Rectangle 56"/>
+          <p:cNvSpPr/>
+          <p:nvPr/>
+        </p:nvSpPr>
+        <p:spPr>
+          <a:xfrm>
+            <a:off x="594360" y="1847088"/>
+            <a:ext cx="10927080" cy="969264"/>
+          </a:xfrm>
+          <a:prstGeom prst="rect">
+            <a:avLst/>
+          </a:prstGeom>
+          <a:noFill/>
+          <a:ln w="31750">
+            <a:solidFill>
+              <a:srgbClr val="2D5F8A"/>
+            </a:solidFill>
+          </a:ln>
+        </p:spPr>
+        <p:style>
+          <a:lnRef idx="1">
+            <a:schemeClr val="accent1"/>
+          </a:lnRef>
+          <a:fillRef idx="3">
+            <a:schemeClr val="accent1"/>
+          </a:fillRef>
+          <a:effectRef idx="2">
+            <a:schemeClr val="accent1"/>
+          </a:effectRef>
+          <a:fontRef idx="minor">
+            <a:schemeClr val="lt1"/>
+          </a:fontRef>
+        </p:style>
+        <p:txBody>
+          <a:bodyPr rtlCol="0" anchor="ctr"/>
+          <a:lstStyle/>
+          <a:p>
+            <a:pPr algn="ctr"/>
+          </a:p>
+        </p:txBody>
+      </p:sp>
+      <p:sp>
+        <p:nvSpPr>
+          <p:cNvPr id="58" name="TextBox 57"/>
+          <p:cNvSpPr txBox="1"/>
+          <p:nvPr/>
+        </p:nvSpPr>
+        <p:spPr>
+          <a:xfrm>
+            <a:off x="9784080" y="1627632"/>
+            <a:ext cx="1645920" cy="201168"/>
+          </a:xfrm>
+          <a:prstGeom prst="rect">
+            <a:avLst/>
+          </a:prstGeom>
+          <a:noFill/>
+        </p:spPr>
+        <p:txBody>
+          <a:bodyPr wrap="square">
+            <a:spAutoFit/>
+          </a:bodyPr>
+          <a:lstStyle/>
+          <a:p>
+            <a:pPr algn="r">
+              <a:defRPr sz="1000" b="1" i="0">
+                <a:solidFill>
+                  <a:srgbClr val="2D5F8A"/>
+                </a:solidFill>
+                <a:latin typeface="Calibri"/>
+              </a:defRPr>
+            </a:pPr>
+            <a:r>
+              <a:t>START HERE</a:t>
+            </a:r>
+          </a:p>
+        </p:txBody>
+      </p:sp>
+      <p:sp>
+        <p:nvSpPr>
+          <p:cNvPr id="59" name="TextBox 58"/>
+          <p:cNvSpPr txBox="1"/>
+          <p:nvPr/>
+        </p:nvSpPr>
+        <p:spPr>
+          <a:xfrm>
+            <a:off x="2194560" y="2852928"/>
+            <a:ext cx="9144000" cy="201168"/>
+          </a:xfrm>
+          <a:prstGeom prst="rect">
+            <a:avLst/>
+          </a:prstGeom>
+          <a:noFill/>
+        </p:spPr>
+        <p:txBody>
+          <a:bodyPr wrap="square">
+            <a:spAutoFit/>
+          </a:bodyPr>
+          <a:lstStyle/>
+          <a:p>
+            <a:pPr algn="l">
+              <a:defRPr sz="900" b="0" i="0">
+                <a:solidFill>
+                  <a:srgbClr val="2D5F8A"/>
+                </a:solidFill>
+                <a:latin typeface="Calibri"/>
+              </a:defRPr>
+            </a:pPr>
+            <a:r>
+              <a:t>Support tasks are measurable, well-defined, and understood. AI quality is easy to verify when domain knowledge is high.</a:t>
+            </a:r>
+          </a:p>
+        </p:txBody>
+      </p:sp>
+      <p:sp>
+        <p:nvSpPr>
+          <p:cNvPr id="60" name="Oval 59"/>
           <p:cNvSpPr/>
           <p:nvPr/>
         </p:nvSpPr>
@@ -12594,7 +12709,7 @@
       </p:sp>
       <p:sp>
         <p:nvSpPr>
-          <p:cNvPr id="58" name="TextBox 57"/>
+          <p:cNvPr id="61" name="TextBox 60"/>
           <p:cNvSpPr txBox="1"/>
           <p:nvPr/>
         </p:nvSpPr>
@@ -12630,7 +12745,7 @@
       </p:sp>
       <p:sp>
         <p:nvSpPr>
-          <p:cNvPr id="59" name="Oval 58"/>
+          <p:cNvPr id="62" name="Oval 61"/>
           <p:cNvSpPr/>
           <p:nvPr/>
         </p:nvSpPr>
@@ -12673,7 +12788,7 @@
       </p:sp>
       <p:sp>
         <p:nvSpPr>
-          <p:cNvPr id="60" name="TextBox 59"/>
+          <p:cNvPr id="63" name="TextBox 62"/>
           <p:cNvSpPr txBox="1"/>
           <p:nvPr/>
         </p:nvSpPr>
@@ -12709,7 +12824,7 @@
       </p:sp>
       <p:sp>
         <p:nvSpPr>
-          <p:cNvPr id="61" name="Oval 60"/>
+          <p:cNvPr id="64" name="Oval 63"/>
           <p:cNvSpPr/>
           <p:nvPr/>
         </p:nvSpPr>
@@ -12752,7 +12867,7 @@
       </p:sp>
       <p:sp>
         <p:nvSpPr>
-          <p:cNvPr id="62" name="TextBox 61"/>
+          <p:cNvPr id="65" name="TextBox 64"/>
           <p:cNvSpPr txBox="1"/>
           <p:nvPr/>
         </p:nvSpPr>
@@ -12788,7 +12903,7 @@
       </p:sp>
       <p:sp>
         <p:nvSpPr>
-          <p:cNvPr id="63" name="Oval 62"/>
+          <p:cNvPr id="66" name="Oval 65"/>
           <p:cNvSpPr/>
           <p:nvPr/>
         </p:nvSpPr>
@@ -12831,7 +12946,7 @@
       </p:sp>
       <p:sp>
         <p:nvSpPr>
-          <p:cNvPr id="64" name="TextBox 63"/>
+          <p:cNvPr id="67" name="TextBox 66"/>
           <p:cNvSpPr txBox="1"/>
           <p:nvPr/>
         </p:nvSpPr>
@@ -12867,7 +12982,7 @@
       </p:sp>
       <p:sp>
         <p:nvSpPr>
-          <p:cNvPr id="65" name="TextBox 64"/>
+          <p:cNvPr id="68" name="TextBox 67"/>
           <p:cNvSpPr txBox="1"/>
           <p:nvPr/>
         </p:nvSpPr>
@@ -12903,7 +13018,7 @@
       </p:sp>
       <p:sp>
         <p:nvSpPr>
-          <p:cNvPr id="66" name="TextBox 65"/>
+          <p:cNvPr id="69" name="TextBox 68"/>
           <p:cNvSpPr txBox="1"/>
           <p:nvPr/>
         </p:nvSpPr>
@@ -21433,7 +21548,7 @@
               </a:defRPr>
             </a:pPr>
             <a:r>
-              <a:t>Each connected SRAM product a rider buys increases the value of the data and the quality of the AI. No competitor can replicate this full-stack advantage.</a:t>
+              <a:t>Proven AI pilots, strong data infrastructure, and teams that understand guardrails unlock the innovation no competitor can replicate.</a:t>
             </a:r>
           </a:p>
         </p:txBody>
@@ -22212,7 +22327,205 @@
         <p:spPr>
           <a:xfrm>
             <a:off x="731520" y="3520440"/>
-            <a:ext cx="5440680" cy="1051560"/>
+            <a:ext cx="10698480" cy="1188720"/>
+          </a:xfrm>
+          <a:prstGeom prst="roundRect">
+            <a:avLst>
+              <a:gd name="adj" fmla="val 4000"/>
+            </a:avLst>
+          </a:prstGeom>
+          <a:solidFill>
+            <a:srgbClr val="FDF0F2"/>
+          </a:solidFill>
+          <a:ln w="12700">
+            <a:solidFill>
+              <a:srgbClr val="E51937"/>
+            </a:solidFill>
+          </a:ln>
+        </p:spPr>
+        <p:style>
+          <a:lnRef idx="1">
+            <a:schemeClr val="accent1"/>
+          </a:lnRef>
+          <a:fillRef idx="3">
+            <a:schemeClr val="accent1"/>
+          </a:fillRef>
+          <a:effectRef idx="2">
+            <a:schemeClr val="accent1"/>
+          </a:effectRef>
+          <a:fontRef idx="minor">
+            <a:schemeClr val="lt1"/>
+          </a:fontRef>
+        </p:style>
+        <p:txBody>
+          <a:bodyPr rtlCol="0" anchor="ctr"/>
+          <a:lstStyle/>
+          <a:p>
+            <a:pPr algn="ctr"/>
+          </a:p>
+        </p:txBody>
+      </p:sp>
+      <p:sp>
+        <p:nvSpPr>
+          <p:cNvPr id="26" name="Rectangle 25"/>
+          <p:cNvSpPr/>
+          <p:nvPr/>
+        </p:nvSpPr>
+        <p:spPr>
+          <a:xfrm>
+            <a:off x="731520" y="3520440"/>
+            <a:ext cx="50800" cy="1188720"/>
+          </a:xfrm>
+          <a:prstGeom prst="rect">
+            <a:avLst/>
+          </a:prstGeom>
+          <a:solidFill>
+            <a:srgbClr val="E51937"/>
+          </a:solidFill>
+          <a:ln>
+            <a:noFill/>
+          </a:ln>
+        </p:spPr>
+        <p:style>
+          <a:lnRef idx="1">
+            <a:schemeClr val="accent1"/>
+          </a:lnRef>
+          <a:fillRef idx="3">
+            <a:schemeClr val="accent1"/>
+          </a:fillRef>
+          <a:effectRef idx="2">
+            <a:schemeClr val="accent1"/>
+          </a:effectRef>
+          <a:fontRef idx="minor">
+            <a:schemeClr val="lt1"/>
+          </a:fontRef>
+        </p:style>
+        <p:txBody>
+          <a:bodyPr rtlCol="0" anchor="ctr"/>
+          <a:lstStyle/>
+          <a:p>
+            <a:pPr algn="ctr"/>
+          </a:p>
+        </p:txBody>
+      </p:sp>
+      <p:sp>
+        <p:nvSpPr>
+          <p:cNvPr id="27" name="TextBox 26"/>
+          <p:cNvSpPr txBox="1"/>
+          <p:nvPr/>
+        </p:nvSpPr>
+        <p:spPr>
+          <a:xfrm>
+            <a:off x="1005840" y="3593592"/>
+            <a:ext cx="3657600" cy="182880"/>
+          </a:xfrm>
+          <a:prstGeom prst="rect">
+            <a:avLst/>
+          </a:prstGeom>
+          <a:noFill/>
+        </p:spPr>
+        <p:txBody>
+          <a:bodyPr wrap="square">
+            <a:spAutoFit/>
+          </a:bodyPr>
+          <a:lstStyle/>
+          <a:p>
+            <a:pPr algn="l">
+              <a:defRPr sz="900" b="1" i="0">
+                <a:solidFill>
+                  <a:srgbClr val="E51937"/>
+                </a:solidFill>
+                <a:latin typeface="Calibri"/>
+              </a:defRPr>
+            </a:pPr>
+            <a:r>
+              <a:t>THE UNLOCK</a:t>
+            </a:r>
+          </a:p>
+        </p:txBody>
+      </p:sp>
+      <p:sp>
+        <p:nvSpPr>
+          <p:cNvPr id="28" name="TextBox 27"/>
+          <p:cNvSpPr txBox="1"/>
+          <p:nvPr/>
+        </p:nvSpPr>
+        <p:spPr>
+          <a:xfrm>
+            <a:off x="1005840" y="3794760"/>
+            <a:ext cx="4572000" cy="320040"/>
+          </a:xfrm>
+          <a:prstGeom prst="rect">
+            <a:avLst/>
+          </a:prstGeom>
+          <a:noFill/>
+        </p:spPr>
+        <p:txBody>
+          <a:bodyPr wrap="square">
+            <a:spAutoFit/>
+          </a:bodyPr>
+          <a:lstStyle/>
+          <a:p>
+            <a:pPr algn="l">
+              <a:defRPr sz="1600" b="1" i="0">
+                <a:solidFill>
+                  <a:srgbClr val="1C1C1E"/>
+                </a:solidFill>
+                <a:latin typeface="Calibri"/>
+              </a:defRPr>
+            </a:pPr>
+            <a:r>
+              <a:t>AXS Intelligence Platform</a:t>
+            </a:r>
+          </a:p>
+        </p:txBody>
+      </p:sp>
+      <p:sp>
+        <p:nvSpPr>
+          <p:cNvPr id="29" name="TextBox 28"/>
+          <p:cNvSpPr txBox="1"/>
+          <p:nvPr/>
+        </p:nvSpPr>
+        <p:spPr>
+          <a:xfrm>
+            <a:off x="1005840" y="4160520"/>
+            <a:ext cx="9601200" cy="457200"/>
+          </a:xfrm>
+          <a:prstGeom prst="rect">
+            <a:avLst/>
+          </a:prstGeom>
+          <a:noFill/>
+        </p:spPr>
+        <p:txBody>
+          <a:bodyPr wrap="square">
+            <a:spAutoFit/>
+          </a:bodyPr>
+          <a:lstStyle/>
+          <a:p>
+            <a:pPr algn="l">
+              <a:defRPr sz="1200" b="0" i="0">
+                <a:solidFill>
+                  <a:srgbClr val="3A3A3C"/>
+                </a:solidFill>
+                <a:latin typeface="Calibri"/>
+              </a:defRPr>
+            </a:pPr>
+            <a:r>
+              <a:t>Unified rider dashboard: power, gearing, suspension, heart rate in one view. No competitor has the product breadth to build this.</a:t>
+            </a:r>
+          </a:p>
+        </p:txBody>
+      </p:sp>
+      <p:sp>
+        <p:nvSpPr>
+          <p:cNvPr id="30" name="Rounded Rectangle 29"/>
+          <p:cNvSpPr/>
+          <p:nvPr/>
+        </p:nvSpPr>
+        <p:spPr>
+          <a:xfrm>
+            <a:off x="731520" y="4892040"/>
+            <a:ext cx="3429000" cy="1051560"/>
           </a:xfrm>
           <a:prstGeom prst="roundRect">
             <a:avLst>
@@ -22252,28 +22565,28 @@
       </p:sp>
       <p:sp>
         <p:nvSpPr>
-          <p:cNvPr id="26" name="TextBox 25"/>
-          <p:cNvSpPr txBox="1"/>
-          <p:nvPr/>
-        </p:nvSpPr>
-        <p:spPr>
-          <a:xfrm>
-            <a:off x="960120" y="3611880"/>
-            <a:ext cx="4983480" cy="274320"/>
-          </a:xfrm>
-          <a:prstGeom prst="rect">
-            <a:avLst/>
-          </a:prstGeom>
-          <a:noFill/>
-        </p:spPr>
-        <p:txBody>
-          <a:bodyPr wrap="square">
-            <a:spAutoFit/>
-          </a:bodyPr>
-          <a:lstStyle/>
-          <a:p>
-            <a:pPr algn="l">
-              <a:defRPr sz="1300" b="1" i="0">
+          <p:cNvPr id="31" name="TextBox 30"/>
+          <p:cNvSpPr txBox="1"/>
+          <p:nvPr/>
+        </p:nvSpPr>
+        <p:spPr>
+          <a:xfrm>
+            <a:off x="914400" y="4983480"/>
+            <a:ext cx="3063240" cy="274320"/>
+          </a:xfrm>
+          <a:prstGeom prst="rect">
+            <a:avLst/>
+          </a:prstGeom>
+          <a:noFill/>
+        </p:spPr>
+        <p:txBody>
+          <a:bodyPr wrap="square">
+            <a:spAutoFit/>
+          </a:bodyPr>
+          <a:lstStyle/>
+          <a:p>
+            <a:pPr algn="l">
+              <a:defRPr sz="1200" b="1" i="0">
                 <a:solidFill>
                   <a:srgbClr val="1C1C1E"/>
                 </a:solidFill>
@@ -22281,35 +22594,35 @@
               </a:defRPr>
             </a:pPr>
             <a:r>
-              <a:t>AXS Intelligence Platform</a:t>
-            </a:r>
-          </a:p>
-        </p:txBody>
-      </p:sp>
-      <p:sp>
-        <p:nvSpPr>
-          <p:cNvPr id="27" name="TextBox 26"/>
-          <p:cNvSpPr txBox="1"/>
-          <p:nvPr/>
-        </p:nvSpPr>
-        <p:spPr>
-          <a:xfrm>
-            <a:off x="960120" y="3886200"/>
-            <a:ext cx="4983480" cy="548640"/>
-          </a:xfrm>
-          <a:prstGeom prst="rect">
-            <a:avLst/>
-          </a:prstGeom>
-          <a:noFill/>
-        </p:spPr>
-        <p:txBody>
-          <a:bodyPr wrap="square">
-            <a:spAutoFit/>
-          </a:bodyPr>
-          <a:lstStyle/>
-          <a:p>
-            <a:pPr algn="l">
-              <a:defRPr sz="1100" b="0" i="0">
+              <a:t>Predictive Maintenance</a:t>
+            </a:r>
+          </a:p>
+        </p:txBody>
+      </p:sp>
+      <p:sp>
+        <p:nvSpPr>
+          <p:cNvPr id="32" name="TextBox 31"/>
+          <p:cNvSpPr txBox="1"/>
+          <p:nvPr/>
+        </p:nvSpPr>
+        <p:spPr>
+          <a:xfrm>
+            <a:off x="914400" y="5257800"/>
+            <a:ext cx="3063240" cy="548640"/>
+          </a:xfrm>
+          <a:prstGeom prst="rect">
+            <a:avLst/>
+          </a:prstGeom>
+          <a:noFill/>
+        </p:spPr>
+        <p:txBody>
+          <a:bodyPr wrap="square">
+            <a:spAutoFit/>
+          </a:bodyPr>
+          <a:lstStyle/>
+          <a:p>
+            <a:pPr algn="l">
+              <a:defRPr sz="1000" b="0" i="0">
                 <a:solidFill>
                   <a:srgbClr val="3A3A3C"/>
                 </a:solidFill>
@@ -22317,21 +22630,21 @@
               </a:defRPr>
             </a:pPr>
             <a:r>
-              <a:t>Unified rider dashboard: power, gearing, suspension, heart rate in one view. No competitor has the product breadth to build this.</a:t>
-            </a:r>
-          </a:p>
-        </p:txBody>
-      </p:sp>
-      <p:sp>
-        <p:nvSpPr>
-          <p:cNvPr id="28" name="Rounded Rectangle 27"/>
+              <a:t>Connected components predict chain and brake pad replacement before failure. Installed base becomes recurring revenue.</a:t>
+            </a:r>
+          </a:p>
+        </p:txBody>
+      </p:sp>
+      <p:sp>
+        <p:nvSpPr>
+          <p:cNvPr id="33" name="Rounded Rectangle 32"/>
           <p:cNvSpPr/>
           <p:nvPr/>
         </p:nvSpPr>
         <p:spPr>
           <a:xfrm>
-            <a:off x="6400800" y="3520440"/>
-            <a:ext cx="5440680" cy="1051560"/>
+            <a:off x="4389120" y="4892040"/>
+            <a:ext cx="3429000" cy="1051560"/>
           </a:xfrm>
           <a:prstGeom prst="roundRect">
             <a:avLst>
@@ -22371,28 +22684,28 @@
       </p:sp>
       <p:sp>
         <p:nvSpPr>
-          <p:cNvPr id="29" name="TextBox 28"/>
-          <p:cNvSpPr txBox="1"/>
-          <p:nvPr/>
-        </p:nvSpPr>
-        <p:spPr>
-          <a:xfrm>
-            <a:off x="6629400" y="3611880"/>
-            <a:ext cx="4983480" cy="274320"/>
-          </a:xfrm>
-          <a:prstGeom prst="rect">
-            <a:avLst/>
-          </a:prstGeom>
-          <a:noFill/>
-        </p:spPr>
-        <p:txBody>
-          <a:bodyPr wrap="square">
-            <a:spAutoFit/>
-          </a:bodyPr>
-          <a:lstStyle/>
-          <a:p>
-            <a:pPr algn="l">
-              <a:defRPr sz="1300" b="1" i="0">
+          <p:cNvPr id="34" name="TextBox 33"/>
+          <p:cNvSpPr txBox="1"/>
+          <p:nvPr/>
+        </p:nvSpPr>
+        <p:spPr>
+          <a:xfrm>
+            <a:off x="4572000" y="4983480"/>
+            <a:ext cx="3063240" cy="274320"/>
+          </a:xfrm>
+          <a:prstGeom prst="rect">
+            <a:avLst/>
+          </a:prstGeom>
+          <a:noFill/>
+        </p:spPr>
+        <p:txBody>
+          <a:bodyPr wrap="square">
+            <a:spAutoFit/>
+          </a:bodyPr>
+          <a:lstStyle/>
+          <a:p>
+            <a:pPr algn="l">
+              <a:defRPr sz="1200" b="1" i="0">
                 <a:solidFill>
                   <a:srgbClr val="1C1C1E"/>
                 </a:solidFill>
@@ -22400,35 +22713,35 @@
               </a:defRPr>
             </a:pPr>
             <a:r>
-              <a:t>Predictive Maintenance</a:t>
-            </a:r>
-          </a:p>
-        </p:txBody>
-      </p:sp>
-      <p:sp>
-        <p:nvSpPr>
-          <p:cNvPr id="30" name="TextBox 29"/>
-          <p:cNvSpPr txBox="1"/>
-          <p:nvPr/>
-        </p:nvSpPr>
-        <p:spPr>
-          <a:xfrm>
-            <a:off x="6629400" y="3886200"/>
-            <a:ext cx="4983480" cy="548640"/>
-          </a:xfrm>
-          <a:prstGeom prst="rect">
-            <a:avLst/>
-          </a:prstGeom>
-          <a:noFill/>
-        </p:spPr>
-        <p:txBody>
-          <a:bodyPr wrap="square">
-            <a:spAutoFit/>
-          </a:bodyPr>
-          <a:lstStyle/>
-          <a:p>
-            <a:pPr algn="l">
-              <a:defRPr sz="1100" b="0" i="0">
+              <a:t>AI-Tuned Performance</a:t>
+            </a:r>
+          </a:p>
+        </p:txBody>
+      </p:sp>
+      <p:sp>
+        <p:nvSpPr>
+          <p:cNvPr id="35" name="TextBox 34"/>
+          <p:cNvSpPr txBox="1"/>
+          <p:nvPr/>
+        </p:nvSpPr>
+        <p:spPr>
+          <a:xfrm>
+            <a:off x="4572000" y="5257800"/>
+            <a:ext cx="3063240" cy="548640"/>
+          </a:xfrm>
+          <a:prstGeom prst="rect">
+            <a:avLst/>
+          </a:prstGeom>
+          <a:noFill/>
+        </p:spPr>
+        <p:txBody>
+          <a:bodyPr wrap="square">
+            <a:spAutoFit/>
+          </a:bodyPr>
+          <a:lstStyle/>
+          <a:p>
+            <a:pPr algn="l">
+              <a:defRPr sz="1000" b="0" i="0">
                 <a:solidFill>
                   <a:srgbClr val="3A3A3C"/>
                 </a:solidFill>
@@ -22436,21 +22749,21 @@
               </a:defRPr>
             </a:pPr>
             <a:r>
-              <a:t>Connected components predict chain and brake pad replacement before failure. Installed base becomes recurring revenue.</a:t>
-            </a:r>
-          </a:p>
-        </p:txBody>
-      </p:sp>
-      <p:sp>
-        <p:nvSpPr>
-          <p:cNvPr id="31" name="Rounded Rectangle 30"/>
+              <a:t>Suspension auto-adjusts to terrain. Shifting optimizes for rider power. Products improve continuously after purchase.</a:t>
+            </a:r>
+          </a:p>
+        </p:txBody>
+      </p:sp>
+      <p:sp>
+        <p:nvSpPr>
+          <p:cNvPr id="36" name="Rounded Rectangle 35"/>
           <p:cNvSpPr/>
           <p:nvPr/>
         </p:nvSpPr>
         <p:spPr>
           <a:xfrm>
-            <a:off x="731520" y="4754880"/>
-            <a:ext cx="5440680" cy="1051560"/>
+            <a:off x="8046720" y="4892040"/>
+            <a:ext cx="3429000" cy="1051560"/>
           </a:xfrm>
           <a:prstGeom prst="roundRect">
             <a:avLst>
@@ -22490,28 +22803,28 @@
       </p:sp>
       <p:sp>
         <p:nvSpPr>
-          <p:cNvPr id="32" name="TextBox 31"/>
-          <p:cNvSpPr txBox="1"/>
-          <p:nvPr/>
-        </p:nvSpPr>
-        <p:spPr>
-          <a:xfrm>
-            <a:off x="960120" y="4846320"/>
-            <a:ext cx="4983480" cy="274320"/>
-          </a:xfrm>
-          <a:prstGeom prst="rect">
-            <a:avLst/>
-          </a:prstGeom>
-          <a:noFill/>
-        </p:spPr>
-        <p:txBody>
-          <a:bodyPr wrap="square">
-            <a:spAutoFit/>
-          </a:bodyPr>
-          <a:lstStyle/>
-          <a:p>
-            <a:pPr algn="l">
-              <a:defRPr sz="1300" b="1" i="0">
+          <p:cNvPr id="37" name="TextBox 36"/>
+          <p:cNvSpPr txBox="1"/>
+          <p:nvPr/>
+        </p:nvSpPr>
+        <p:spPr>
+          <a:xfrm>
+            <a:off x="8229600" y="4983480"/>
+            <a:ext cx="3063240" cy="274320"/>
+          </a:xfrm>
+          <a:prstGeom prst="rect">
+            <a:avLst/>
+          </a:prstGeom>
+          <a:noFill/>
+        </p:spPr>
+        <p:txBody>
+          <a:bodyPr wrap="square">
+            <a:spAutoFit/>
+          </a:bodyPr>
+          <a:lstStyle/>
+          <a:p>
+            <a:pPr algn="l">
+              <a:defRPr sz="1200" b="1" i="0">
                 <a:solidFill>
                   <a:srgbClr val="1C1C1E"/>
                 </a:solidFill>
@@ -22519,35 +22832,35 @@
               </a:defRPr>
             </a:pPr>
             <a:r>
-              <a:t>AI-Tuned Performance</a:t>
-            </a:r>
-          </a:p>
-        </p:txBody>
-      </p:sp>
-      <p:sp>
-        <p:nvSpPr>
-          <p:cNvPr id="33" name="TextBox 32"/>
-          <p:cNvSpPr txBox="1"/>
-          <p:nvPr/>
-        </p:nvSpPr>
-        <p:spPr>
-          <a:xfrm>
-            <a:off x="960120" y="5120640"/>
-            <a:ext cx="4983480" cy="548640"/>
-          </a:xfrm>
-          <a:prstGeom prst="rect">
-            <a:avLst/>
-          </a:prstGeom>
-          <a:noFill/>
-        </p:spPr>
-        <p:txBody>
-          <a:bodyPr wrap="square">
-            <a:spAutoFit/>
-          </a:bodyPr>
-          <a:lstStyle/>
-          <a:p>
-            <a:pPr algn="l">
-              <a:defRPr sz="1100" b="0" i="0">
+              <a:t>Dealer Intelligence</a:t>
+            </a:r>
+          </a:p>
+        </p:txBody>
+      </p:sp>
+      <p:sp>
+        <p:nvSpPr>
+          <p:cNvPr id="38" name="TextBox 37"/>
+          <p:cNvSpPr txBox="1"/>
+          <p:nvPr/>
+        </p:nvSpPr>
+        <p:spPr>
+          <a:xfrm>
+            <a:off x="8229600" y="5257800"/>
+            <a:ext cx="3063240" cy="548640"/>
+          </a:xfrm>
+          <a:prstGeom prst="rect">
+            <a:avLst/>
+          </a:prstGeom>
+          <a:noFill/>
+        </p:spPr>
+        <p:txBody>
+          <a:bodyPr wrap="square">
+            <a:spAutoFit/>
+          </a:bodyPr>
+          <a:lstStyle/>
+          <a:p>
+            <a:pPr algn="l">
+              <a:defRPr sz="1000" b="0" i="0">
                 <a:solidFill>
                   <a:srgbClr val="3A3A3C"/>
                 </a:solidFill>
@@ -22555,25 +22868,25 @@
               </a:defRPr>
             </a:pPr>
             <a:r>
-              <a:t>Suspension auto-adjusts to terrain. Shifting optimizes for rider power. Products improve continuously after purchase.</a:t>
-            </a:r>
-          </a:p>
-        </p:txBody>
-      </p:sp>
-      <p:sp>
-        <p:nvSpPr>
-          <p:cNvPr id="34" name="Rounded Rectangle 33"/>
+              <a:t>Telemetry tells dealers which parts approach end-of-life in their area. Proactive ordering replaces reactive.</a:t>
+            </a:r>
+          </a:p>
+        </p:txBody>
+      </p:sp>
+      <p:sp>
+        <p:nvSpPr>
+          <p:cNvPr id="39" name="Rounded Rectangle 38"/>
           <p:cNvSpPr/>
           <p:nvPr/>
         </p:nvSpPr>
         <p:spPr>
           <a:xfrm>
-            <a:off x="6400800" y="4754880"/>
-            <a:ext cx="5440680" cy="1051560"/>
+            <a:off x="731520" y="6080760"/>
+            <a:ext cx="10698480" cy="365760"/>
           </a:xfrm>
           <a:prstGeom prst="roundRect">
             <a:avLst>
-              <a:gd name="adj" fmla="val 4000"/>
+              <a:gd name="adj" fmla="val 10000"/>
             </a:avLst>
           </a:prstGeom>
           <a:solidFill>
@@ -22609,126 +22922,7 @@
       </p:sp>
       <p:sp>
         <p:nvSpPr>
-          <p:cNvPr id="35" name="TextBox 34"/>
-          <p:cNvSpPr txBox="1"/>
-          <p:nvPr/>
-        </p:nvSpPr>
-        <p:spPr>
-          <a:xfrm>
-            <a:off x="6629400" y="4846320"/>
-            <a:ext cx="4983480" cy="274320"/>
-          </a:xfrm>
-          <a:prstGeom prst="rect">
-            <a:avLst/>
-          </a:prstGeom>
-          <a:noFill/>
-        </p:spPr>
-        <p:txBody>
-          <a:bodyPr wrap="square">
-            <a:spAutoFit/>
-          </a:bodyPr>
-          <a:lstStyle/>
-          <a:p>
-            <a:pPr algn="l">
-              <a:defRPr sz="1300" b="1" i="0">
-                <a:solidFill>
-                  <a:srgbClr val="1C1C1E"/>
-                </a:solidFill>
-                <a:latin typeface="Calibri"/>
-              </a:defRPr>
-            </a:pPr>
-            <a:r>
-              <a:t>Dealer Intelligence</a:t>
-            </a:r>
-          </a:p>
-        </p:txBody>
-      </p:sp>
-      <p:sp>
-        <p:nvSpPr>
-          <p:cNvPr id="36" name="TextBox 35"/>
-          <p:cNvSpPr txBox="1"/>
-          <p:nvPr/>
-        </p:nvSpPr>
-        <p:spPr>
-          <a:xfrm>
-            <a:off x="6629400" y="5120640"/>
-            <a:ext cx="4983480" cy="548640"/>
-          </a:xfrm>
-          <a:prstGeom prst="rect">
-            <a:avLst/>
-          </a:prstGeom>
-          <a:noFill/>
-        </p:spPr>
-        <p:txBody>
-          <a:bodyPr wrap="square">
-            <a:spAutoFit/>
-          </a:bodyPr>
-          <a:lstStyle/>
-          <a:p>
-            <a:pPr algn="l">
-              <a:defRPr sz="1100" b="0" i="0">
-                <a:solidFill>
-                  <a:srgbClr val="3A3A3C"/>
-                </a:solidFill>
-                <a:latin typeface="Calibri"/>
-              </a:defRPr>
-            </a:pPr>
-            <a:r>
-              <a:t>Telemetry tells dealers which parts approach end-of-life in their area. Proactive ordering replaces reactive.</a:t>
-            </a:r>
-          </a:p>
-        </p:txBody>
-      </p:sp>
-      <p:sp>
-        <p:nvSpPr>
-          <p:cNvPr id="37" name="Rounded Rectangle 36"/>
-          <p:cNvSpPr/>
-          <p:nvPr/>
-        </p:nvSpPr>
-        <p:spPr>
-          <a:xfrm>
-            <a:off x="731520" y="6080760"/>
-            <a:ext cx="10698480" cy="365760"/>
-          </a:xfrm>
-          <a:prstGeom prst="roundRect">
-            <a:avLst>
-              <a:gd name="adj" fmla="val 10000"/>
-            </a:avLst>
-          </a:prstGeom>
-          <a:solidFill>
-            <a:srgbClr val="FFFFFF"/>
-          </a:solidFill>
-          <a:ln w="12700">
-            <a:solidFill>
-              <a:srgbClr val="E0E0DE"/>
-            </a:solidFill>
-          </a:ln>
-        </p:spPr>
-        <p:style>
-          <a:lnRef idx="1">
-            <a:schemeClr val="accent1"/>
-          </a:lnRef>
-          <a:fillRef idx="3">
-            <a:schemeClr val="accent1"/>
-          </a:fillRef>
-          <a:effectRef idx="2">
-            <a:schemeClr val="accent1"/>
-          </a:effectRef>
-          <a:fontRef idx="minor">
-            <a:schemeClr val="lt1"/>
-          </a:fontRef>
-        </p:style>
-        <p:txBody>
-          <a:bodyPr rtlCol="0" anchor="ctr"/>
-          <a:lstStyle/>
-          <a:p>
-            <a:pPr algn="ctr"/>
-          </a:p>
-        </p:txBody>
-      </p:sp>
-      <p:sp>
-        <p:nvSpPr>
-          <p:cNvPr id="38" name="Rectangle 37"/>
+          <p:cNvPr id="40" name="Rectangle 39"/>
           <p:cNvSpPr/>
           <p:nvPr/>
         </p:nvSpPr>
@@ -22771,7 +22965,7 @@
       </p:sp>
       <p:sp>
         <p:nvSpPr>
-          <p:cNvPr id="39" name="TextBox 38"/>
+          <p:cNvPr id="41" name="TextBox 40"/>
           <p:cNvSpPr txBox="1"/>
           <p:nvPr/>
         </p:nvSpPr>
@@ -22807,7 +23001,7 @@
       </p:sp>
       <p:sp>
         <p:nvSpPr>
-          <p:cNvPr id="40" name="TextBox 39"/>
+          <p:cNvPr id="42" name="TextBox 41"/>
           <p:cNvSpPr txBox="1"/>
           <p:nvPr/>
         </p:nvSpPr>
@@ -22843,7 +23037,7 @@
       </p:sp>
       <p:sp>
         <p:nvSpPr>
-          <p:cNvPr id="41" name="TextBox 40"/>
+          <p:cNvPr id="43" name="TextBox 42"/>
           <p:cNvSpPr txBox="1"/>
           <p:nvPr/>
         </p:nvSpPr>

--- a/deliverables/SRAM_AI_Adoption_Playbook.pptx
+++ b/deliverables/SRAM_AI_Adoption_Playbook.pptx
@@ -14794,7 +14794,7 @@
         <p:spPr>
           <a:xfrm>
             <a:off x="731520" y="2011680"/>
-            <a:ext cx="1592580" cy="2560320"/>
+            <a:ext cx="1592580" cy="2194560"/>
           </a:xfrm>
           <a:prstGeom prst="roundRect">
             <a:avLst>
@@ -14840,8 +14840,8 @@
         </p:nvSpPr>
         <p:spPr>
           <a:xfrm>
-            <a:off x="731520" y="2240280"/>
-            <a:ext cx="1592580" cy="640080"/>
+            <a:off x="731520" y="2194560"/>
+            <a:ext cx="1592580" cy="228600"/>
           </a:xfrm>
           <a:prstGeom prst="rect">
             <a:avLst/>
@@ -14855,7 +14855,43 @@
           <a:lstStyle/>
           <a:p>
             <a:pPr algn="ctr">
-              <a:defRPr sz="3600" b="0" i="0">
+              <a:defRPr sz="1000" b="1" i="0">
+                <a:solidFill>
+                  <a:srgbClr val="767676"/>
+                </a:solidFill>
+                <a:latin typeface="Calibri"/>
+              </a:defRPr>
+            </a:pPr>
+            <a:r>
+              <a:t>SRAM</a:t>
+            </a:r>
+          </a:p>
+        </p:txBody>
+      </p:sp>
+      <p:sp>
+        <p:nvSpPr>
+          <p:cNvPr id="8" name="TextBox 7"/>
+          <p:cNvSpPr txBox="1"/>
+          <p:nvPr/>
+        </p:nvSpPr>
+        <p:spPr>
+          <a:xfrm>
+            <a:off x="731520" y="2514600"/>
+            <a:ext cx="1592580" cy="365760"/>
+          </a:xfrm>
+          <a:prstGeom prst="rect">
+            <a:avLst/>
+          </a:prstGeom>
+          <a:noFill/>
+        </p:spPr>
+        <p:txBody>
+          <a:bodyPr wrap="square">
+            <a:spAutoFit/>
+          </a:bodyPr>
+          <a:lstStyle/>
+          <a:p>
+            <a:pPr algn="ctr">
+              <a:defRPr sz="1800" b="1" i="0">
                 <a:solidFill>
                   <a:srgbClr val="1C1C1E"/>
                 </a:solidFill>
@@ -14863,42 +14899,6 @@
               </a:defRPr>
             </a:pPr>
             <a:r>
-              <a:t>⚙️</a:t>
-            </a:r>
-          </a:p>
-        </p:txBody>
-      </p:sp>
-      <p:sp>
-        <p:nvSpPr>
-          <p:cNvPr id="8" name="TextBox 7"/>
-          <p:cNvSpPr txBox="1"/>
-          <p:nvPr/>
-        </p:nvSpPr>
-        <p:spPr>
-          <a:xfrm>
-            <a:off x="731520" y="2926080"/>
-            <a:ext cx="1592580" cy="365760"/>
-          </a:xfrm>
-          <a:prstGeom prst="rect">
-            <a:avLst/>
-          </a:prstGeom>
-          <a:noFill/>
-        </p:spPr>
-        <p:txBody>
-          <a:bodyPr wrap="square">
-            <a:spAutoFit/>
-          </a:bodyPr>
-          <a:lstStyle/>
-          <a:p>
-            <a:pPr algn="ctr">
-              <a:defRPr sz="1600" b="1" i="0">
-                <a:solidFill>
-                  <a:srgbClr val="1C1C1E"/>
-                </a:solidFill>
-                <a:latin typeface="Calibri"/>
-              </a:defRPr>
-            </a:pPr>
-            <a:r>
               <a:t>Drivetrains</a:t>
             </a:r>
           </a:p>
@@ -14912,7 +14912,7 @@
         </p:nvSpPr>
         <p:spPr>
           <a:xfrm>
-            <a:off x="868680" y="3383280"/>
+            <a:off x="868680" y="3017520"/>
             <a:ext cx="1318260" cy="914400"/>
           </a:xfrm>
           <a:prstGeom prst="rect">
@@ -14953,7 +14953,7 @@
         <p:spPr>
           <a:xfrm>
             <a:off x="2552700" y="2011680"/>
-            <a:ext cx="1592580" cy="2560320"/>
+            <a:ext cx="1592580" cy="2194560"/>
           </a:xfrm>
           <a:prstGeom prst="roundRect">
             <a:avLst>
@@ -14999,8 +14999,8 @@
         </p:nvSpPr>
         <p:spPr>
           <a:xfrm>
-            <a:off x="2552700" y="2240280"/>
-            <a:ext cx="1592580" cy="640080"/>
+            <a:off x="2552700" y="2194560"/>
+            <a:ext cx="1592580" cy="228600"/>
           </a:xfrm>
           <a:prstGeom prst="rect">
             <a:avLst/>
@@ -15014,7 +15014,43 @@
           <a:lstStyle/>
           <a:p>
             <a:pPr algn="ctr">
-              <a:defRPr sz="3600" b="0" i="0">
+              <a:defRPr sz="1000" b="1" i="0">
+                <a:solidFill>
+                  <a:srgbClr val="767676"/>
+                </a:solidFill>
+                <a:latin typeface="Calibri"/>
+              </a:defRPr>
+            </a:pPr>
+            <a:r>
+              <a:t>SRAM</a:t>
+            </a:r>
+          </a:p>
+        </p:txBody>
+      </p:sp>
+      <p:sp>
+        <p:nvSpPr>
+          <p:cNvPr id="12" name="TextBox 11"/>
+          <p:cNvSpPr txBox="1"/>
+          <p:nvPr/>
+        </p:nvSpPr>
+        <p:spPr>
+          <a:xfrm>
+            <a:off x="2552700" y="2514600"/>
+            <a:ext cx="1592580" cy="365760"/>
+          </a:xfrm>
+          <a:prstGeom prst="rect">
+            <a:avLst/>
+          </a:prstGeom>
+          <a:noFill/>
+        </p:spPr>
+        <p:txBody>
+          <a:bodyPr wrap="square">
+            <a:spAutoFit/>
+          </a:bodyPr>
+          <a:lstStyle/>
+          <a:p>
+            <a:pPr algn="ctr">
+              <a:defRPr sz="1800" b="1" i="0">
                 <a:solidFill>
                   <a:srgbClr val="1C1C1E"/>
                 </a:solidFill>
@@ -15022,42 +15058,6 @@
               </a:defRPr>
             </a:pPr>
             <a:r>
-              <a:t>✋</a:t>
-            </a:r>
-          </a:p>
-        </p:txBody>
-      </p:sp>
-      <p:sp>
-        <p:nvSpPr>
-          <p:cNvPr id="12" name="TextBox 11"/>
-          <p:cNvSpPr txBox="1"/>
-          <p:nvPr/>
-        </p:nvSpPr>
-        <p:spPr>
-          <a:xfrm>
-            <a:off x="2552700" y="2926080"/>
-            <a:ext cx="1592580" cy="365760"/>
-          </a:xfrm>
-          <a:prstGeom prst="rect">
-            <a:avLst/>
-          </a:prstGeom>
-          <a:noFill/>
-        </p:spPr>
-        <p:txBody>
-          <a:bodyPr wrap="square">
-            <a:spAutoFit/>
-          </a:bodyPr>
-          <a:lstStyle/>
-          <a:p>
-            <a:pPr algn="ctr">
-              <a:defRPr sz="1600" b="1" i="0">
-                <a:solidFill>
-                  <a:srgbClr val="1C1C1E"/>
-                </a:solidFill>
-                <a:latin typeface="Calibri"/>
-              </a:defRPr>
-            </a:pPr>
-            <a:r>
               <a:t>Brakes</a:t>
             </a:r>
           </a:p>
@@ -15071,7 +15071,7 @@
         </p:nvSpPr>
         <p:spPr>
           <a:xfrm>
-            <a:off x="2689860" y="3383280"/>
+            <a:off x="2689860" y="3017520"/>
             <a:ext cx="1318260" cy="914400"/>
           </a:xfrm>
           <a:prstGeom prst="rect">
@@ -15112,7 +15112,7 @@
         <p:spPr>
           <a:xfrm>
             <a:off x="4373880" y="2011680"/>
-            <a:ext cx="1592580" cy="2560320"/>
+            <a:ext cx="1592580" cy="2194560"/>
           </a:xfrm>
           <a:prstGeom prst="roundRect">
             <a:avLst>
@@ -15158,8 +15158,8 @@
         </p:nvSpPr>
         <p:spPr>
           <a:xfrm>
-            <a:off x="4373880" y="2240280"/>
-            <a:ext cx="1592580" cy="640080"/>
+            <a:off x="4373880" y="2194560"/>
+            <a:ext cx="1592580" cy="228600"/>
           </a:xfrm>
           <a:prstGeom prst="rect">
             <a:avLst/>
@@ -15173,7 +15173,43 @@
           <a:lstStyle/>
           <a:p>
             <a:pPr algn="ctr">
-              <a:defRPr sz="3600" b="0" i="0">
+              <a:defRPr sz="1000" b="1" i="0">
+                <a:solidFill>
+                  <a:srgbClr val="767676"/>
+                </a:solidFill>
+                <a:latin typeface="Calibri"/>
+              </a:defRPr>
+            </a:pPr>
+            <a:r>
+              <a:t>RockShox</a:t>
+            </a:r>
+          </a:p>
+        </p:txBody>
+      </p:sp>
+      <p:sp>
+        <p:nvSpPr>
+          <p:cNvPr id="16" name="TextBox 15"/>
+          <p:cNvSpPr txBox="1"/>
+          <p:nvPr/>
+        </p:nvSpPr>
+        <p:spPr>
+          <a:xfrm>
+            <a:off x="4373880" y="2514600"/>
+            <a:ext cx="1592580" cy="365760"/>
+          </a:xfrm>
+          <a:prstGeom prst="rect">
+            <a:avLst/>
+          </a:prstGeom>
+          <a:noFill/>
+        </p:spPr>
+        <p:txBody>
+          <a:bodyPr wrap="square">
+            <a:spAutoFit/>
+          </a:bodyPr>
+          <a:lstStyle/>
+          <a:p>
+            <a:pPr algn="ctr">
+              <a:defRPr sz="1800" b="1" i="0">
                 <a:solidFill>
                   <a:srgbClr val="1C1C1E"/>
                 </a:solidFill>
@@ -15181,42 +15217,6 @@
               </a:defRPr>
             </a:pPr>
             <a:r>
-              <a:t>🏋</a:t>
-            </a:r>
-          </a:p>
-        </p:txBody>
-      </p:sp>
-      <p:sp>
-        <p:nvSpPr>
-          <p:cNvPr id="16" name="TextBox 15"/>
-          <p:cNvSpPr txBox="1"/>
-          <p:nvPr/>
-        </p:nvSpPr>
-        <p:spPr>
-          <a:xfrm>
-            <a:off x="4373880" y="2926080"/>
-            <a:ext cx="1592580" cy="365760"/>
-          </a:xfrm>
-          <a:prstGeom prst="rect">
-            <a:avLst/>
-          </a:prstGeom>
-          <a:noFill/>
-        </p:spPr>
-        <p:txBody>
-          <a:bodyPr wrap="square">
-            <a:spAutoFit/>
-          </a:bodyPr>
-          <a:lstStyle/>
-          <a:p>
-            <a:pPr algn="ctr">
-              <a:defRPr sz="1600" b="1" i="0">
-                <a:solidFill>
-                  <a:srgbClr val="1C1C1E"/>
-                </a:solidFill>
-                <a:latin typeface="Calibri"/>
-              </a:defRPr>
-            </a:pPr>
-            <a:r>
               <a:t>Suspension</a:t>
             </a:r>
           </a:p>
@@ -15230,7 +15230,7 @@
         </p:nvSpPr>
         <p:spPr>
           <a:xfrm>
-            <a:off x="4511040" y="3383280"/>
+            <a:off x="4511040" y="3017520"/>
             <a:ext cx="1318260" cy="914400"/>
           </a:xfrm>
           <a:prstGeom prst="rect">
@@ -15253,11 +15253,11 @@
               </a:defRPr>
             </a:pPr>
             <a:r>
-              <a:t>RockShox forks that</a:t>
+              <a:t>Forks that absorb</a:t>
             </a:r>
             <a:br/>
             <a:r>
-              <a:t>absorb bumps on trails</a:t>
+              <a:t>bumps on trails</a:t>
             </a:r>
           </a:p>
         </p:txBody>
@@ -15271,7 +15271,7 @@
         <p:spPr>
           <a:xfrm>
             <a:off x="6195060" y="2011680"/>
-            <a:ext cx="1592580" cy="2560320"/>
+            <a:ext cx="1592580" cy="2194560"/>
           </a:xfrm>
           <a:prstGeom prst="roundRect">
             <a:avLst>
@@ -15317,8 +15317,8 @@
         </p:nvSpPr>
         <p:spPr>
           <a:xfrm>
-            <a:off x="6195060" y="2240280"/>
-            <a:ext cx="1592580" cy="640080"/>
+            <a:off x="6195060" y="2194560"/>
+            <a:ext cx="1592580" cy="228600"/>
           </a:xfrm>
           <a:prstGeom prst="rect">
             <a:avLst/>
@@ -15332,7 +15332,43 @@
           <a:lstStyle/>
           <a:p>
             <a:pPr algn="ctr">
-              <a:defRPr sz="3600" b="0" i="0">
+              <a:defRPr sz="1000" b="1" i="0">
+                <a:solidFill>
+                  <a:srgbClr val="767676"/>
+                </a:solidFill>
+                <a:latin typeface="Calibri"/>
+              </a:defRPr>
+            </a:pPr>
+            <a:r>
+              <a:t>Zipp</a:t>
+            </a:r>
+          </a:p>
+        </p:txBody>
+      </p:sp>
+      <p:sp>
+        <p:nvSpPr>
+          <p:cNvPr id="20" name="TextBox 19"/>
+          <p:cNvSpPr txBox="1"/>
+          <p:nvPr/>
+        </p:nvSpPr>
+        <p:spPr>
+          <a:xfrm>
+            <a:off x="6195060" y="2514600"/>
+            <a:ext cx="1592580" cy="365760"/>
+          </a:xfrm>
+          <a:prstGeom prst="rect">
+            <a:avLst/>
+          </a:prstGeom>
+          <a:noFill/>
+        </p:spPr>
+        <p:txBody>
+          <a:bodyPr wrap="square">
+            <a:spAutoFit/>
+          </a:bodyPr>
+          <a:lstStyle/>
+          <a:p>
+            <a:pPr algn="ctr">
+              <a:defRPr sz="1800" b="1" i="0">
                 <a:solidFill>
                   <a:srgbClr val="1C1C1E"/>
                 </a:solidFill>
@@ -15340,42 +15376,6 @@
               </a:defRPr>
             </a:pPr>
             <a:r>
-              <a:t>💨</a:t>
-            </a:r>
-          </a:p>
-        </p:txBody>
-      </p:sp>
-      <p:sp>
-        <p:nvSpPr>
-          <p:cNvPr id="20" name="TextBox 19"/>
-          <p:cNvSpPr txBox="1"/>
-          <p:nvPr/>
-        </p:nvSpPr>
-        <p:spPr>
-          <a:xfrm>
-            <a:off x="6195060" y="2926080"/>
-            <a:ext cx="1592580" cy="365760"/>
-          </a:xfrm>
-          <a:prstGeom prst="rect">
-            <a:avLst/>
-          </a:prstGeom>
-          <a:noFill/>
-        </p:spPr>
-        <p:txBody>
-          <a:bodyPr wrap="square">
-            <a:spAutoFit/>
-          </a:bodyPr>
-          <a:lstStyle/>
-          <a:p>
-            <a:pPr algn="ctr">
-              <a:defRPr sz="1600" b="1" i="0">
-                <a:solidFill>
-                  <a:srgbClr val="1C1C1E"/>
-                </a:solidFill>
-                <a:latin typeface="Calibri"/>
-              </a:defRPr>
-            </a:pPr>
-            <a:r>
               <a:t>Wheels</a:t>
             </a:r>
           </a:p>
@@ -15389,7 +15389,7 @@
         </p:nvSpPr>
         <p:spPr>
           <a:xfrm>
-            <a:off x="6332220" y="3383280"/>
+            <a:off x="6332220" y="3017520"/>
             <a:ext cx="1318260" cy="914400"/>
           </a:xfrm>
           <a:prstGeom prst="rect">
@@ -15412,7 +15412,7 @@
               </a:defRPr>
             </a:pPr>
             <a:r>
-              <a:t>Zipp aero wheels built</a:t>
+              <a:t>Aero wheels built</a:t>
             </a:r>
             <a:br/>
             <a:r>
@@ -15430,7 +15430,7 @@
         <p:spPr>
           <a:xfrm>
             <a:off x="8016240" y="2011680"/>
-            <a:ext cx="1592580" cy="2560320"/>
+            <a:ext cx="1592580" cy="2194560"/>
           </a:xfrm>
           <a:prstGeom prst="roundRect">
             <a:avLst>
@@ -15476,8 +15476,8 @@
         </p:nvSpPr>
         <p:spPr>
           <a:xfrm>
-            <a:off x="8016240" y="2240280"/>
-            <a:ext cx="1592580" cy="640080"/>
+            <a:off x="8016240" y="2194560"/>
+            <a:ext cx="1592580" cy="228600"/>
           </a:xfrm>
           <a:prstGeom prst="rect">
             <a:avLst/>
@@ -15491,7 +15491,43 @@
           <a:lstStyle/>
           <a:p>
             <a:pPr algn="ctr">
-              <a:defRPr sz="3600" b="0" i="0">
+              <a:defRPr sz="1000" b="1" i="0">
+                <a:solidFill>
+                  <a:srgbClr val="767676"/>
+                </a:solidFill>
+                <a:latin typeface="Calibri"/>
+              </a:defRPr>
+            </a:pPr>
+            <a:r>
+              <a:t>Quarq</a:t>
+            </a:r>
+          </a:p>
+        </p:txBody>
+      </p:sp>
+      <p:sp>
+        <p:nvSpPr>
+          <p:cNvPr id="24" name="TextBox 23"/>
+          <p:cNvSpPr txBox="1"/>
+          <p:nvPr/>
+        </p:nvSpPr>
+        <p:spPr>
+          <a:xfrm>
+            <a:off x="8016240" y="2514600"/>
+            <a:ext cx="1592580" cy="365760"/>
+          </a:xfrm>
+          <a:prstGeom prst="rect">
+            <a:avLst/>
+          </a:prstGeom>
+          <a:noFill/>
+        </p:spPr>
+        <p:txBody>
+          <a:bodyPr wrap="square">
+            <a:spAutoFit/>
+          </a:bodyPr>
+          <a:lstStyle/>
+          <a:p>
+            <a:pPr algn="ctr">
+              <a:defRPr sz="1800" b="1" i="0">
                 <a:solidFill>
                   <a:srgbClr val="1C1C1E"/>
                 </a:solidFill>
@@ -15499,42 +15535,6 @@
               </a:defRPr>
             </a:pPr>
             <a:r>
-              <a:t>📊</a:t>
-            </a:r>
-          </a:p>
-        </p:txBody>
-      </p:sp>
-      <p:sp>
-        <p:nvSpPr>
-          <p:cNvPr id="24" name="TextBox 23"/>
-          <p:cNvSpPr txBox="1"/>
-          <p:nvPr/>
-        </p:nvSpPr>
-        <p:spPr>
-          <a:xfrm>
-            <a:off x="8016240" y="2926080"/>
-            <a:ext cx="1592580" cy="365760"/>
-          </a:xfrm>
-          <a:prstGeom prst="rect">
-            <a:avLst/>
-          </a:prstGeom>
-          <a:noFill/>
-        </p:spPr>
-        <p:txBody>
-          <a:bodyPr wrap="square">
-            <a:spAutoFit/>
-          </a:bodyPr>
-          <a:lstStyle/>
-          <a:p>
-            <a:pPr algn="ctr">
-              <a:defRPr sz="1600" b="1" i="0">
-                <a:solidFill>
-                  <a:srgbClr val="1C1C1E"/>
-                </a:solidFill>
-                <a:latin typeface="Calibri"/>
-              </a:defRPr>
-            </a:pPr>
-            <a:r>
               <a:t>Sensors</a:t>
             </a:r>
           </a:p>
@@ -15548,7 +15548,7 @@
         </p:nvSpPr>
         <p:spPr>
           <a:xfrm>
-            <a:off x="8153400" y="3383280"/>
+            <a:off x="8153400" y="3017520"/>
             <a:ext cx="1318260" cy="914400"/>
           </a:xfrm>
           <a:prstGeom prst="rect">
@@ -15571,11 +15571,11 @@
               </a:defRPr>
             </a:pPr>
             <a:r>
-              <a:t>Quarq power meters</a:t>
+              <a:t>Power meters that</a:t>
             </a:r>
             <a:br/>
             <a:r>
-              <a:t>that measure performance</a:t>
+              <a:t>measure performance</a:t>
             </a:r>
           </a:p>
         </p:txBody>
@@ -15589,7 +15589,7 @@
         <p:spPr>
           <a:xfrm>
             <a:off x="9837420" y="2011680"/>
-            <a:ext cx="1592580" cy="2560320"/>
+            <a:ext cx="1592580" cy="2194560"/>
           </a:xfrm>
           <a:prstGeom prst="roundRect">
             <a:avLst>
@@ -15635,8 +15635,8 @@
         </p:nvSpPr>
         <p:spPr>
           <a:xfrm>
-            <a:off x="9837420" y="2240280"/>
-            <a:ext cx="1592580" cy="640080"/>
+            <a:off x="9837420" y="2194560"/>
+            <a:ext cx="1592580" cy="228600"/>
           </a:xfrm>
           <a:prstGeom prst="rect">
             <a:avLst/>
@@ -15650,7 +15650,43 @@
           <a:lstStyle/>
           <a:p>
             <a:pPr algn="ctr">
-              <a:defRPr sz="3600" b="0" i="0">
+              <a:defRPr sz="1000" b="1" i="0">
+                <a:solidFill>
+                  <a:srgbClr val="767676"/>
+                </a:solidFill>
+                <a:latin typeface="Calibri"/>
+              </a:defRPr>
+            </a:pPr>
+            <a:r>
+              <a:t>AXS</a:t>
+            </a:r>
+          </a:p>
+        </p:txBody>
+      </p:sp>
+      <p:sp>
+        <p:nvSpPr>
+          <p:cNvPr id="28" name="TextBox 27"/>
+          <p:cNvSpPr txBox="1"/>
+          <p:nvPr/>
+        </p:nvSpPr>
+        <p:spPr>
+          <a:xfrm>
+            <a:off x="9837420" y="2514600"/>
+            <a:ext cx="1592580" cy="365760"/>
+          </a:xfrm>
+          <a:prstGeom prst="rect">
+            <a:avLst/>
+          </a:prstGeom>
+          <a:noFill/>
+        </p:spPr>
+        <p:txBody>
+          <a:bodyPr wrap="square">
+            <a:spAutoFit/>
+          </a:bodyPr>
+          <a:lstStyle/>
+          <a:p>
+            <a:pPr algn="ctr">
+              <a:defRPr sz="1800" b="1" i="0">
                 <a:solidFill>
                   <a:srgbClr val="1C1C1E"/>
                 </a:solidFill>
@@ -15658,42 +15694,6 @@
               </a:defRPr>
             </a:pPr>
             <a:r>
-              <a:t>📱</a:t>
-            </a:r>
-          </a:p>
-        </p:txBody>
-      </p:sp>
-      <p:sp>
-        <p:nvSpPr>
-          <p:cNvPr id="28" name="TextBox 27"/>
-          <p:cNvSpPr txBox="1"/>
-          <p:nvPr/>
-        </p:nvSpPr>
-        <p:spPr>
-          <a:xfrm>
-            <a:off x="9837420" y="2926080"/>
-            <a:ext cx="1592580" cy="365760"/>
-          </a:xfrm>
-          <a:prstGeom prst="rect">
-            <a:avLst/>
-          </a:prstGeom>
-          <a:noFill/>
-        </p:spPr>
-        <p:txBody>
-          <a:bodyPr wrap="square">
-            <a:spAutoFit/>
-          </a:bodyPr>
-          <a:lstStyle/>
-          <a:p>
-            <a:pPr algn="ctr">
-              <a:defRPr sz="1600" b="1" i="0">
-                <a:solidFill>
-                  <a:srgbClr val="1C1C1E"/>
-                </a:solidFill>
-                <a:latin typeface="Calibri"/>
-              </a:defRPr>
-            </a:pPr>
-            <a:r>
               <a:t>App</a:t>
             </a:r>
           </a:p>
@@ -15707,7 +15707,7 @@
         </p:nvSpPr>
         <p:spPr>
           <a:xfrm>
-            <a:off x="9974580" y="3383280"/>
+            <a:off x="9974580" y="3017520"/>
             <a:ext cx="1318260" cy="914400"/>
           </a:xfrm>
           <a:prstGeom prst="rect">
@@ -15730,11 +15730,11 @@
               </a:defRPr>
             </a:pPr>
             <a:r>
-              <a:t>AXS app that connects</a:t>
+              <a:t>Connects all components</a:t>
             </a:r>
             <a:br/>
             <a:r>
-              <a:t>all components digitally</a:t>
+              <a:t>into one digital ecosystem</a:t>
             </a:r>
           </a:p>
         </p:txBody>
@@ -15747,7 +15747,7 @@
         </p:nvSpPr>
         <p:spPr>
           <a:xfrm>
-            <a:off x="731520" y="4937760"/>
+            <a:off x="731520" y="4572000"/>
             <a:ext cx="10698480" cy="457200"/>
           </a:xfrm>
           <a:prstGeom prst="rect">
@@ -27133,7 +27133,7 @@
         </p:nvSpPr>
         <p:spPr>
           <a:xfrm>
-            <a:off x="731520" y="3154680"/>
+            <a:off x="731520" y="2971800"/>
             <a:ext cx="50800" cy="822960"/>
           </a:xfrm>
           <a:prstGeom prst="rect">
@@ -27176,7 +27176,7 @@
         </p:nvSpPr>
         <p:spPr>
           <a:xfrm>
-            <a:off x="868680" y="3383280"/>
+            <a:off x="868680" y="3200400"/>
             <a:ext cx="1234440" cy="365760"/>
           </a:xfrm>
           <a:prstGeom prst="rect">
@@ -27212,7 +27212,7 @@
         </p:nvSpPr>
         <p:spPr>
           <a:xfrm>
-            <a:off x="2194560" y="3154680"/>
+            <a:off x="2194560" y="2971800"/>
             <a:ext cx="2926080" cy="822960"/>
           </a:xfrm>
           <a:prstGeom prst="roundRect">
@@ -27259,7 +27259,7 @@
         </p:nvSpPr>
         <p:spPr>
           <a:xfrm>
-            <a:off x="2377440" y="3383280"/>
+            <a:off x="2377440" y="3200400"/>
             <a:ext cx="2560320" cy="274320"/>
           </a:xfrm>
           <a:prstGeom prst="rect">
@@ -27295,7 +27295,7 @@
         </p:nvSpPr>
         <p:spPr>
           <a:xfrm>
-            <a:off x="2377440" y="3657600"/>
+            <a:off x="2377440" y="3474720"/>
             <a:ext cx="2560320" cy="274320"/>
           </a:xfrm>
           <a:prstGeom prst="rect">
@@ -27331,7 +27331,7 @@
         </p:nvSpPr>
         <p:spPr>
           <a:xfrm>
-            <a:off x="5257800" y="3154680"/>
+            <a:off x="5257800" y="2971800"/>
             <a:ext cx="2926080" cy="822960"/>
           </a:xfrm>
           <a:prstGeom prst="roundRect">
@@ -27378,7 +27378,7 @@
         </p:nvSpPr>
         <p:spPr>
           <a:xfrm>
-            <a:off x="5440680" y="3383280"/>
+            <a:off x="5440680" y="3200400"/>
             <a:ext cx="2560320" cy="274320"/>
           </a:xfrm>
           <a:prstGeom prst="rect">
@@ -27414,7 +27414,7 @@
         </p:nvSpPr>
         <p:spPr>
           <a:xfrm>
-            <a:off x="5440680" y="3657600"/>
+            <a:off x="5440680" y="3474720"/>
             <a:ext cx="2560320" cy="274320"/>
           </a:xfrm>
           <a:prstGeom prst="rect">
@@ -27450,7 +27450,7 @@
         </p:nvSpPr>
         <p:spPr>
           <a:xfrm>
-            <a:off x="8321040" y="3154680"/>
+            <a:off x="8321040" y="2971800"/>
             <a:ext cx="2926080" cy="822960"/>
           </a:xfrm>
           <a:prstGeom prst="roundRect">
@@ -27497,7 +27497,7 @@
         </p:nvSpPr>
         <p:spPr>
           <a:xfrm>
-            <a:off x="8503920" y="3383280"/>
+            <a:off x="8503920" y="3200400"/>
             <a:ext cx="2560320" cy="274320"/>
           </a:xfrm>
           <a:prstGeom prst="rect">
@@ -27533,7 +27533,7 @@
         </p:nvSpPr>
         <p:spPr>
           <a:xfrm>
-            <a:off x="8503920" y="3657600"/>
+            <a:off x="8503920" y="3474720"/>
             <a:ext cx="2560320" cy="274320"/>
           </a:xfrm>
           <a:prstGeom prst="rect">
@@ -28448,7 +28448,7 @@
         </p:nvSpPr>
         <p:spPr>
           <a:xfrm>
-            <a:off x="731520" y="3154680"/>
+            <a:off x="731520" y="2971800"/>
             <a:ext cx="50800" cy="822960"/>
           </a:xfrm>
           <a:prstGeom prst="rect">
@@ -28491,7 +28491,7 @@
         </p:nvSpPr>
         <p:spPr>
           <a:xfrm>
-            <a:off x="868680" y="3383280"/>
+            <a:off x="868680" y="3200400"/>
             <a:ext cx="1234440" cy="365760"/>
           </a:xfrm>
           <a:prstGeom prst="rect">
@@ -28527,7 +28527,7 @@
         </p:nvSpPr>
         <p:spPr>
           <a:xfrm>
-            <a:off x="2194560" y="3154680"/>
+            <a:off x="2194560" y="2971800"/>
             <a:ext cx="2926080" cy="822960"/>
           </a:xfrm>
           <a:prstGeom prst="roundRect">
@@ -28574,7 +28574,7 @@
         </p:nvSpPr>
         <p:spPr>
           <a:xfrm>
-            <a:off x="2377440" y="3383280"/>
+            <a:off x="2377440" y="3200400"/>
             <a:ext cx="2560320" cy="274320"/>
           </a:xfrm>
           <a:prstGeom prst="rect">
@@ -28610,7 +28610,7 @@
         </p:nvSpPr>
         <p:spPr>
           <a:xfrm>
-            <a:off x="2377440" y="3657600"/>
+            <a:off x="2377440" y="3474720"/>
             <a:ext cx="2560320" cy="274320"/>
           </a:xfrm>
           <a:prstGeom prst="rect">
@@ -28646,7 +28646,7 @@
         </p:nvSpPr>
         <p:spPr>
           <a:xfrm>
-            <a:off x="5257800" y="3154680"/>
+            <a:off x="5257800" y="2971800"/>
             <a:ext cx="2926080" cy="822960"/>
           </a:xfrm>
           <a:prstGeom prst="roundRect">
@@ -28693,7 +28693,7 @@
         </p:nvSpPr>
         <p:spPr>
           <a:xfrm>
-            <a:off x="5440680" y="3383280"/>
+            <a:off x="5440680" y="3200400"/>
             <a:ext cx="2560320" cy="274320"/>
           </a:xfrm>
           <a:prstGeom prst="rect">
@@ -28729,7 +28729,7 @@
         </p:nvSpPr>
         <p:spPr>
           <a:xfrm>
-            <a:off x="5440680" y="3657600"/>
+            <a:off x="5440680" y="3474720"/>
             <a:ext cx="2560320" cy="274320"/>
           </a:xfrm>
           <a:prstGeom prst="rect">
@@ -28765,7 +28765,7 @@
         </p:nvSpPr>
         <p:spPr>
           <a:xfrm>
-            <a:off x="8321040" y="3154680"/>
+            <a:off x="8321040" y="2971800"/>
             <a:ext cx="2926080" cy="822960"/>
           </a:xfrm>
           <a:prstGeom prst="roundRect">
@@ -28812,7 +28812,7 @@
         </p:nvSpPr>
         <p:spPr>
           <a:xfrm>
-            <a:off x="8503920" y="3383280"/>
+            <a:off x="8503920" y="3200400"/>
             <a:ext cx="2560320" cy="274320"/>
           </a:xfrm>
           <a:prstGeom prst="rect">
@@ -28848,7 +28848,7 @@
         </p:nvSpPr>
         <p:spPr>
           <a:xfrm>
-            <a:off x="8503920" y="3657600"/>
+            <a:off x="8503920" y="3474720"/>
             <a:ext cx="2560320" cy="274320"/>
           </a:xfrm>
           <a:prstGeom prst="rect">
@@ -28884,7 +28884,7 @@
         </p:nvSpPr>
         <p:spPr>
           <a:xfrm>
-            <a:off x="731520" y="4069080"/>
+            <a:off x="731520" y="4023360"/>
             <a:ext cx="50800" cy="822960"/>
           </a:xfrm>
           <a:prstGeom prst="rect">
@@ -28927,7 +28927,7 @@
         </p:nvSpPr>
         <p:spPr>
           <a:xfrm>
-            <a:off x="868680" y="4297680"/>
+            <a:off x="868680" y="4251960"/>
             <a:ext cx="1234440" cy="365760"/>
           </a:xfrm>
           <a:prstGeom prst="rect">
@@ -28963,7 +28963,7 @@
         </p:nvSpPr>
         <p:spPr>
           <a:xfrm>
-            <a:off x="2194560" y="4069080"/>
+            <a:off x="2194560" y="4023360"/>
             <a:ext cx="2926080" cy="822960"/>
           </a:xfrm>
           <a:prstGeom prst="roundRect">
@@ -29010,7 +29010,7 @@
         </p:nvSpPr>
         <p:spPr>
           <a:xfrm>
-            <a:off x="2377440" y="4297680"/>
+            <a:off x="2377440" y="4251960"/>
             <a:ext cx="2560320" cy="274320"/>
           </a:xfrm>
           <a:prstGeom prst="rect">
@@ -29046,7 +29046,7 @@
         </p:nvSpPr>
         <p:spPr>
           <a:xfrm>
-            <a:off x="2377440" y="4572000"/>
+            <a:off x="2377440" y="4526280"/>
             <a:ext cx="2560320" cy="274320"/>
           </a:xfrm>
           <a:prstGeom prst="rect">
@@ -29082,7 +29082,7 @@
         </p:nvSpPr>
         <p:spPr>
           <a:xfrm>
-            <a:off x="5257800" y="4069080"/>
+            <a:off x="5257800" y="4023360"/>
             <a:ext cx="2926080" cy="822960"/>
           </a:xfrm>
           <a:prstGeom prst="roundRect">
@@ -29129,7 +29129,7 @@
         </p:nvSpPr>
         <p:spPr>
           <a:xfrm>
-            <a:off x="5440680" y="4297680"/>
+            <a:off x="5440680" y="4251960"/>
             <a:ext cx="2560320" cy="274320"/>
           </a:xfrm>
           <a:prstGeom prst="rect">
@@ -29165,7 +29165,7 @@
         </p:nvSpPr>
         <p:spPr>
           <a:xfrm>
-            <a:off x="5440680" y="4572000"/>
+            <a:off x="5440680" y="4526280"/>
             <a:ext cx="2560320" cy="274320"/>
           </a:xfrm>
           <a:prstGeom prst="rect">
@@ -29201,7 +29201,7 @@
         </p:nvSpPr>
         <p:spPr>
           <a:xfrm>
-            <a:off x="8321040" y="4069080"/>
+            <a:off x="8321040" y="4023360"/>
             <a:ext cx="2926080" cy="822960"/>
           </a:xfrm>
           <a:prstGeom prst="roundRect">
@@ -29248,7 +29248,7 @@
         </p:nvSpPr>
         <p:spPr>
           <a:xfrm>
-            <a:off x="8503920" y="4297680"/>
+            <a:off x="8503920" y="4251960"/>
             <a:ext cx="2560320" cy="274320"/>
           </a:xfrm>
           <a:prstGeom prst="rect">
@@ -29284,7 +29284,7 @@
         </p:nvSpPr>
         <p:spPr>
           <a:xfrm>
-            <a:off x="8503920" y="4572000"/>
+            <a:off x="8503920" y="4526280"/>
             <a:ext cx="2560320" cy="274320"/>
           </a:xfrm>
           <a:prstGeom prst="rect">
@@ -30199,7 +30199,7 @@
         </p:nvSpPr>
         <p:spPr>
           <a:xfrm>
-            <a:off x="731520" y="3154680"/>
+            <a:off x="731520" y="2971800"/>
             <a:ext cx="50800" cy="822960"/>
           </a:xfrm>
           <a:prstGeom prst="rect">
@@ -30242,7 +30242,7 @@
         </p:nvSpPr>
         <p:spPr>
           <a:xfrm>
-            <a:off x="868680" y="3383280"/>
+            <a:off x="868680" y="3200400"/>
             <a:ext cx="1234440" cy="365760"/>
           </a:xfrm>
           <a:prstGeom prst="rect">
@@ -30278,7 +30278,7 @@
         </p:nvSpPr>
         <p:spPr>
           <a:xfrm>
-            <a:off x="2194560" y="3154680"/>
+            <a:off x="2194560" y="2971800"/>
             <a:ext cx="2926080" cy="822960"/>
           </a:xfrm>
           <a:prstGeom prst="roundRect">
@@ -30325,7 +30325,7 @@
         </p:nvSpPr>
         <p:spPr>
           <a:xfrm>
-            <a:off x="2377440" y="3383280"/>
+            <a:off x="2377440" y="3200400"/>
             <a:ext cx="2560320" cy="274320"/>
           </a:xfrm>
           <a:prstGeom prst="rect">
@@ -30361,7 +30361,7 @@
         </p:nvSpPr>
         <p:spPr>
           <a:xfrm>
-            <a:off x="2377440" y="3657600"/>
+            <a:off x="2377440" y="3474720"/>
             <a:ext cx="2560320" cy="274320"/>
           </a:xfrm>
           <a:prstGeom prst="rect">
@@ -30397,7 +30397,7 @@
         </p:nvSpPr>
         <p:spPr>
           <a:xfrm>
-            <a:off x="5257800" y="3154680"/>
+            <a:off x="5257800" y="2971800"/>
             <a:ext cx="2926080" cy="822960"/>
           </a:xfrm>
           <a:prstGeom prst="roundRect">
@@ -30444,7 +30444,7 @@
         </p:nvSpPr>
         <p:spPr>
           <a:xfrm>
-            <a:off x="5440680" y="3383280"/>
+            <a:off x="5440680" y="3200400"/>
             <a:ext cx="2560320" cy="274320"/>
           </a:xfrm>
           <a:prstGeom prst="rect">
@@ -30480,7 +30480,7 @@
         </p:nvSpPr>
         <p:spPr>
           <a:xfrm>
-            <a:off x="5440680" y="3657600"/>
+            <a:off x="5440680" y="3474720"/>
             <a:ext cx="2560320" cy="274320"/>
           </a:xfrm>
           <a:prstGeom prst="rect">
@@ -30516,7 +30516,7 @@
         </p:nvSpPr>
         <p:spPr>
           <a:xfrm>
-            <a:off x="8321040" y="3154680"/>
+            <a:off x="8321040" y="2971800"/>
             <a:ext cx="2926080" cy="822960"/>
           </a:xfrm>
           <a:prstGeom prst="roundRect">
@@ -30563,7 +30563,7 @@
         </p:nvSpPr>
         <p:spPr>
           <a:xfrm>
-            <a:off x="8503920" y="3383280"/>
+            <a:off x="8503920" y="3200400"/>
             <a:ext cx="2560320" cy="274320"/>
           </a:xfrm>
           <a:prstGeom prst="rect">
@@ -30599,7 +30599,7 @@
         </p:nvSpPr>
         <p:spPr>
           <a:xfrm>
-            <a:off x="8503920" y="3657600"/>
+            <a:off x="8503920" y="3474720"/>
             <a:ext cx="2560320" cy="274320"/>
           </a:xfrm>
           <a:prstGeom prst="rect">
@@ -30635,7 +30635,7 @@
         </p:nvSpPr>
         <p:spPr>
           <a:xfrm>
-            <a:off x="731520" y="4069080"/>
+            <a:off x="731520" y="4023360"/>
             <a:ext cx="50800" cy="822960"/>
           </a:xfrm>
           <a:prstGeom prst="rect">
@@ -30678,7 +30678,7 @@
         </p:nvSpPr>
         <p:spPr>
           <a:xfrm>
-            <a:off x="868680" y="4297680"/>
+            <a:off x="868680" y="4251960"/>
             <a:ext cx="1234440" cy="365760"/>
           </a:xfrm>
           <a:prstGeom prst="rect">
@@ -30714,7 +30714,7 @@
         </p:nvSpPr>
         <p:spPr>
           <a:xfrm>
-            <a:off x="2194560" y="4069080"/>
+            <a:off x="2194560" y="4023360"/>
             <a:ext cx="2926080" cy="822960"/>
           </a:xfrm>
           <a:prstGeom prst="roundRect">
@@ -30761,7 +30761,7 @@
         </p:nvSpPr>
         <p:spPr>
           <a:xfrm>
-            <a:off x="2377440" y="4297680"/>
+            <a:off x="2377440" y="4251960"/>
             <a:ext cx="2560320" cy="274320"/>
           </a:xfrm>
           <a:prstGeom prst="rect">
@@ -30797,7 +30797,7 @@
         </p:nvSpPr>
         <p:spPr>
           <a:xfrm>
-            <a:off x="2377440" y="4572000"/>
+            <a:off x="2377440" y="4526280"/>
             <a:ext cx="2560320" cy="274320"/>
           </a:xfrm>
           <a:prstGeom prst="rect">
@@ -30833,7 +30833,7 @@
         </p:nvSpPr>
         <p:spPr>
           <a:xfrm>
-            <a:off x="5257800" y="4069080"/>
+            <a:off x="5257800" y="4023360"/>
             <a:ext cx="2926080" cy="822960"/>
           </a:xfrm>
           <a:prstGeom prst="roundRect">
@@ -30880,7 +30880,7 @@
         </p:nvSpPr>
         <p:spPr>
           <a:xfrm>
-            <a:off x="5440680" y="4297680"/>
+            <a:off x="5440680" y="4251960"/>
             <a:ext cx="2560320" cy="274320"/>
           </a:xfrm>
           <a:prstGeom prst="rect">
@@ -30916,7 +30916,7 @@
         </p:nvSpPr>
         <p:spPr>
           <a:xfrm>
-            <a:off x="5440680" y="4572000"/>
+            <a:off x="5440680" y="4526280"/>
             <a:ext cx="2560320" cy="274320"/>
           </a:xfrm>
           <a:prstGeom prst="rect">
@@ -30952,7 +30952,7 @@
         </p:nvSpPr>
         <p:spPr>
           <a:xfrm>
-            <a:off x="8321040" y="4069080"/>
+            <a:off x="8321040" y="4023360"/>
             <a:ext cx="2926080" cy="822960"/>
           </a:xfrm>
           <a:prstGeom prst="roundRect">
@@ -30999,7 +30999,7 @@
         </p:nvSpPr>
         <p:spPr>
           <a:xfrm>
-            <a:off x="8503920" y="4297680"/>
+            <a:off x="8503920" y="4251960"/>
             <a:ext cx="2560320" cy="274320"/>
           </a:xfrm>
           <a:prstGeom prst="rect">
@@ -31035,7 +31035,7 @@
         </p:nvSpPr>
         <p:spPr>
           <a:xfrm>
-            <a:off x="8503920" y="4572000"/>
+            <a:off x="8503920" y="4526280"/>
             <a:ext cx="2560320" cy="274320"/>
           </a:xfrm>
           <a:prstGeom prst="rect">
@@ -31071,7 +31071,7 @@
         </p:nvSpPr>
         <p:spPr>
           <a:xfrm>
-            <a:off x="731520" y="4983480"/>
+            <a:off x="731520" y="5074919"/>
             <a:ext cx="50800" cy="822960"/>
           </a:xfrm>
           <a:prstGeom prst="rect">
@@ -31114,7 +31114,7 @@
         </p:nvSpPr>
         <p:spPr>
           <a:xfrm>
-            <a:off x="868680" y="5212080"/>
+            <a:off x="868680" y="5303519"/>
             <a:ext cx="1234440" cy="365760"/>
           </a:xfrm>
           <a:prstGeom prst="rect">
@@ -31150,7 +31150,7 @@
         </p:nvSpPr>
         <p:spPr>
           <a:xfrm>
-            <a:off x="2194560" y="4983480"/>
+            <a:off x="2194560" y="5074919"/>
             <a:ext cx="2926080" cy="822960"/>
           </a:xfrm>
           <a:prstGeom prst="roundRect">
@@ -31197,7 +31197,7 @@
         </p:nvSpPr>
         <p:spPr>
           <a:xfrm>
-            <a:off x="2194560" y="4983480"/>
+            <a:off x="2194560" y="5074919"/>
             <a:ext cx="50800" cy="822960"/>
           </a:xfrm>
           <a:prstGeom prst="rect">
@@ -31240,7 +31240,7 @@
         </p:nvSpPr>
         <p:spPr>
           <a:xfrm>
-            <a:off x="2377440" y="5056632"/>
+            <a:off x="2377440" y="5148071"/>
             <a:ext cx="2286000" cy="182880"/>
           </a:xfrm>
           <a:prstGeom prst="rect">
@@ -31276,7 +31276,7 @@
         </p:nvSpPr>
         <p:spPr>
           <a:xfrm>
-            <a:off x="2377440" y="5212080"/>
+            <a:off x="2377440" y="5303519"/>
             <a:ext cx="2560320" cy="274320"/>
           </a:xfrm>
           <a:prstGeom prst="rect">
@@ -31312,7 +31312,7 @@
         </p:nvSpPr>
         <p:spPr>
           <a:xfrm>
-            <a:off x="2377440" y="5486400"/>
+            <a:off x="2377440" y="5577839"/>
             <a:ext cx="2560320" cy="274320"/>
           </a:xfrm>
           <a:prstGeom prst="rect">
@@ -31348,7 +31348,7 @@
         </p:nvSpPr>
         <p:spPr>
           <a:xfrm>
-            <a:off x="5257800" y="4983480"/>
+            <a:off x="5257800" y="5074919"/>
             <a:ext cx="2926080" cy="822960"/>
           </a:xfrm>
           <a:prstGeom prst="roundRect">
@@ -31395,7 +31395,7 @@
         </p:nvSpPr>
         <p:spPr>
           <a:xfrm>
-            <a:off x="5440680" y="5212080"/>
+            <a:off x="5440680" y="5303519"/>
             <a:ext cx="2560320" cy="274320"/>
           </a:xfrm>
           <a:prstGeom prst="rect">
@@ -31431,7 +31431,7 @@
         </p:nvSpPr>
         <p:spPr>
           <a:xfrm>
-            <a:off x="5440680" y="5486400"/>
+            <a:off x="5440680" y="5577839"/>
             <a:ext cx="2560320" cy="274320"/>
           </a:xfrm>
           <a:prstGeom prst="rect">
@@ -31467,7 +31467,7 @@
         </p:nvSpPr>
         <p:spPr>
           <a:xfrm>
-            <a:off x="8321040" y="4983480"/>
+            <a:off x="8321040" y="5074919"/>
             <a:ext cx="2926080" cy="822960"/>
           </a:xfrm>
           <a:prstGeom prst="roundRect">
@@ -31514,7 +31514,7 @@
         </p:nvSpPr>
         <p:spPr>
           <a:xfrm>
-            <a:off x="8503920" y="5212080"/>
+            <a:off x="8503920" y="5303519"/>
             <a:ext cx="2560320" cy="274320"/>
           </a:xfrm>
           <a:prstGeom prst="rect">
@@ -31550,7 +31550,7 @@
         </p:nvSpPr>
         <p:spPr>
           <a:xfrm>
-            <a:off x="8503920" y="5486400"/>
+            <a:off x="8503920" y="5577839"/>
             <a:ext cx="2560320" cy="274320"/>
           </a:xfrm>
           <a:prstGeom prst="rect">
@@ -31586,7 +31586,7 @@
         </p:nvSpPr>
         <p:spPr>
           <a:xfrm>
-            <a:off x="594360" y="4910328"/>
+            <a:off x="594360" y="5001767"/>
             <a:ext cx="10927080" cy="969264"/>
           </a:xfrm>
           <a:prstGeom prst="rect">
@@ -31629,7 +31629,7 @@
         </p:nvSpPr>
         <p:spPr>
           <a:xfrm>
-            <a:off x="9784080" y="4690872"/>
+            <a:off x="9784080" y="4782311"/>
             <a:ext cx="1645920" cy="201168"/>
           </a:xfrm>
           <a:prstGeom prst="rect">

--- a/deliverables/SRAM_AI_Adoption_Playbook.pptx
+++ b/deliverables/SRAM_AI_Adoption_Playbook.pptx
@@ -15770,7 +15770,7 @@
               </a:defRPr>
             </a:pPr>
             <a:r>
-              <a:t>7 brands. 1 connected ecosystem. From casual riders to elite athletes.</a:t>
+              <a:t>6 brands. 1 connected ecosystem. From casual riders to elite athletes.</a:t>
             </a:r>
           </a:p>
         </p:txBody>

--- a/deliverables/SRAM_AI_Adoption_Playbook.pptx
+++ b/deliverables/SRAM_AI_Adoption_Playbook.pptx
@@ -14899,7 +14899,7 @@
               </a:defRPr>
             </a:pPr>
             <a:r>
-              <a:t>Drivetrains</a:t>
+              <a:t>Drivetrains + Braking</a:t>
             </a:r>
           </a:p>
         </p:txBody>
@@ -14935,11 +14935,11 @@
               </a:defRPr>
             </a:pPr>
             <a:r>
-              <a:t>Gears and chains that</a:t>
+              <a:t>Gears, chains, and disc</a:t>
             </a:r>
             <a:br/>
             <a:r>
-              <a:t>make bikes go fast</a:t>
+              <a:t>brakes for every bike</a:t>
             </a:r>
           </a:p>
         </p:txBody>
@@ -15022,7 +15022,7 @@
               </a:defRPr>
             </a:pPr>
             <a:r>
-              <a:t>SRAM</a:t>
+              <a:t>RockShox</a:t>
             </a:r>
           </a:p>
         </p:txBody>
@@ -15058,7 +15058,7 @@
               </a:defRPr>
             </a:pPr>
             <a:r>
-              <a:t>Brakes</a:t>
+              <a:t>Suspension</a:t>
             </a:r>
           </a:p>
         </p:txBody>
@@ -15094,11 +15094,11 @@
               </a:defRPr>
             </a:pPr>
             <a:r>
-              <a:t>Disc brakes that help</a:t>
+              <a:t>Forks that absorb</a:t>
             </a:r>
             <a:br/>
             <a:r>
-              <a:t>riders stop safely</a:t>
+              <a:t>bumps on trails</a:t>
             </a:r>
           </a:p>
         </p:txBody>
@@ -15181,7 +15181,7 @@
               </a:defRPr>
             </a:pPr>
             <a:r>
-              <a:t>RockShox</a:t>
+              <a:t>Zipp</a:t>
             </a:r>
           </a:p>
         </p:txBody>
@@ -15217,7 +15217,7 @@
               </a:defRPr>
             </a:pPr>
             <a:r>
-              <a:t>Suspension</a:t>
+              <a:t>Wheels + Cockpit</a:t>
             </a:r>
           </a:p>
         </p:txBody>
@@ -15253,11 +15253,11 @@
               </a:defRPr>
             </a:pPr>
             <a:r>
-              <a:t>Forks that absorb</a:t>
+              <a:t>Aero wheels built</a:t>
             </a:r>
             <a:br/>
             <a:r>
-              <a:t>bumps on trails</a:t>
+              <a:t>for speed</a:t>
             </a:r>
           </a:p>
         </p:txBody>
@@ -15340,7 +15340,7 @@
               </a:defRPr>
             </a:pPr>
             <a:r>
-              <a:t>Zipp</a:t>
+              <a:t>Quarq</a:t>
             </a:r>
           </a:p>
         </p:txBody>
@@ -15376,7 +15376,7 @@
               </a:defRPr>
             </a:pPr>
             <a:r>
-              <a:t>Wheels</a:t>
+              <a:t>Power Meters</a:t>
             </a:r>
           </a:p>
         </p:txBody>
@@ -15412,11 +15412,11 @@
               </a:defRPr>
             </a:pPr>
             <a:r>
-              <a:t>Aero wheels built</a:t>
+              <a:t>Sensors that measure</a:t>
             </a:r>
             <a:br/>
             <a:r>
-              <a:t>for speed</a:t>
+              <a:t>rider performance</a:t>
             </a:r>
           </a:p>
         </p:txBody>
@@ -15499,7 +15499,7 @@
               </a:defRPr>
             </a:pPr>
             <a:r>
-              <a:t>Quarq</a:t>
+              <a:t>Hammerhead</a:t>
             </a:r>
           </a:p>
         </p:txBody>
@@ -15535,7 +15535,7 @@
               </a:defRPr>
             </a:pPr>
             <a:r>
-              <a:t>Sensors</a:t>
+              <a:t>Cycling Computer</a:t>
             </a:r>
           </a:p>
         </p:txBody>
@@ -15571,11 +15571,11 @@
               </a:defRPr>
             </a:pPr>
             <a:r>
-              <a:t>Power meters that</a:t>
+              <a:t>GPS device for navigation,</a:t>
             </a:r>
             <a:br/>
             <a:r>
-              <a:t>measure performance</a:t>
+              <a:t>training, and data</a:t>
             </a:r>
           </a:p>
         </p:txBody>
@@ -15658,7 +15658,7 @@
               </a:defRPr>
             </a:pPr>
             <a:r>
-              <a:t>AXS</a:t>
+              <a:t>TIME</a:t>
             </a:r>
           </a:p>
         </p:txBody>
@@ -15694,7 +15694,7 @@
               </a:defRPr>
             </a:pPr>
             <a:r>
-              <a:t>App</a:t>
+              <a:t>Pedals</a:t>
             </a:r>
           </a:p>
         </p:txBody>
@@ -15730,11 +15730,11 @@
               </a:defRPr>
             </a:pPr>
             <a:r>
-              <a:t>Connects all components</a:t>
+              <a:t>Clipless pedal systems</a:t>
             </a:r>
             <a:br/>
             <a:r>
-              <a:t>into one digital ecosystem</a:t>
+              <a:t>for road and mountain</a:t>
             </a:r>
           </a:p>
         </p:txBody>

--- a/deliverables/SRAM_AI_Adoption_Playbook.pptx
+++ b/deliverables/SRAM_AI_Adoption_Playbook.pptx
@@ -31,6 +31,7 @@
     <p:sldId id="279" r:id="rId30"/>
     <p:sldId id="280" r:id="rId31"/>
     <p:sldId id="281" r:id="rId32"/>
+    <p:sldId id="282" r:id="rId33"/>
   </p:sldIdLst>
   <p:sldSz cx="12191695" cy="6858000" type="screen4x3"/>
   <p:notesSz cx="6858000" cy="9144000"/>
@@ -17267,7 +17268,7 @@
               </a:defRPr>
             </a:pPr>
             <a:r>
-              <a:t>Proven AI pilots, strong data infrastructure, and teams that understand guardrails unlock the innovation no competitor can replicate.</a:t>
+              <a:t>Each capability creates a new recurring revenue stream. SRAM's installed base of connected components becomes a platform, not a one-time sale.</a:t>
             </a:r>
           </a:p>
         </p:txBody>
@@ -17478,6 +17479,42 @@
         </p:nvSpPr>
         <p:spPr>
           <a:xfrm>
+            <a:off x="7315200" y="2194560"/>
+            <a:ext cx="3840480" cy="274320"/>
+          </a:xfrm>
+          <a:prstGeom prst="rect">
+            <a:avLst/>
+          </a:prstGeom>
+          <a:noFill/>
+        </p:spPr>
+        <p:txBody>
+          <a:bodyPr wrap="square">
+            <a:spAutoFit/>
+          </a:bodyPr>
+          <a:lstStyle/>
+          <a:p>
+            <a:pPr algn="r">
+              <a:defRPr sz="1100" b="1" i="0">
+                <a:solidFill>
+                  <a:srgbClr val="E51937"/>
+                </a:solidFill>
+                <a:latin typeface="Calibri"/>
+              </a:defRPr>
+            </a:pPr>
+            <a:r>
+              <a:t>NEW REVENUE: Premium subscription tier</a:t>
+            </a:r>
+          </a:p>
+        </p:txBody>
+      </p:sp>
+      <p:sp>
+        <p:nvSpPr>
+          <p:cNvPr id="12" name="TextBox 11"/>
+          <p:cNvSpPr txBox="1"/>
+          <p:nvPr/>
+        </p:nvSpPr>
+        <p:spPr>
+          <a:xfrm>
             <a:off x="731520" y="6446520"/>
             <a:ext cx="4572000" cy="274320"/>
           </a:xfrm>
@@ -17508,7 +17545,7 @@
       </p:sp>
       <p:sp>
         <p:nvSpPr>
-          <p:cNvPr id="12" name="TextBox 11"/>
+          <p:cNvPr id="13" name="TextBox 12"/>
           <p:cNvSpPr txBox="1"/>
           <p:nvPr/>
         </p:nvSpPr>
@@ -17714,7 +17751,7 @@
               </a:defRPr>
             </a:pPr>
             <a:r>
-              <a:t>Proven AI pilots, strong data infrastructure, and teams that understand guardrails unlock the innovation no competitor can replicate.</a:t>
+              <a:t>Each capability creates a new recurring revenue stream. SRAM's installed base of connected components becomes a platform, not a one-time sale.</a:t>
             </a:r>
           </a:p>
         </p:txBody>
@@ -17919,14 +17956,50 @@
       </p:sp>
       <p:sp>
         <p:nvSpPr>
-          <p:cNvPr id="11" name="Rounded Rectangle 10"/>
+          <p:cNvPr id="11" name="TextBox 10"/>
+          <p:cNvSpPr txBox="1"/>
+          <p:nvPr/>
+        </p:nvSpPr>
+        <p:spPr>
+          <a:xfrm>
+            <a:off x="7315200" y="2194560"/>
+            <a:ext cx="3840480" cy="274320"/>
+          </a:xfrm>
+          <a:prstGeom prst="rect">
+            <a:avLst/>
+          </a:prstGeom>
+          <a:noFill/>
+        </p:spPr>
+        <p:txBody>
+          <a:bodyPr wrap="square">
+            <a:spAutoFit/>
+          </a:bodyPr>
+          <a:lstStyle/>
+          <a:p>
+            <a:pPr algn="r">
+              <a:defRPr sz="1100" b="1" i="0">
+                <a:solidFill>
+                  <a:srgbClr val="E51937"/>
+                </a:solidFill>
+                <a:latin typeface="Calibri"/>
+              </a:defRPr>
+            </a:pPr>
+            <a:r>
+              <a:t>NEW REVENUE: Premium subscription tier</a:t>
+            </a:r>
+          </a:p>
+        </p:txBody>
+      </p:sp>
+      <p:sp>
+        <p:nvSpPr>
+          <p:cNvPr id="12" name="Rounded Rectangle 11"/>
           <p:cNvSpPr/>
           <p:nvPr/>
         </p:nvSpPr>
         <p:spPr>
           <a:xfrm>
             <a:off x="731520" y="3657600"/>
-            <a:ext cx="3429000" cy="1188720"/>
+            <a:ext cx="3429000" cy="1371600"/>
           </a:xfrm>
           <a:prstGeom prst="roundRect">
             <a:avLst>
@@ -17966,7 +18039,7 @@
       </p:sp>
       <p:sp>
         <p:nvSpPr>
-          <p:cNvPr id="12" name="TextBox 11"/>
+          <p:cNvPr id="13" name="TextBox 12"/>
           <p:cNvSpPr txBox="1"/>
           <p:nvPr/>
         </p:nvSpPr>
@@ -18002,14 +18075,14 @@
       </p:sp>
       <p:sp>
         <p:nvSpPr>
-          <p:cNvPr id="13" name="TextBox 12"/>
+          <p:cNvPr id="14" name="TextBox 13"/>
           <p:cNvSpPr txBox="1"/>
           <p:nvPr/>
         </p:nvSpPr>
         <p:spPr>
           <a:xfrm>
             <a:off x="960120" y="4114800"/>
-            <a:ext cx="2971800" cy="594360"/>
+            <a:ext cx="2971800" cy="502920"/>
           </a:xfrm>
           <a:prstGeom prst="rect">
             <a:avLst/>
@@ -18038,14 +18111,50 @@
       </p:sp>
       <p:sp>
         <p:nvSpPr>
-          <p:cNvPr id="14" name="Rounded Rectangle 13"/>
+          <p:cNvPr id="15" name="TextBox 14"/>
+          <p:cNvSpPr txBox="1"/>
+          <p:nvPr/>
+        </p:nvSpPr>
+        <p:spPr>
+          <a:xfrm>
+            <a:off x="960120" y="4709160"/>
+            <a:ext cx="2971800" cy="228600"/>
+          </a:xfrm>
+          <a:prstGeom prst="rect">
+            <a:avLst/>
+          </a:prstGeom>
+          <a:noFill/>
+        </p:spPr>
+        <p:txBody>
+          <a:bodyPr wrap="square">
+            <a:spAutoFit/>
+          </a:bodyPr>
+          <a:lstStyle/>
+          <a:p>
+            <a:pPr algn="l">
+              <a:defRPr sz="900" b="1" i="0">
+                <a:solidFill>
+                  <a:srgbClr val="E51937"/>
+                </a:solidFill>
+                <a:latin typeface="Calibri"/>
+              </a:defRPr>
+            </a:pPr>
+            <a:r>
+              <a:t>NEW REVENUE: Per-device monitoring subscription</a:t>
+            </a:r>
+          </a:p>
+        </p:txBody>
+      </p:sp>
+      <p:sp>
+        <p:nvSpPr>
+          <p:cNvPr id="16" name="Rounded Rectangle 15"/>
           <p:cNvSpPr/>
           <p:nvPr/>
         </p:nvSpPr>
         <p:spPr>
           <a:xfrm>
             <a:off x="4389120" y="3657600"/>
-            <a:ext cx="3429000" cy="1188720"/>
+            <a:ext cx="3429000" cy="1371600"/>
           </a:xfrm>
           <a:prstGeom prst="roundRect">
             <a:avLst>
@@ -18085,7 +18194,7 @@
       </p:sp>
       <p:sp>
         <p:nvSpPr>
-          <p:cNvPr id="15" name="TextBox 14"/>
+          <p:cNvPr id="17" name="TextBox 16"/>
           <p:cNvSpPr txBox="1"/>
           <p:nvPr/>
         </p:nvSpPr>
@@ -18121,14 +18230,14 @@
       </p:sp>
       <p:sp>
         <p:nvSpPr>
-          <p:cNvPr id="16" name="TextBox 15"/>
+          <p:cNvPr id="18" name="TextBox 17"/>
           <p:cNvSpPr txBox="1"/>
           <p:nvPr/>
         </p:nvSpPr>
         <p:spPr>
           <a:xfrm>
             <a:off x="4617720" y="4114800"/>
-            <a:ext cx="2971800" cy="594360"/>
+            <a:ext cx="2971800" cy="502920"/>
           </a:xfrm>
           <a:prstGeom prst="rect">
             <a:avLst/>
@@ -18157,14 +18266,50 @@
       </p:sp>
       <p:sp>
         <p:nvSpPr>
-          <p:cNvPr id="17" name="Rounded Rectangle 16"/>
+          <p:cNvPr id="19" name="TextBox 18"/>
+          <p:cNvSpPr txBox="1"/>
+          <p:nvPr/>
+        </p:nvSpPr>
+        <p:spPr>
+          <a:xfrm>
+            <a:off x="4617720" y="4709160"/>
+            <a:ext cx="2971800" cy="228600"/>
+          </a:xfrm>
+          <a:prstGeom prst="rect">
+            <a:avLst/>
+          </a:prstGeom>
+          <a:noFill/>
+        </p:spPr>
+        <p:txBody>
+          <a:bodyPr wrap="square">
+            <a:spAutoFit/>
+          </a:bodyPr>
+          <a:lstStyle/>
+          <a:p>
+            <a:pPr algn="l">
+              <a:defRPr sz="900" b="1" i="0">
+                <a:solidFill>
+                  <a:srgbClr val="E51937"/>
+                </a:solidFill>
+                <a:latin typeface="Calibri"/>
+              </a:defRPr>
+            </a:pPr>
+            <a:r>
+              <a:t>NEW REVENUE: Premium optimization tier</a:t>
+            </a:r>
+          </a:p>
+        </p:txBody>
+      </p:sp>
+      <p:sp>
+        <p:nvSpPr>
+          <p:cNvPr id="20" name="Rounded Rectangle 19"/>
           <p:cNvSpPr/>
           <p:nvPr/>
         </p:nvSpPr>
         <p:spPr>
           <a:xfrm>
             <a:off x="8046720" y="3657600"/>
-            <a:ext cx="3429000" cy="1188720"/>
+            <a:ext cx="3429000" cy="1371600"/>
           </a:xfrm>
           <a:prstGeom prst="roundRect">
             <a:avLst>
@@ -18204,7 +18349,7 @@
       </p:sp>
       <p:sp>
         <p:nvSpPr>
-          <p:cNvPr id="18" name="TextBox 17"/>
+          <p:cNvPr id="21" name="TextBox 20"/>
           <p:cNvSpPr txBox="1"/>
           <p:nvPr/>
         </p:nvSpPr>
@@ -18240,14 +18385,14 @@
       </p:sp>
       <p:sp>
         <p:nvSpPr>
-          <p:cNvPr id="19" name="TextBox 18"/>
+          <p:cNvPr id="22" name="TextBox 21"/>
           <p:cNvSpPr txBox="1"/>
           <p:nvPr/>
         </p:nvSpPr>
         <p:spPr>
           <a:xfrm>
             <a:off x="8275320" y="4114800"/>
-            <a:ext cx="2971800" cy="594360"/>
+            <a:ext cx="2971800" cy="502920"/>
           </a:xfrm>
           <a:prstGeom prst="rect">
             <a:avLst/>
@@ -18276,13 +18421,49 @@
       </p:sp>
       <p:sp>
         <p:nvSpPr>
-          <p:cNvPr id="20" name="Rounded Rectangle 19"/>
+          <p:cNvPr id="23" name="TextBox 22"/>
+          <p:cNvSpPr txBox="1"/>
+          <p:nvPr/>
+        </p:nvSpPr>
+        <p:spPr>
+          <a:xfrm>
+            <a:off x="8275320" y="4709160"/>
+            <a:ext cx="2971800" cy="228600"/>
+          </a:xfrm>
+          <a:prstGeom prst="rect">
+            <a:avLst/>
+          </a:prstGeom>
+          <a:noFill/>
+        </p:spPr>
+        <p:txBody>
+          <a:bodyPr wrap="square">
+            <a:spAutoFit/>
+          </a:bodyPr>
+          <a:lstStyle/>
+          <a:p>
+            <a:pPr algn="l">
+              <a:defRPr sz="900" b="1" i="0">
+                <a:solidFill>
+                  <a:srgbClr val="E51937"/>
+                </a:solidFill>
+                <a:latin typeface="Calibri"/>
+              </a:defRPr>
+            </a:pPr>
+            <a:r>
+              <a:t>NEW REVENUE: Dealer analytics license</a:t>
+            </a:r>
+          </a:p>
+        </p:txBody>
+      </p:sp>
+      <p:sp>
+        <p:nvSpPr>
+          <p:cNvPr id="24" name="Rounded Rectangle 23"/>
           <p:cNvSpPr/>
           <p:nvPr/>
         </p:nvSpPr>
         <p:spPr>
           <a:xfrm>
-            <a:off x="731520" y="5303520"/>
+            <a:off x="731520" y="5486400"/>
             <a:ext cx="10698480" cy="411480"/>
           </a:xfrm>
           <a:prstGeom prst="roundRect">
@@ -18323,13 +18504,13 @@
       </p:sp>
       <p:sp>
         <p:nvSpPr>
-          <p:cNvPr id="21" name="Rectangle 20"/>
+          <p:cNvPr id="25" name="Rectangle 24"/>
           <p:cNvSpPr/>
           <p:nvPr/>
         </p:nvSpPr>
         <p:spPr>
           <a:xfrm>
-            <a:off x="731520" y="5303520"/>
+            <a:off x="731520" y="5486400"/>
             <a:ext cx="50800" cy="411480"/>
           </a:xfrm>
           <a:prstGeom prst="rect">
@@ -18366,13 +18547,13 @@
       </p:sp>
       <p:sp>
         <p:nvSpPr>
-          <p:cNvPr id="22" name="TextBox 21"/>
-          <p:cNvSpPr txBox="1"/>
-          <p:nvPr/>
-        </p:nvSpPr>
-        <p:spPr>
-          <a:xfrm>
-            <a:off x="1097280" y="5340096"/>
+          <p:cNvPr id="26" name="TextBox 25"/>
+          <p:cNvSpPr txBox="1"/>
+          <p:nvPr/>
+        </p:nvSpPr>
+        <p:spPr>
+          <a:xfrm>
+            <a:off x="1097280" y="5522976"/>
             <a:ext cx="10058400" cy="320040"/>
           </a:xfrm>
           <a:prstGeom prst="rect">
@@ -18402,7 +18583,7 @@
       </p:sp>
       <p:sp>
         <p:nvSpPr>
-          <p:cNvPr id="23" name="TextBox 22"/>
+          <p:cNvPr id="27" name="TextBox 26"/>
           <p:cNvSpPr txBox="1"/>
           <p:nvPr/>
         </p:nvSpPr>
@@ -18438,7 +18619,7 @@
       </p:sp>
       <p:sp>
         <p:nvSpPr>
-          <p:cNvPr id="24" name="TextBox 23"/>
+          <p:cNvPr id="28" name="TextBox 27"/>
           <p:cNvSpPr txBox="1"/>
           <p:nvPr/>
         </p:nvSpPr>
@@ -18529,7 +18710,7 @@
               </a:defRPr>
             </a:pPr>
             <a:r>
-              <a:t>THE DECISION</a:t>
+              <a:t>WHAT IT TAKES</a:t>
             </a:r>
           </a:p>
         </p:txBody>
@@ -18565,7 +18746,7 @@
               </a:defRPr>
             </a:pPr>
             <a:r>
-              <a:t>Three actions for SRAM's CEO</a:t>
+              <a:t>Talent, data, and leadership required at each phase</a:t>
             </a:r>
           </a:p>
         </p:txBody>
@@ -18615,14 +18796,50 @@
       </p:sp>
       <p:sp>
         <p:nvSpPr>
-          <p:cNvPr id="5" name="Rounded Rectangle 4"/>
+          <p:cNvPr id="5" name="TextBox 4"/>
+          <p:cNvSpPr txBox="1"/>
+          <p:nvPr/>
+        </p:nvSpPr>
+        <p:spPr>
+          <a:xfrm>
+            <a:off x="731520" y="1371600"/>
+            <a:ext cx="3429000" cy="274320"/>
+          </a:xfrm>
+          <a:prstGeom prst="rect">
+            <a:avLst/>
+          </a:prstGeom>
+          <a:noFill/>
+        </p:spPr>
+        <p:txBody>
+          <a:bodyPr wrap="square">
+            <a:spAutoFit/>
+          </a:bodyPr>
+          <a:lstStyle/>
+          <a:p>
+            <a:pPr algn="l">
+              <a:defRPr sz="1400" b="1" i="0">
+                <a:solidFill>
+                  <a:srgbClr val="1C1C1E"/>
+                </a:solidFill>
+                <a:latin typeface="Calibri"/>
+              </a:defRPr>
+            </a:pPr>
+            <a:r>
+              <a:t>TALENT</a:t>
+            </a:r>
+          </a:p>
+        </p:txBody>
+      </p:sp>
+      <p:sp>
+        <p:nvSpPr>
+          <p:cNvPr id="6" name="Rounded Rectangle 5"/>
           <p:cNvSpPr/>
           <p:nvPr/>
         </p:nvSpPr>
         <p:spPr>
           <a:xfrm>
-            <a:off x="731520" y="1371600"/>
-            <a:ext cx="10515600" cy="1188720"/>
+            <a:off x="731520" y="1828800"/>
+            <a:ext cx="3429000" cy="1828800"/>
           </a:xfrm>
           <a:prstGeom prst="roundRect">
             <a:avLst>
@@ -18662,88 +18879,36 @@
       </p:sp>
       <p:sp>
         <p:nvSpPr>
-          <p:cNvPr id="6" name="Oval 5"/>
-          <p:cNvSpPr/>
-          <p:nvPr/>
-        </p:nvSpPr>
-        <p:spPr>
-          <a:xfrm>
-            <a:off x="1097280" y="1600200"/>
-            <a:ext cx="457200" cy="457200"/>
-          </a:xfrm>
-          <a:prstGeom prst="ellipse">
-            <a:avLst/>
-          </a:prstGeom>
-          <a:solidFill>
-            <a:srgbClr val="1C1C1E"/>
-          </a:solidFill>
-          <a:ln>
-            <a:noFill/>
-          </a:ln>
-        </p:spPr>
-        <p:style>
-          <a:lnRef idx="1">
-            <a:schemeClr val="accent1"/>
-          </a:lnRef>
-          <a:fillRef idx="3">
-            <a:schemeClr val="accent1"/>
-          </a:fillRef>
-          <a:effectRef idx="2">
-            <a:schemeClr val="accent1"/>
-          </a:effectRef>
-          <a:fontRef idx="minor">
-            <a:schemeClr val="lt1"/>
-          </a:fontRef>
-        </p:style>
-        <p:txBody>
-          <a:bodyPr rtlCol="0" anchor="ctr"/>
-          <a:lstStyle/>
-          <a:p>
-            <a:pPr algn="ctr">
-              <a:defRPr sz="1800" b="1">
-                <a:solidFill>
-                  <a:srgbClr val="F5F5F3"/>
-                </a:solidFill>
-              </a:defRPr>
-            </a:pPr>
-            <a:r>
-              <a:t>1</a:t>
-            </a:r>
-          </a:p>
-        </p:txBody>
-      </p:sp>
-      <p:sp>
-        <p:nvSpPr>
           <p:cNvPr id="7" name="TextBox 6"/>
           <p:cNvSpPr txBox="1"/>
           <p:nvPr/>
         </p:nvSpPr>
         <p:spPr>
           <a:xfrm>
-            <a:off x="1828800" y="1463040"/>
-            <a:ext cx="8961120" cy="320040"/>
-          </a:xfrm>
-          <a:prstGeom prst="rect">
-            <a:avLst/>
-          </a:prstGeom>
-          <a:noFill/>
-        </p:spPr>
-        <p:txBody>
-          <a:bodyPr wrap="square">
-            <a:spAutoFit/>
-          </a:bodyPr>
-          <a:lstStyle/>
-          <a:p>
-            <a:pPr algn="l">
-              <a:defRPr sz="1800" b="1" i="0">
-                <a:solidFill>
-                  <a:srgbClr val="1C1C1E"/>
-                </a:solidFill>
-                <a:latin typeface="Calibri"/>
-              </a:defRPr>
-            </a:pPr>
-            <a:r>
-              <a:t>Launch the 90-Day Support Pilot</a:t>
+            <a:off x="914400" y="1938528"/>
+            <a:ext cx="3063240" cy="228600"/>
+          </a:xfrm>
+          <a:prstGeom prst="rect">
+            <a:avLst/>
+          </a:prstGeom>
+          <a:noFill/>
+        </p:spPr>
+        <p:txBody>
+          <a:bodyPr wrap="square">
+            <a:spAutoFit/>
+          </a:bodyPr>
+          <a:lstStyle/>
+          <a:p>
+            <a:pPr algn="l">
+              <a:defRPr sz="900" b="1" i="0">
+                <a:solidFill>
+                  <a:srgbClr val="767676"/>
+                </a:solidFill>
+                <a:latin typeface="Calibri"/>
+              </a:defRPr>
+            </a:pPr>
+            <a:r>
+              <a:t>PHASE 1</a:t>
             </a:r>
           </a:p>
         </p:txBody>
@@ -18756,22 +18921,22 @@
         </p:nvSpPr>
         <p:spPr>
           <a:xfrm>
-            <a:off x="1828800" y="1828800"/>
-            <a:ext cx="8961120" cy="548640"/>
-          </a:xfrm>
-          <a:prstGeom prst="rect">
-            <a:avLst/>
-          </a:prstGeom>
-          <a:noFill/>
-        </p:spPr>
-        <p:txBody>
-          <a:bodyPr wrap="square">
-            <a:spAutoFit/>
-          </a:bodyPr>
-          <a:lstStyle/>
-          <a:p>
-            <a:pPr algn="l">
-              <a:defRPr sz="1200" b="0" i="0">
+            <a:off x="914400" y="2194560"/>
+            <a:ext cx="3063240" cy="1280160"/>
+          </a:xfrm>
+          <a:prstGeom prst="rect">
+            <a:avLst/>
+          </a:prstGeom>
+          <a:noFill/>
+        </p:spPr>
+        <p:txBody>
+          <a:bodyPr wrap="square">
+            <a:spAutoFit/>
+          </a:bodyPr>
+          <a:lstStyle/>
+          <a:p>
+            <a:pPr algn="l">
+              <a:defRPr sz="1100" b="0" i="0">
                 <a:solidFill>
                   <a:srgbClr val="3A3A3C"/>
                 </a:solidFill>
@@ -18779,7 +18944,15 @@
               </a:defRPr>
             </a:pPr>
             <a:r>
-              <a:t>AXS and Hammerhead dealer support. One product owner, one integration engineer. Human approval on all outputs. Weekly quality reviews with defined rollback trigger.</a:t>
+              <a:t>1 integration engineer + 1 product owner.</a:t>
+            </a:r>
+            <a:br/>
+            <a:r>
+              <a:t>No new AI/ML hires. 250-400 existing engineers</a:t>
+            </a:r>
+            <a:br/>
+            <a:r>
+              <a:t>have capacity with AI-assisted tooling.</a:t>
             </a:r>
           </a:p>
         </p:txBody>
@@ -18792,8 +18965,8 @@
         </p:nvSpPr>
         <p:spPr>
           <a:xfrm>
-            <a:off x="731520" y="2788920"/>
-            <a:ext cx="10515600" cy="1188720"/>
+            <a:off x="731520" y="3840480"/>
+            <a:ext cx="3429000" cy="1828800"/>
           </a:xfrm>
           <a:prstGeom prst="roundRect">
             <a:avLst>
@@ -18833,52 +19006,36 @@
       </p:sp>
       <p:sp>
         <p:nvSpPr>
-          <p:cNvPr id="10" name="Oval 9"/>
-          <p:cNvSpPr/>
-          <p:nvPr/>
-        </p:nvSpPr>
-        <p:spPr>
-          <a:xfrm>
-            <a:off x="1097280" y="3017520"/>
-            <a:ext cx="457200" cy="457200"/>
-          </a:xfrm>
-          <a:prstGeom prst="ellipse">
-            <a:avLst/>
-          </a:prstGeom>
-          <a:solidFill>
-            <a:srgbClr val="1C1C1E"/>
-          </a:solidFill>
-          <a:ln>
-            <a:noFill/>
-          </a:ln>
-        </p:spPr>
-        <p:style>
-          <a:lnRef idx="1">
-            <a:schemeClr val="accent1"/>
-          </a:lnRef>
-          <a:fillRef idx="3">
-            <a:schemeClr val="accent1"/>
-          </a:fillRef>
-          <a:effectRef idx="2">
-            <a:schemeClr val="accent1"/>
-          </a:effectRef>
-          <a:fontRef idx="minor">
-            <a:schemeClr val="lt1"/>
-          </a:fontRef>
-        </p:style>
-        <p:txBody>
-          <a:bodyPr rtlCol="0" anchor="ctr"/>
-          <a:lstStyle/>
-          <a:p>
-            <a:pPr algn="ctr">
-              <a:defRPr sz="1800" b="1">
-                <a:solidFill>
-                  <a:srgbClr val="F5F5F3"/>
-                </a:solidFill>
-              </a:defRPr>
-            </a:pPr>
-            <a:r>
-              <a:t>2</a:t>
+          <p:cNvPr id="10" name="TextBox 9"/>
+          <p:cNvSpPr txBox="1"/>
+          <p:nvPr/>
+        </p:nvSpPr>
+        <p:spPr>
+          <a:xfrm>
+            <a:off x="914400" y="3950208"/>
+            <a:ext cx="3063240" cy="228600"/>
+          </a:xfrm>
+          <a:prstGeom prst="rect">
+            <a:avLst/>
+          </a:prstGeom>
+          <a:noFill/>
+        </p:spPr>
+        <p:txBody>
+          <a:bodyPr wrap="square">
+            <a:spAutoFit/>
+          </a:bodyPr>
+          <a:lstStyle/>
+          <a:p>
+            <a:pPr algn="l">
+              <a:defRPr sz="900" b="1" i="0">
+                <a:solidFill>
+                  <a:srgbClr val="767676"/>
+                </a:solidFill>
+                <a:latin typeface="Calibri"/>
+              </a:defRPr>
+            </a:pPr>
+            <a:r>
+              <a:t>PHASE 2+</a:t>
             </a:r>
           </a:p>
         </p:txBody>
@@ -18891,22 +19048,62 @@
         </p:nvSpPr>
         <p:spPr>
           <a:xfrm>
-            <a:off x="1828800" y="2880360"/>
-            <a:ext cx="8961120" cy="320040"/>
-          </a:xfrm>
-          <a:prstGeom prst="rect">
-            <a:avLst/>
-          </a:prstGeom>
-          <a:noFill/>
-        </p:spPr>
-        <p:txBody>
-          <a:bodyPr wrap="square">
-            <a:spAutoFit/>
-          </a:bodyPr>
-          <a:lstStyle/>
-          <a:p>
-            <a:pPr algn="l">
-              <a:defRPr sz="1800" b="1" i="0">
+            <a:off x="914400" y="4206240"/>
+            <a:ext cx="3063240" cy="1280160"/>
+          </a:xfrm>
+          <a:prstGeom prst="rect">
+            <a:avLst/>
+          </a:prstGeom>
+          <a:noFill/>
+        </p:spPr>
+        <p:txBody>
+          <a:bodyPr wrap="square">
+            <a:spAutoFit/>
+          </a:bodyPr>
+          <a:lstStyle/>
+          <a:p>
+            <a:pPr algn="l">
+              <a:defRPr sz="1100" b="0" i="0">
+                <a:solidFill>
+                  <a:srgbClr val="3A3A3C"/>
+                </a:solidFill>
+                <a:latin typeface="Calibri"/>
+              </a:defRPr>
+            </a:pPr>
+            <a:r>
+              <a:t>Add product managers and QA capacity.</a:t>
+            </a:r>
+            <a:br/>
+            <a:r>
+              <a:t>The constraint is PM and QA, not developers.</a:t>
+            </a:r>
+          </a:p>
+        </p:txBody>
+      </p:sp>
+      <p:sp>
+        <p:nvSpPr>
+          <p:cNvPr id="12" name="TextBox 11"/>
+          <p:cNvSpPr txBox="1"/>
+          <p:nvPr/>
+        </p:nvSpPr>
+        <p:spPr>
+          <a:xfrm>
+            <a:off x="4343400" y="1371600"/>
+            <a:ext cx="3429000" cy="274320"/>
+          </a:xfrm>
+          <a:prstGeom prst="rect">
+            <a:avLst/>
+          </a:prstGeom>
+          <a:noFill/>
+        </p:spPr>
+        <p:txBody>
+          <a:bodyPr wrap="square">
+            <a:spAutoFit/>
+          </a:bodyPr>
+          <a:lstStyle/>
+          <a:p>
+            <a:pPr algn="l">
+              <a:defRPr sz="1400" b="1" i="0">
                 <a:solidFill>
                   <a:srgbClr val="1C1C1E"/>
                 </a:solidFill>
@@ -18914,43 +19111,7 @@
               </a:defRPr>
             </a:pPr>
             <a:r>
-              <a:t>Begin Data Infrastructure Planning</a:t>
-            </a:r>
-          </a:p>
-        </p:txBody>
-      </p:sp>
-      <p:sp>
-        <p:nvSpPr>
-          <p:cNvPr id="12" name="TextBox 11"/>
-          <p:cNvSpPr txBox="1"/>
-          <p:nvPr/>
-        </p:nvSpPr>
-        <p:spPr>
-          <a:xfrm>
-            <a:off x="1828800" y="3246120"/>
-            <a:ext cx="8961120" cy="548640"/>
-          </a:xfrm>
-          <a:prstGeom prst="rect">
-            <a:avLst/>
-          </a:prstGeom>
-          <a:noFill/>
-        </p:spPr>
-        <p:txBody>
-          <a:bodyPr wrap="square">
-            <a:spAutoFit/>
-          </a:bodyPr>
-          <a:lstStyle/>
-          <a:p>
-            <a:pPr algn="l">
-              <a:defRPr sz="1200" b="0" i="0">
-                <a:solidFill>
-                  <a:srgbClr val="3A3A3C"/>
-                </a:solidFill>
-                <a:latin typeface="Calibri"/>
-              </a:defRPr>
-            </a:pPr>
-            <a:r>
-              <a:t>Unified data layer connecting Shopify, support systems, and telemetry. Foundation for Phase 2 forecasting and Phase 4 AXS Intelligence platform.</a:t>
+              <a:t>DATA</a:t>
             </a:r>
           </a:p>
         </p:txBody>
@@ -18963,8 +19124,8 @@
         </p:nvSpPr>
         <p:spPr>
           <a:xfrm>
-            <a:off x="731520" y="4206240"/>
-            <a:ext cx="10515600" cy="1188720"/>
+            <a:off x="4343400" y="1828800"/>
+            <a:ext cx="3429000" cy="1828800"/>
           </a:xfrm>
           <a:prstGeom prst="roundRect">
             <a:avLst>
@@ -19004,142 +19165,98 @@
       </p:sp>
       <p:sp>
         <p:nvSpPr>
-          <p:cNvPr id="14" name="Oval 13"/>
+          <p:cNvPr id="14" name="TextBox 13"/>
+          <p:cNvSpPr txBox="1"/>
+          <p:nvPr/>
+        </p:nvSpPr>
+        <p:spPr>
+          <a:xfrm>
+            <a:off x="4526280" y="1938528"/>
+            <a:ext cx="3063240" cy="228600"/>
+          </a:xfrm>
+          <a:prstGeom prst="rect">
+            <a:avLst/>
+          </a:prstGeom>
+          <a:noFill/>
+        </p:spPr>
+        <p:txBody>
+          <a:bodyPr wrap="square">
+            <a:spAutoFit/>
+          </a:bodyPr>
+          <a:lstStyle/>
+          <a:p>
+            <a:pPr algn="l">
+              <a:defRPr sz="900" b="1" i="0">
+                <a:solidFill>
+                  <a:srgbClr val="767676"/>
+                </a:solidFill>
+                <a:latin typeface="Calibri"/>
+              </a:defRPr>
+            </a:pPr>
+            <a:r>
+              <a:t>TODAY</a:t>
+            </a:r>
+          </a:p>
+        </p:txBody>
+      </p:sp>
+      <p:sp>
+        <p:nvSpPr>
+          <p:cNvPr id="15" name="TextBox 14"/>
+          <p:cNvSpPr txBox="1"/>
+          <p:nvPr/>
+        </p:nvSpPr>
+        <p:spPr>
+          <a:xfrm>
+            <a:off x="4526280" y="2194560"/>
+            <a:ext cx="3063240" cy="1280160"/>
+          </a:xfrm>
+          <a:prstGeom prst="rect">
+            <a:avLst/>
+          </a:prstGeom>
+          <a:noFill/>
+        </p:spPr>
+        <p:txBody>
+          <a:bodyPr wrap="square">
+            <a:spAutoFit/>
+          </a:bodyPr>
+          <a:lstStyle/>
+          <a:p>
+            <a:pPr algn="l">
+              <a:defRPr sz="1100" b="0" i="0">
+                <a:solidFill>
+                  <a:srgbClr val="3A3A3C"/>
+                </a:solidFill>
+                <a:latin typeface="Calibri"/>
+              </a:defRPr>
+            </a:pPr>
+            <a:r>
+              <a:t>Good data in pockets, messy data everywhere</a:t>
+            </a:r>
+            <a:br/>
+            <a:r>
+              <a:t>else. 18 months of consolidation underway.</a:t>
+            </a:r>
+            <a:br/>
+            <a:r>
+              <a:t>AXS + Hammerhead data is pilot-ready.</a:t>
+            </a:r>
+          </a:p>
+        </p:txBody>
+      </p:sp>
+      <p:sp>
+        <p:nvSpPr>
+          <p:cNvPr id="16" name="Rounded Rectangle 15"/>
           <p:cNvSpPr/>
           <p:nvPr/>
         </p:nvSpPr>
         <p:spPr>
           <a:xfrm>
-            <a:off x="1097280" y="4434840"/>
-            <a:ext cx="457200" cy="457200"/>
-          </a:xfrm>
-          <a:prstGeom prst="ellipse">
-            <a:avLst/>
-          </a:prstGeom>
-          <a:solidFill>
-            <a:srgbClr val="1C1C1E"/>
-          </a:solidFill>
-          <a:ln>
-            <a:noFill/>
-          </a:ln>
-        </p:spPr>
-        <p:style>
-          <a:lnRef idx="1">
-            <a:schemeClr val="accent1"/>
-          </a:lnRef>
-          <a:fillRef idx="3">
-            <a:schemeClr val="accent1"/>
-          </a:fillRef>
-          <a:effectRef idx="2">
-            <a:schemeClr val="accent1"/>
-          </a:effectRef>
-          <a:fontRef idx="minor">
-            <a:schemeClr val="lt1"/>
-          </a:fontRef>
-        </p:style>
-        <p:txBody>
-          <a:bodyPr rtlCol="0" anchor="ctr"/>
-          <a:lstStyle/>
-          <a:p>
-            <a:pPr algn="ctr">
-              <a:defRPr sz="1800" b="1">
-                <a:solidFill>
-                  <a:srgbClr val="F5F5F3"/>
-                </a:solidFill>
-              </a:defRPr>
-            </a:pPr>
-            <a:r>
-              <a:t>3</a:t>
-            </a:r>
-          </a:p>
-        </p:txBody>
-      </p:sp>
-      <p:sp>
-        <p:nvSpPr>
-          <p:cNvPr id="15" name="TextBox 14"/>
-          <p:cNvSpPr txBox="1"/>
-          <p:nvPr/>
-        </p:nvSpPr>
-        <p:spPr>
-          <a:xfrm>
-            <a:off x="1828800" y="4297680"/>
-            <a:ext cx="8961120" cy="320040"/>
-          </a:xfrm>
-          <a:prstGeom prst="rect">
-            <a:avLst/>
-          </a:prstGeom>
-          <a:noFill/>
-        </p:spPr>
-        <p:txBody>
-          <a:bodyPr wrap="square">
-            <a:spAutoFit/>
-          </a:bodyPr>
-          <a:lstStyle/>
-          <a:p>
-            <a:pPr algn="l">
-              <a:defRPr sz="1800" b="1" i="0">
-                <a:solidFill>
-                  <a:srgbClr val="1C1C1E"/>
-                </a:solidFill>
-                <a:latin typeface="Calibri"/>
-              </a:defRPr>
-            </a:pPr>
-            <a:r>
-              <a:t>Hold Sequencing Discipline</a:t>
-            </a:r>
-          </a:p>
-        </p:txBody>
-      </p:sp>
-      <p:sp>
-        <p:nvSpPr>
-          <p:cNvPr id="16" name="TextBox 15"/>
-          <p:cNvSpPr txBox="1"/>
-          <p:nvPr/>
-        </p:nvSpPr>
-        <p:spPr>
-          <a:xfrm>
-            <a:off x="1828800" y="4663440"/>
-            <a:ext cx="8961120" cy="548640"/>
-          </a:xfrm>
-          <a:prstGeom prst="rect">
-            <a:avLst/>
-          </a:prstGeom>
-          <a:noFill/>
-        </p:spPr>
-        <p:txBody>
-          <a:bodyPr wrap="square">
-            <a:spAutoFit/>
-          </a:bodyPr>
-          <a:lstStyle/>
-          <a:p>
-            <a:pPr algn="l">
-              <a:defRPr sz="1200" b="0" i="0">
-                <a:solidFill>
-                  <a:srgbClr val="3A3A3C"/>
-                </a:solidFill>
-                <a:latin typeface="Calibri"/>
-              </a:defRPr>
-            </a:pPr>
-            <a:r>
-              <a:t>Bounded, well-defined problems first. Broader transformation after measured proof. The 90-day pilot produces data to justify or redirect every subsequent investment.</a:t>
-            </a:r>
-          </a:p>
-        </p:txBody>
-      </p:sp>
-      <p:sp>
-        <p:nvSpPr>
-          <p:cNvPr id="17" name="Rounded Rectangle 16"/>
-          <p:cNvSpPr/>
-          <p:nvPr/>
-        </p:nvSpPr>
-        <p:spPr>
-          <a:xfrm>
-            <a:off x="731520" y="5715000"/>
-            <a:ext cx="10515600" cy="548640"/>
+            <a:off x="4343400" y="3840480"/>
+            <a:ext cx="3429000" cy="1828800"/>
           </a:xfrm>
           <a:prstGeom prst="roundRect">
             <a:avLst>
-              <a:gd name="adj" fmla="val 10000"/>
+              <a:gd name="adj" fmla="val 4000"/>
             </a:avLst>
           </a:prstGeom>
           <a:solidFill>
@@ -19175,23 +19292,139 @@
       </p:sp>
       <p:sp>
         <p:nvSpPr>
-          <p:cNvPr id="18" name="Rectangle 17"/>
+          <p:cNvPr id="17" name="TextBox 16"/>
+          <p:cNvSpPr txBox="1"/>
+          <p:nvPr/>
+        </p:nvSpPr>
+        <p:spPr>
+          <a:xfrm>
+            <a:off x="4526280" y="3950208"/>
+            <a:ext cx="3063240" cy="228600"/>
+          </a:xfrm>
+          <a:prstGeom prst="rect">
+            <a:avLst/>
+          </a:prstGeom>
+          <a:noFill/>
+        </p:spPr>
+        <p:txBody>
+          <a:bodyPr wrap="square">
+            <a:spAutoFit/>
+          </a:bodyPr>
+          <a:lstStyle/>
+          <a:p>
+            <a:pPr algn="l">
+              <a:defRPr sz="900" b="1" i="0">
+                <a:solidFill>
+                  <a:srgbClr val="767676"/>
+                </a:solidFill>
+                <a:latin typeface="Calibri"/>
+              </a:defRPr>
+            </a:pPr>
+            <a:r>
+              <a:t>NEEDED</a:t>
+            </a:r>
+          </a:p>
+        </p:txBody>
+      </p:sp>
+      <p:sp>
+        <p:nvSpPr>
+          <p:cNvPr id="18" name="TextBox 17"/>
+          <p:cNvSpPr txBox="1"/>
+          <p:nvPr/>
+        </p:nvSpPr>
+        <p:spPr>
+          <a:xfrm>
+            <a:off x="4526280" y="4206240"/>
+            <a:ext cx="3063240" cy="1280160"/>
+          </a:xfrm>
+          <a:prstGeom prst="rect">
+            <a:avLst/>
+          </a:prstGeom>
+          <a:noFill/>
+        </p:spPr>
+        <p:txBody>
+          <a:bodyPr wrap="square">
+            <a:spAutoFit/>
+          </a:bodyPr>
+          <a:lstStyle/>
+          <a:p>
+            <a:pPr algn="l">
+              <a:defRPr sz="1100" b="0" i="0">
+                <a:solidFill>
+                  <a:srgbClr val="3A3A3C"/>
+                </a:solidFill>
+                <a:latin typeface="Calibri"/>
+              </a:defRPr>
+            </a:pPr>
+            <a:r>
+              <a:t>Unified data layer linking CRM, inventory,</a:t>
+            </a:r>
+            <a:br/>
+            <a:r>
+              <a:t>and telemetry. Foundation for Phase 2-4.</a:t>
+            </a:r>
+          </a:p>
+        </p:txBody>
+      </p:sp>
+      <p:sp>
+        <p:nvSpPr>
+          <p:cNvPr id="19" name="TextBox 18"/>
+          <p:cNvSpPr txBox="1"/>
+          <p:nvPr/>
+        </p:nvSpPr>
+        <p:spPr>
+          <a:xfrm>
+            <a:off x="7955280" y="1371600"/>
+            <a:ext cx="3429000" cy="274320"/>
+          </a:xfrm>
+          <a:prstGeom prst="rect">
+            <a:avLst/>
+          </a:prstGeom>
+          <a:noFill/>
+        </p:spPr>
+        <p:txBody>
+          <a:bodyPr wrap="square">
+            <a:spAutoFit/>
+          </a:bodyPr>
+          <a:lstStyle/>
+          <a:p>
+            <a:pPr algn="l">
+              <a:defRPr sz="1400" b="1" i="0">
+                <a:solidFill>
+                  <a:srgbClr val="1C1C1E"/>
+                </a:solidFill>
+                <a:latin typeface="Calibri"/>
+              </a:defRPr>
+            </a:pPr>
+            <a:r>
+              <a:t>LEADERSHIP</a:t>
+            </a:r>
+          </a:p>
+        </p:txBody>
+      </p:sp>
+      <p:sp>
+        <p:nvSpPr>
+          <p:cNvPr id="20" name="Rounded Rectangle 19"/>
           <p:cNvSpPr/>
           <p:nvPr/>
         </p:nvSpPr>
         <p:spPr>
           <a:xfrm>
-            <a:off x="731520" y="5715000"/>
-            <a:ext cx="50800" cy="548640"/>
-          </a:xfrm>
-          <a:prstGeom prst="rect">
-            <a:avLst/>
+            <a:off x="7955280" y="1828800"/>
+            <a:ext cx="3429000" cy="1828800"/>
+          </a:xfrm>
+          <a:prstGeom prst="roundRect">
+            <a:avLst>
+              <a:gd name="adj" fmla="val 4000"/>
+            </a:avLst>
           </a:prstGeom>
           <a:solidFill>
-            <a:srgbClr val="E51937"/>
+            <a:srgbClr val="FFFFFF"/>
           </a:solidFill>
-          <a:ln>
-            <a:noFill/>
+          <a:ln w="12700">
+            <a:solidFill>
+              <a:srgbClr val="E0E0DE"/>
+            </a:solidFill>
           </a:ln>
         </p:spPr>
         <p:style>
@@ -19218,47 +19451,28 @@
       </p:sp>
       <p:sp>
         <p:nvSpPr>
-          <p:cNvPr id="19" name="TextBox 18"/>
-          <p:cNvSpPr txBox="1"/>
-          <p:nvPr/>
-        </p:nvSpPr>
-        <p:spPr>
-          <a:xfrm>
-            <a:off x="1188720" y="5742432"/>
-            <a:ext cx="9601200" cy="502920"/>
-          </a:xfrm>
-          <a:prstGeom prst="rect">
-            <a:avLst/>
-          </a:prstGeom>
-          <a:noFill/>
-        </p:spPr>
-        <p:txBody>
-          <a:bodyPr wrap="square">
-            <a:spAutoFit/>
-          </a:bodyPr>
-          <a:lstStyle/>
-          <a:p>
-            <a:pPr>
-              <a:spcAft>
-                <a:spcPts val="260"/>
-              </a:spcAft>
-              <a:defRPr sz="1300" b="1">
-                <a:solidFill>
-                  <a:srgbClr val="1C1C1E"/>
-                </a:solidFill>
-                <a:latin typeface="Calibri"/>
-              </a:defRPr>
-            </a:pPr>
-            <a:r>
-              <a:t>Expected Year-1 return: 3.8x on $2.7M spend</a:t>
-            </a:r>
-          </a:p>
-          <a:p>
-            <a:pPr>
-              <a:spcAft>
-                <a:spcPts val="220"/>
-              </a:spcAft>
-              <a:defRPr sz="1100" b="0">
+          <p:cNvPr id="21" name="TextBox 20"/>
+          <p:cNvSpPr txBox="1"/>
+          <p:nvPr/>
+        </p:nvSpPr>
+        <p:spPr>
+          <a:xfrm>
+            <a:off x="8138160" y="1938528"/>
+            <a:ext cx="3063240" cy="228600"/>
+          </a:xfrm>
+          <a:prstGeom prst="rect">
+            <a:avLst/>
+          </a:prstGeom>
+          <a:noFill/>
+        </p:spPr>
+        <p:txBody>
+          <a:bodyPr wrap="square">
+            <a:spAutoFit/>
+          </a:bodyPr>
+          <a:lstStyle/>
+          <a:p>
+            <a:pPr algn="l">
+              <a:defRPr sz="900" b="1" i="0">
                 <a:solidFill>
                   <a:srgbClr val="767676"/>
                 </a:solidFill>
@@ -19266,14 +19480,347 @@
               </a:defRPr>
             </a:pPr>
             <a:r>
-              <a:t>Downside bounded by 90-day pilot  |  Upside scales with SRAM's data advantage</a:t>
-            </a:r>
-          </a:p>
-        </p:txBody>
-      </p:sp>
-      <p:sp>
-        <p:nvSpPr>
-          <p:cNvPr id="20" name="TextBox 19"/>
+              <a:t>PHASE 1</a:t>
+            </a:r>
+          </a:p>
+        </p:txBody>
+      </p:sp>
+      <p:sp>
+        <p:nvSpPr>
+          <p:cNvPr id="22" name="TextBox 21"/>
+          <p:cNvSpPr txBox="1"/>
+          <p:nvPr/>
+        </p:nvSpPr>
+        <p:spPr>
+          <a:xfrm>
+            <a:off x="8138160" y="2194560"/>
+            <a:ext cx="3063240" cy="1280160"/>
+          </a:xfrm>
+          <a:prstGeom prst="rect">
+            <a:avLst/>
+          </a:prstGeom>
+          <a:noFill/>
+        </p:spPr>
+        <p:txBody>
+          <a:bodyPr wrap="square">
+            <a:spAutoFit/>
+          </a:bodyPr>
+          <a:lstStyle/>
+          <a:p>
+            <a:pPr algn="l">
+              <a:defRPr sz="1100" b="0" i="0">
+                <a:solidFill>
+                  <a:srgbClr val="3A3A3C"/>
+                </a:solidFill>
+                <a:latin typeface="Calibri"/>
+              </a:defRPr>
+            </a:pPr>
+            <a:r>
+              <a:t>CEO assigns one accountable business owner</a:t>
+            </a:r>
+            <a:br/>
+            <a:r>
+              <a:t>with authority over scope and tooling decisions.</a:t>
+            </a:r>
+            <a:br/>
+            <a:r>
+              <a:t>Weekly quality reviews.</a:t>
+            </a:r>
+          </a:p>
+        </p:txBody>
+      </p:sp>
+      <p:sp>
+        <p:nvSpPr>
+          <p:cNvPr id="23" name="Rounded Rectangle 22"/>
+          <p:cNvSpPr/>
+          <p:nvPr/>
+        </p:nvSpPr>
+        <p:spPr>
+          <a:xfrm>
+            <a:off x="7955280" y="3840480"/>
+            <a:ext cx="3429000" cy="1828800"/>
+          </a:xfrm>
+          <a:prstGeom prst="roundRect">
+            <a:avLst>
+              <a:gd name="adj" fmla="val 4000"/>
+            </a:avLst>
+          </a:prstGeom>
+          <a:solidFill>
+            <a:srgbClr val="FFFFFF"/>
+          </a:solidFill>
+          <a:ln w="12700">
+            <a:solidFill>
+              <a:srgbClr val="E0E0DE"/>
+            </a:solidFill>
+          </a:ln>
+        </p:spPr>
+        <p:style>
+          <a:lnRef idx="1">
+            <a:schemeClr val="accent1"/>
+          </a:lnRef>
+          <a:fillRef idx="3">
+            <a:schemeClr val="accent1"/>
+          </a:fillRef>
+          <a:effectRef idx="2">
+            <a:schemeClr val="accent1"/>
+          </a:effectRef>
+          <a:fontRef idx="minor">
+            <a:schemeClr val="lt1"/>
+          </a:fontRef>
+        </p:style>
+        <p:txBody>
+          <a:bodyPr rtlCol="0" anchor="ctr"/>
+          <a:lstStyle/>
+          <a:p>
+            <a:pPr algn="ctr"/>
+          </a:p>
+        </p:txBody>
+      </p:sp>
+      <p:sp>
+        <p:nvSpPr>
+          <p:cNvPr id="24" name="TextBox 23"/>
+          <p:cNvSpPr txBox="1"/>
+          <p:nvPr/>
+        </p:nvSpPr>
+        <p:spPr>
+          <a:xfrm>
+            <a:off x="8138160" y="3950208"/>
+            <a:ext cx="3063240" cy="228600"/>
+          </a:xfrm>
+          <a:prstGeom prst="rect">
+            <a:avLst/>
+          </a:prstGeom>
+          <a:noFill/>
+        </p:spPr>
+        <p:txBody>
+          <a:bodyPr wrap="square">
+            <a:spAutoFit/>
+          </a:bodyPr>
+          <a:lstStyle/>
+          <a:p>
+            <a:pPr algn="l">
+              <a:defRPr sz="900" b="1" i="0">
+                <a:solidFill>
+                  <a:srgbClr val="767676"/>
+                </a:solidFill>
+                <a:latin typeface="Calibri"/>
+              </a:defRPr>
+            </a:pPr>
+            <a:r>
+              <a:t>OPEN QUESTION</a:t>
+            </a:r>
+          </a:p>
+        </p:txBody>
+      </p:sp>
+      <p:sp>
+        <p:nvSpPr>
+          <p:cNvPr id="25" name="TextBox 24"/>
+          <p:cNvSpPr txBox="1"/>
+          <p:nvPr/>
+        </p:nvSpPr>
+        <p:spPr>
+          <a:xfrm>
+            <a:off x="8138160" y="4206240"/>
+            <a:ext cx="3063240" cy="1280160"/>
+          </a:xfrm>
+          <a:prstGeom prst="rect">
+            <a:avLst/>
+          </a:prstGeom>
+          <a:noFill/>
+        </p:spPr>
+        <p:txBody>
+          <a:bodyPr wrap="square">
+            <a:spAutoFit/>
+          </a:bodyPr>
+          <a:lstStyle/>
+          <a:p>
+            <a:pPr algn="l">
+              <a:defRPr sz="1100" b="0" i="0">
+                <a:solidFill>
+                  <a:srgbClr val="3A3A3C"/>
+                </a:solidFill>
+                <a:latin typeface="Calibri"/>
+              </a:defRPr>
+            </a:pPr>
+            <a:r>
+              <a:t>No confirmed executive sponsor above</a:t>
+            </a:r>
+            <a:br/>
+            <a:r>
+              <a:t>Hartsell for the data consolidation roadmap.</a:t>
+            </a:r>
+            <a:br/>
+            <a:r>
+              <a:t>Resolving this is a prerequisite for Phase 2.</a:t>
+            </a:r>
+          </a:p>
+        </p:txBody>
+      </p:sp>
+      <p:sp>
+        <p:nvSpPr>
+          <p:cNvPr id="26" name="Rounded Rectangle 25"/>
+          <p:cNvSpPr/>
+          <p:nvPr/>
+        </p:nvSpPr>
+        <p:spPr>
+          <a:xfrm>
+            <a:off x="731520" y="5623560"/>
+            <a:ext cx="10698480" cy="502920"/>
+          </a:xfrm>
+          <a:prstGeom prst="roundRect">
+            <a:avLst>
+              <a:gd name="adj" fmla="val 4000"/>
+            </a:avLst>
+          </a:prstGeom>
+          <a:solidFill>
+            <a:srgbClr val="FFFFFF"/>
+          </a:solidFill>
+          <a:ln w="12700">
+            <a:solidFill>
+              <a:srgbClr val="E0E0DE"/>
+            </a:solidFill>
+          </a:ln>
+        </p:spPr>
+        <p:style>
+          <a:lnRef idx="1">
+            <a:schemeClr val="accent1"/>
+          </a:lnRef>
+          <a:fillRef idx="3">
+            <a:schemeClr val="accent1"/>
+          </a:fillRef>
+          <a:effectRef idx="2">
+            <a:schemeClr val="accent1"/>
+          </a:effectRef>
+          <a:fontRef idx="minor">
+            <a:schemeClr val="lt1"/>
+          </a:fontRef>
+        </p:style>
+        <p:txBody>
+          <a:bodyPr rtlCol="0" anchor="ctr"/>
+          <a:lstStyle/>
+          <a:p>
+            <a:pPr algn="ctr"/>
+          </a:p>
+        </p:txBody>
+      </p:sp>
+      <p:sp>
+        <p:nvSpPr>
+          <p:cNvPr id="27" name="Rectangle 26"/>
+          <p:cNvSpPr/>
+          <p:nvPr/>
+        </p:nvSpPr>
+        <p:spPr>
+          <a:xfrm>
+            <a:off x="731520" y="5623560"/>
+            <a:ext cx="50800" cy="502920"/>
+          </a:xfrm>
+          <a:prstGeom prst="rect">
+            <a:avLst/>
+          </a:prstGeom>
+          <a:solidFill>
+            <a:srgbClr val="767676"/>
+          </a:solidFill>
+          <a:ln>
+            <a:noFill/>
+          </a:ln>
+        </p:spPr>
+        <p:style>
+          <a:lnRef idx="1">
+            <a:schemeClr val="accent1"/>
+          </a:lnRef>
+          <a:fillRef idx="3">
+            <a:schemeClr val="accent1"/>
+          </a:fillRef>
+          <a:effectRef idx="2">
+            <a:schemeClr val="accent1"/>
+          </a:effectRef>
+          <a:fontRef idx="minor">
+            <a:schemeClr val="lt1"/>
+          </a:fontRef>
+        </p:style>
+        <p:txBody>
+          <a:bodyPr rtlCol="0" anchor="ctr"/>
+          <a:lstStyle/>
+          <a:p>
+            <a:pPr algn="ctr"/>
+          </a:p>
+        </p:txBody>
+      </p:sp>
+      <p:sp>
+        <p:nvSpPr>
+          <p:cNvPr id="28" name="TextBox 27"/>
+          <p:cNvSpPr txBox="1"/>
+          <p:nvPr/>
+        </p:nvSpPr>
+        <p:spPr>
+          <a:xfrm>
+            <a:off x="1051560" y="5715000"/>
+            <a:ext cx="10149840" cy="137160"/>
+          </a:xfrm>
+          <a:prstGeom prst="rect">
+            <a:avLst/>
+          </a:prstGeom>
+          <a:noFill/>
+        </p:spPr>
+        <p:txBody>
+          <a:bodyPr wrap="square">
+            <a:spAutoFit/>
+          </a:bodyPr>
+          <a:lstStyle/>
+          <a:p>
+            <a:pPr algn="l">
+              <a:defRPr sz="1200" b="0" i="1">
+                <a:solidFill>
+                  <a:srgbClr val="3A3A3C"/>
+                </a:solidFill>
+                <a:latin typeface="Calibri"/>
+              </a:defRPr>
+            </a:pPr>
+            <a:r>
+              <a:t>“We are 60 to 70 percent of the way to deploying a bounded support assistant for AXS and Hammerhead products.”</a:t>
+            </a:r>
+          </a:p>
+        </p:txBody>
+      </p:sp>
+      <p:sp>
+        <p:nvSpPr>
+          <p:cNvPr id="29" name="TextBox 28"/>
+          <p:cNvSpPr txBox="1"/>
+          <p:nvPr/>
+        </p:nvSpPr>
+        <p:spPr>
+          <a:xfrm>
+            <a:off x="1051560" y="5852160"/>
+            <a:ext cx="10149840" cy="228600"/>
+          </a:xfrm>
+          <a:prstGeom prst="rect">
+            <a:avLst/>
+          </a:prstGeom>
+          <a:noFill/>
+        </p:spPr>
+        <p:txBody>
+          <a:bodyPr wrap="square">
+            <a:spAutoFit/>
+          </a:bodyPr>
+          <a:lstStyle/>
+          <a:p>
+            <a:pPr algn="l">
+              <a:defRPr sz="1000" b="1" i="0">
+                <a:solidFill>
+                  <a:srgbClr val="767676"/>
+                </a:solidFill>
+                <a:latin typeface="Calibri"/>
+              </a:defRPr>
+            </a:pPr>
+            <a:r>
+              <a:t>Jordan Hartsell, VP Digital Products, SRAM</a:t>
+            </a:r>
+          </a:p>
+        </p:txBody>
+      </p:sp>
+      <p:sp>
+        <p:nvSpPr>
+          <p:cNvPr id="30" name="TextBox 29"/>
           <p:cNvSpPr txBox="1"/>
           <p:nvPr/>
         </p:nvSpPr>
@@ -19309,7 +19856,7 @@
       </p:sp>
       <p:sp>
         <p:nvSpPr>
-          <p:cNvPr id="21" name="TextBox 20"/>
+          <p:cNvPr id="31" name="TextBox 30"/>
           <p:cNvSpPr txBox="1"/>
           <p:nvPr/>
         </p:nvSpPr>
@@ -19400,7 +19947,7 @@
               </a:defRPr>
             </a:pPr>
             <a:r>
-              <a:t>APPENDIX</a:t>
+              <a:t>THE DECISION</a:t>
             </a:r>
           </a:p>
         </p:txBody>
@@ -19436,7 +19983,7 @@
               </a:defRPr>
             </a:pPr>
             <a:r>
-              <a:t>Financial detail across three scenarios</a:t>
+              <a:t>Three actions for SRAM's CEO</a:t>
             </a:r>
           </a:p>
         </p:txBody>
@@ -19486,169 +20033,27 @@
       </p:sp>
       <p:sp>
         <p:nvSpPr>
-          <p:cNvPr id="5" name="TextBox 4"/>
-          <p:cNvSpPr txBox="1"/>
+          <p:cNvPr id="5" name="Rounded Rectangle 4"/>
+          <p:cNvSpPr/>
           <p:nvPr/>
         </p:nvSpPr>
         <p:spPr>
           <a:xfrm>
             <a:off x="731520" y="1371600"/>
-            <a:ext cx="2743200" cy="274320"/>
-          </a:xfrm>
-          <a:prstGeom prst="rect">
-            <a:avLst/>
-          </a:prstGeom>
-          <a:noFill/>
-        </p:spPr>
-        <p:txBody>
-          <a:bodyPr wrap="square">
-            <a:spAutoFit/>
-          </a:bodyPr>
-          <a:lstStyle/>
-          <a:p>
-            <a:pPr algn="l">
-              <a:defRPr sz="1100" b="1" i="0">
-                <a:solidFill>
-                  <a:srgbClr val="767676"/>
-                </a:solidFill>
-                <a:latin typeface="Calibri"/>
-              </a:defRPr>
-            </a:pPr>
-            <a:r>
-              <a:t>Category</a:t>
-            </a:r>
-          </a:p>
-        </p:txBody>
-      </p:sp>
-      <p:sp>
-        <p:nvSpPr>
-          <p:cNvPr id="6" name="TextBox 5"/>
-          <p:cNvSpPr txBox="1"/>
-          <p:nvPr/>
-        </p:nvSpPr>
-        <p:spPr>
-          <a:xfrm>
-            <a:off x="3474720" y="1371600"/>
-            <a:ext cx="2743200" cy="274320"/>
-          </a:xfrm>
-          <a:prstGeom prst="rect">
-            <a:avLst/>
-          </a:prstGeom>
-          <a:noFill/>
-        </p:spPr>
-        <p:txBody>
-          <a:bodyPr wrap="square">
-            <a:spAutoFit/>
-          </a:bodyPr>
-          <a:lstStyle/>
-          <a:p>
-            <a:pPr algn="l">
-              <a:defRPr sz="1100" b="1" i="0">
-                <a:solidFill>
-                  <a:srgbClr val="767676"/>
-                </a:solidFill>
-                <a:latin typeface="Calibri"/>
-              </a:defRPr>
-            </a:pPr>
-            <a:r>
-              <a:t>Conservative</a:t>
-            </a:r>
-          </a:p>
-        </p:txBody>
-      </p:sp>
-      <p:sp>
-        <p:nvSpPr>
-          <p:cNvPr id="7" name="TextBox 6"/>
-          <p:cNvSpPr txBox="1"/>
-          <p:nvPr/>
-        </p:nvSpPr>
-        <p:spPr>
-          <a:xfrm>
-            <a:off x="6217920" y="1371600"/>
-            <a:ext cx="2743200" cy="274320"/>
-          </a:xfrm>
-          <a:prstGeom prst="rect">
-            <a:avLst/>
-          </a:prstGeom>
-          <a:noFill/>
-        </p:spPr>
-        <p:txBody>
-          <a:bodyPr wrap="square">
-            <a:spAutoFit/>
-          </a:bodyPr>
-          <a:lstStyle/>
-          <a:p>
-            <a:pPr algn="l">
-              <a:defRPr sz="1100" b="1" i="0">
-                <a:solidFill>
-                  <a:srgbClr val="767676"/>
-                </a:solidFill>
-                <a:latin typeface="Calibri"/>
-              </a:defRPr>
-            </a:pPr>
-            <a:r>
-              <a:t>Expected</a:t>
-            </a:r>
-          </a:p>
-        </p:txBody>
-      </p:sp>
-      <p:sp>
-        <p:nvSpPr>
-          <p:cNvPr id="8" name="TextBox 7"/>
-          <p:cNvSpPr txBox="1"/>
-          <p:nvPr/>
-        </p:nvSpPr>
-        <p:spPr>
-          <a:xfrm>
-            <a:off x="8961120" y="1371600"/>
-            <a:ext cx="2743200" cy="274320"/>
-          </a:xfrm>
-          <a:prstGeom prst="rect">
-            <a:avLst/>
-          </a:prstGeom>
-          <a:noFill/>
-        </p:spPr>
-        <p:txBody>
-          <a:bodyPr wrap="square">
-            <a:spAutoFit/>
-          </a:bodyPr>
-          <a:lstStyle/>
-          <a:p>
-            <a:pPr algn="l">
-              <a:defRPr sz="1100" b="1" i="0">
-                <a:solidFill>
-                  <a:srgbClr val="767676"/>
-                </a:solidFill>
-                <a:latin typeface="Calibri"/>
-              </a:defRPr>
-            </a:pPr>
-            <a:r>
-              <a:t>Upside</a:t>
-            </a:r>
-          </a:p>
-        </p:txBody>
-      </p:sp>
-      <p:sp>
-        <p:nvSpPr>
-          <p:cNvPr id="9" name="Rounded Rectangle 8"/>
-          <p:cNvSpPr/>
-          <p:nvPr/>
-        </p:nvSpPr>
-        <p:spPr>
-          <a:xfrm>
-            <a:off x="731520" y="1719072"/>
-            <a:ext cx="10515600" cy="347472"/>
+            <a:ext cx="10515600" cy="1188720"/>
           </a:xfrm>
           <a:prstGeom prst="roundRect">
             <a:avLst>
-              <a:gd name="adj" fmla="val 2000"/>
+              <a:gd name="adj" fmla="val 4000"/>
             </a:avLst>
           </a:prstGeom>
           <a:solidFill>
-            <a:srgbClr val="F0F0EE"/>
+            <a:srgbClr val="FFFFFF"/>
           </a:solidFill>
-          <a:ln>
-            <a:noFill/>
+          <a:ln w="12700">
+            <a:solidFill>
+              <a:srgbClr val="E0E0DE"/>
+            </a:solidFill>
           </a:ln>
         </p:spPr>
         <p:style>
@@ -19675,310 +20080,20 @@
       </p:sp>
       <p:sp>
         <p:nvSpPr>
-          <p:cNvPr id="10" name="TextBox 9"/>
-          <p:cNvSpPr txBox="1"/>
-          <p:nvPr/>
-        </p:nvSpPr>
-        <p:spPr>
-          <a:xfrm>
-            <a:off x="731520" y="1737360"/>
-            <a:ext cx="2743200" cy="274320"/>
-          </a:xfrm>
-          <a:prstGeom prst="rect">
-            <a:avLst/>
-          </a:prstGeom>
-          <a:noFill/>
-        </p:spPr>
-        <p:txBody>
-          <a:bodyPr wrap="square">
-            <a:spAutoFit/>
-          </a:bodyPr>
-          <a:lstStyle/>
-          <a:p>
-            <a:pPr algn="l">
-              <a:defRPr sz="1100" b="0" i="0">
-                <a:solidFill>
-                  <a:srgbClr val="3A3A3C"/>
-                </a:solidFill>
-                <a:latin typeface="Calibri"/>
-              </a:defRPr>
-            </a:pPr>
-            <a:r>
-              <a:t>Support assistant savings</a:t>
-            </a:r>
-          </a:p>
-        </p:txBody>
-      </p:sp>
-      <p:sp>
-        <p:nvSpPr>
-          <p:cNvPr id="11" name="TextBox 10"/>
-          <p:cNvSpPr txBox="1"/>
-          <p:nvPr/>
-        </p:nvSpPr>
-        <p:spPr>
-          <a:xfrm>
-            <a:off x="3474720" y="1737360"/>
-            <a:ext cx="2743200" cy="274320"/>
-          </a:xfrm>
-          <a:prstGeom prst="rect">
-            <a:avLst/>
-          </a:prstGeom>
-          <a:noFill/>
-        </p:spPr>
-        <p:txBody>
-          <a:bodyPr wrap="square">
-            <a:spAutoFit/>
-          </a:bodyPr>
-          <a:lstStyle/>
-          <a:p>
-            <a:pPr algn="l">
-              <a:defRPr sz="1100" b="0" i="0">
-                <a:solidFill>
-                  <a:srgbClr val="3A3A3C"/>
-                </a:solidFill>
-                <a:latin typeface="Calibri"/>
-              </a:defRPr>
-            </a:pPr>
-            <a:r>
-              <a:t>$0.5M</a:t>
-            </a:r>
-          </a:p>
-        </p:txBody>
-      </p:sp>
-      <p:sp>
-        <p:nvSpPr>
-          <p:cNvPr id="12" name="TextBox 11"/>
-          <p:cNvSpPr txBox="1"/>
-          <p:nvPr/>
-        </p:nvSpPr>
-        <p:spPr>
-          <a:xfrm>
-            <a:off x="6217920" y="1737360"/>
-            <a:ext cx="2743200" cy="274320"/>
-          </a:xfrm>
-          <a:prstGeom prst="rect">
-            <a:avLst/>
-          </a:prstGeom>
-          <a:noFill/>
-        </p:spPr>
-        <p:txBody>
-          <a:bodyPr wrap="square">
-            <a:spAutoFit/>
-          </a:bodyPr>
-          <a:lstStyle/>
-          <a:p>
-            <a:pPr algn="l">
-              <a:defRPr sz="1100" b="1" i="0">
-                <a:solidFill>
-                  <a:srgbClr val="1C1C1E"/>
-                </a:solidFill>
-                <a:latin typeface="Calibri"/>
-              </a:defRPr>
-            </a:pPr>
-            <a:r>
-              <a:t>$1.6M</a:t>
-            </a:r>
-          </a:p>
-        </p:txBody>
-      </p:sp>
-      <p:sp>
-        <p:nvSpPr>
-          <p:cNvPr id="13" name="TextBox 12"/>
-          <p:cNvSpPr txBox="1"/>
-          <p:nvPr/>
-        </p:nvSpPr>
-        <p:spPr>
-          <a:xfrm>
-            <a:off x="8961120" y="1737360"/>
-            <a:ext cx="2743200" cy="274320"/>
-          </a:xfrm>
-          <a:prstGeom prst="rect">
-            <a:avLst/>
-          </a:prstGeom>
-          <a:noFill/>
-        </p:spPr>
-        <p:txBody>
-          <a:bodyPr wrap="square">
-            <a:spAutoFit/>
-          </a:bodyPr>
-          <a:lstStyle/>
-          <a:p>
-            <a:pPr algn="l">
-              <a:defRPr sz="1100" b="0" i="0">
-                <a:solidFill>
-                  <a:srgbClr val="3A3A3C"/>
-                </a:solidFill>
-                <a:latin typeface="Calibri"/>
-              </a:defRPr>
-            </a:pPr>
-            <a:r>
-              <a:t>$4.3M</a:t>
-            </a:r>
-          </a:p>
-        </p:txBody>
-      </p:sp>
-      <p:sp>
-        <p:nvSpPr>
-          <p:cNvPr id="14" name="TextBox 13"/>
-          <p:cNvSpPr txBox="1"/>
-          <p:nvPr/>
-        </p:nvSpPr>
-        <p:spPr>
-          <a:xfrm>
-            <a:off x="731520" y="2103120"/>
-            <a:ext cx="2743200" cy="274320"/>
-          </a:xfrm>
-          <a:prstGeom prst="rect">
-            <a:avLst/>
-          </a:prstGeom>
-          <a:noFill/>
-        </p:spPr>
-        <p:txBody>
-          <a:bodyPr wrap="square">
-            <a:spAutoFit/>
-          </a:bodyPr>
-          <a:lstStyle/>
-          <a:p>
-            <a:pPr algn="l">
-              <a:defRPr sz="1100" b="0" i="0">
-                <a:solidFill>
-                  <a:srgbClr val="3A3A3C"/>
-                </a:solidFill>
-                <a:latin typeface="Calibri"/>
-              </a:defRPr>
-            </a:pPr>
-            <a:r>
-              <a:t>Forecasting + inventory</a:t>
-            </a:r>
-          </a:p>
-        </p:txBody>
-      </p:sp>
-      <p:sp>
-        <p:nvSpPr>
-          <p:cNvPr id="15" name="TextBox 14"/>
-          <p:cNvSpPr txBox="1"/>
-          <p:nvPr/>
-        </p:nvSpPr>
-        <p:spPr>
-          <a:xfrm>
-            <a:off x="3474720" y="2103120"/>
-            <a:ext cx="2743200" cy="274320"/>
-          </a:xfrm>
-          <a:prstGeom prst="rect">
-            <a:avLst/>
-          </a:prstGeom>
-          <a:noFill/>
-        </p:spPr>
-        <p:txBody>
-          <a:bodyPr wrap="square">
-            <a:spAutoFit/>
-          </a:bodyPr>
-          <a:lstStyle/>
-          <a:p>
-            <a:pPr algn="l">
-              <a:defRPr sz="1100" b="0" i="0">
-                <a:solidFill>
-                  <a:srgbClr val="3A3A3C"/>
-                </a:solidFill>
-                <a:latin typeface="Calibri"/>
-              </a:defRPr>
-            </a:pPr>
-            <a:r>
-              <a:t>$0.7M</a:t>
-            </a:r>
-          </a:p>
-        </p:txBody>
-      </p:sp>
-      <p:sp>
-        <p:nvSpPr>
-          <p:cNvPr id="16" name="TextBox 15"/>
-          <p:cNvSpPr txBox="1"/>
-          <p:nvPr/>
-        </p:nvSpPr>
-        <p:spPr>
-          <a:xfrm>
-            <a:off x="6217920" y="2103120"/>
-            <a:ext cx="2743200" cy="274320"/>
-          </a:xfrm>
-          <a:prstGeom prst="rect">
-            <a:avLst/>
-          </a:prstGeom>
-          <a:noFill/>
-        </p:spPr>
-        <p:txBody>
-          <a:bodyPr wrap="square">
-            <a:spAutoFit/>
-          </a:bodyPr>
-          <a:lstStyle/>
-          <a:p>
-            <a:pPr algn="l">
-              <a:defRPr sz="1100" b="1" i="0">
-                <a:solidFill>
-                  <a:srgbClr val="1C1C1E"/>
-                </a:solidFill>
-                <a:latin typeface="Calibri"/>
-              </a:defRPr>
-            </a:pPr>
-            <a:r>
-              <a:t>$1.6M</a:t>
-            </a:r>
-          </a:p>
-        </p:txBody>
-      </p:sp>
-      <p:sp>
-        <p:nvSpPr>
-          <p:cNvPr id="17" name="TextBox 16"/>
-          <p:cNvSpPr txBox="1"/>
-          <p:nvPr/>
-        </p:nvSpPr>
-        <p:spPr>
-          <a:xfrm>
-            <a:off x="8961120" y="2103120"/>
-            <a:ext cx="2743200" cy="274320"/>
-          </a:xfrm>
-          <a:prstGeom prst="rect">
-            <a:avLst/>
-          </a:prstGeom>
-          <a:noFill/>
-        </p:spPr>
-        <p:txBody>
-          <a:bodyPr wrap="square">
-            <a:spAutoFit/>
-          </a:bodyPr>
-          <a:lstStyle/>
-          <a:p>
-            <a:pPr algn="l">
-              <a:defRPr sz="1100" b="0" i="0">
-                <a:solidFill>
-                  <a:srgbClr val="3A3A3C"/>
-                </a:solidFill>
-                <a:latin typeface="Calibri"/>
-              </a:defRPr>
-            </a:pPr>
-            <a:r>
-              <a:t>$4.5M</a:t>
-            </a:r>
-          </a:p>
-        </p:txBody>
-      </p:sp>
-      <p:sp>
-        <p:nvSpPr>
-          <p:cNvPr id="18" name="Rounded Rectangle 17"/>
+          <p:cNvPr id="6" name="Oval 5"/>
           <p:cNvSpPr/>
           <p:nvPr/>
         </p:nvSpPr>
         <p:spPr>
           <a:xfrm>
-            <a:off x="731520" y="2450592"/>
-            <a:ext cx="10515600" cy="347472"/>
-          </a:xfrm>
-          <a:prstGeom prst="roundRect">
-            <a:avLst>
-              <a:gd name="adj" fmla="val 2000"/>
-            </a:avLst>
+            <a:off x="1097280" y="1600200"/>
+            <a:ext cx="457200" cy="457200"/>
+          </a:xfrm>
+          <a:prstGeom prst="ellipse">
+            <a:avLst/>
           </a:prstGeom>
           <a:solidFill>
-            <a:srgbClr val="F0F0EE"/>
+            <a:srgbClr val="1C1C1E"/>
           </a:solidFill>
           <a:ln>
             <a:noFill/>
@@ -20002,34 +20117,79 @@
           <a:bodyPr rtlCol="0" anchor="ctr"/>
           <a:lstStyle/>
           <a:p>
-            <a:pPr algn="ctr"/>
-          </a:p>
-        </p:txBody>
-      </p:sp>
-      <p:sp>
-        <p:nvSpPr>
-          <p:cNvPr id="19" name="TextBox 18"/>
-          <p:cNvSpPr txBox="1"/>
-          <p:nvPr/>
-        </p:nvSpPr>
-        <p:spPr>
-          <a:xfrm>
-            <a:off x="731520" y="2468880"/>
-            <a:ext cx="2743200" cy="274320"/>
-          </a:xfrm>
-          <a:prstGeom prst="rect">
-            <a:avLst/>
-          </a:prstGeom>
-          <a:noFill/>
-        </p:spPr>
-        <p:txBody>
-          <a:bodyPr wrap="square">
-            <a:spAutoFit/>
-          </a:bodyPr>
-          <a:lstStyle/>
-          <a:p>
-            <a:pPr algn="l">
-              <a:defRPr sz="1100" b="0" i="0">
+            <a:pPr algn="ctr">
+              <a:defRPr sz="1800" b="1">
+                <a:solidFill>
+                  <a:srgbClr val="F5F5F3"/>
+                </a:solidFill>
+              </a:defRPr>
+            </a:pPr>
+            <a:r>
+              <a:t>1</a:t>
+            </a:r>
+          </a:p>
+        </p:txBody>
+      </p:sp>
+      <p:sp>
+        <p:nvSpPr>
+          <p:cNvPr id="7" name="TextBox 6"/>
+          <p:cNvSpPr txBox="1"/>
+          <p:nvPr/>
+        </p:nvSpPr>
+        <p:spPr>
+          <a:xfrm>
+            <a:off x="1828800" y="1463040"/>
+            <a:ext cx="8961120" cy="320040"/>
+          </a:xfrm>
+          <a:prstGeom prst="rect">
+            <a:avLst/>
+          </a:prstGeom>
+          <a:noFill/>
+        </p:spPr>
+        <p:txBody>
+          <a:bodyPr wrap="square">
+            <a:spAutoFit/>
+          </a:bodyPr>
+          <a:lstStyle/>
+          <a:p>
+            <a:pPr algn="l">
+              <a:defRPr sz="1800" b="1" i="0">
+                <a:solidFill>
+                  <a:srgbClr val="1C1C1E"/>
+                </a:solidFill>
+                <a:latin typeface="Calibri"/>
+              </a:defRPr>
+            </a:pPr>
+            <a:r>
+              <a:t>Launch the 90-Day Support Pilot</a:t>
+            </a:r>
+          </a:p>
+        </p:txBody>
+      </p:sp>
+      <p:sp>
+        <p:nvSpPr>
+          <p:cNvPr id="8" name="TextBox 7"/>
+          <p:cNvSpPr txBox="1"/>
+          <p:nvPr/>
+        </p:nvSpPr>
+        <p:spPr>
+          <a:xfrm>
+            <a:off x="1828800" y="1828800"/>
+            <a:ext cx="8961120" cy="548640"/>
+          </a:xfrm>
+          <a:prstGeom prst="rect">
+            <a:avLst/>
+          </a:prstGeom>
+          <a:noFill/>
+        </p:spPr>
+        <p:txBody>
+          <a:bodyPr wrap="square">
+            <a:spAutoFit/>
+          </a:bodyPr>
+          <a:lstStyle/>
+          <a:p>
+            <a:pPr algn="l">
+              <a:defRPr sz="1200" b="0" i="0">
                 <a:solidFill>
                   <a:srgbClr val="3A3A3C"/>
                 </a:solidFill>
@@ -20037,284 +20197,34 @@
               </a:defRPr>
             </a:pPr>
             <a:r>
-              <a:t>Documentation + translation</a:t>
-            </a:r>
-          </a:p>
-        </p:txBody>
-      </p:sp>
-      <p:sp>
-        <p:nvSpPr>
-          <p:cNvPr id="20" name="TextBox 19"/>
-          <p:cNvSpPr txBox="1"/>
-          <p:nvPr/>
-        </p:nvSpPr>
-        <p:spPr>
-          <a:xfrm>
-            <a:off x="3474720" y="2468880"/>
-            <a:ext cx="2743200" cy="274320"/>
-          </a:xfrm>
-          <a:prstGeom prst="rect">
-            <a:avLst/>
-          </a:prstGeom>
-          <a:noFill/>
-        </p:spPr>
-        <p:txBody>
-          <a:bodyPr wrap="square">
-            <a:spAutoFit/>
-          </a:bodyPr>
-          <a:lstStyle/>
-          <a:p>
-            <a:pPr algn="l">
-              <a:defRPr sz="1100" b="0" i="0">
-                <a:solidFill>
-                  <a:srgbClr val="3A3A3C"/>
-                </a:solidFill>
-                <a:latin typeface="Calibri"/>
-              </a:defRPr>
-            </a:pPr>
-            <a:r>
-              <a:t>$0.1M</a:t>
-            </a:r>
-          </a:p>
-        </p:txBody>
-      </p:sp>
-      <p:sp>
-        <p:nvSpPr>
-          <p:cNvPr id="21" name="TextBox 20"/>
-          <p:cNvSpPr txBox="1"/>
-          <p:nvPr/>
-        </p:nvSpPr>
-        <p:spPr>
-          <a:xfrm>
-            <a:off x="6217920" y="2468880"/>
-            <a:ext cx="2743200" cy="274320"/>
-          </a:xfrm>
-          <a:prstGeom prst="rect">
-            <a:avLst/>
-          </a:prstGeom>
-          <a:noFill/>
-        </p:spPr>
-        <p:txBody>
-          <a:bodyPr wrap="square">
-            <a:spAutoFit/>
-          </a:bodyPr>
-          <a:lstStyle/>
-          <a:p>
-            <a:pPr algn="l">
-              <a:defRPr sz="1100" b="1" i="0">
-                <a:solidFill>
-                  <a:srgbClr val="1C1C1E"/>
-                </a:solidFill>
-                <a:latin typeface="Calibri"/>
-              </a:defRPr>
-            </a:pPr>
-            <a:r>
-              <a:t>$0.24M</a:t>
-            </a:r>
-          </a:p>
-        </p:txBody>
-      </p:sp>
-      <p:sp>
-        <p:nvSpPr>
-          <p:cNvPr id="22" name="TextBox 21"/>
-          <p:cNvSpPr txBox="1"/>
-          <p:nvPr/>
-        </p:nvSpPr>
-        <p:spPr>
-          <a:xfrm>
-            <a:off x="8961120" y="2468880"/>
-            <a:ext cx="2743200" cy="274320"/>
-          </a:xfrm>
-          <a:prstGeom prst="rect">
-            <a:avLst/>
-          </a:prstGeom>
-          <a:noFill/>
-        </p:spPr>
-        <p:txBody>
-          <a:bodyPr wrap="square">
-            <a:spAutoFit/>
-          </a:bodyPr>
-          <a:lstStyle/>
-          <a:p>
-            <a:pPr algn="l">
-              <a:defRPr sz="1100" b="0" i="0">
-                <a:solidFill>
-                  <a:srgbClr val="3A3A3C"/>
-                </a:solidFill>
-                <a:latin typeface="Calibri"/>
-              </a:defRPr>
-            </a:pPr>
-            <a:r>
-              <a:t>$0.9M</a:t>
-            </a:r>
-          </a:p>
-        </p:txBody>
-      </p:sp>
-      <p:sp>
-        <p:nvSpPr>
-          <p:cNvPr id="23" name="TextBox 22"/>
-          <p:cNvSpPr txBox="1"/>
-          <p:nvPr/>
-        </p:nvSpPr>
-        <p:spPr>
-          <a:xfrm>
-            <a:off x="731520" y="2834640"/>
-            <a:ext cx="2743200" cy="274320"/>
-          </a:xfrm>
-          <a:prstGeom prst="rect">
-            <a:avLst/>
-          </a:prstGeom>
-          <a:noFill/>
-        </p:spPr>
-        <p:txBody>
-          <a:bodyPr wrap="square">
-            <a:spAutoFit/>
-          </a:bodyPr>
-          <a:lstStyle/>
-          <a:p>
-            <a:pPr algn="l">
-              <a:defRPr sz="1100" b="0" i="0">
-                <a:solidFill>
-                  <a:srgbClr val="3A3A3C"/>
-                </a:solidFill>
-                <a:latin typeface="Calibri"/>
-              </a:defRPr>
-            </a:pPr>
-            <a:r>
-              <a:t>Customer retention revenue</a:t>
-            </a:r>
-          </a:p>
-        </p:txBody>
-      </p:sp>
-      <p:sp>
-        <p:nvSpPr>
-          <p:cNvPr id="24" name="TextBox 23"/>
-          <p:cNvSpPr txBox="1"/>
-          <p:nvPr/>
-        </p:nvSpPr>
-        <p:spPr>
-          <a:xfrm>
-            <a:off x="3474720" y="2834640"/>
-            <a:ext cx="2743200" cy="274320"/>
-          </a:xfrm>
-          <a:prstGeom prst="rect">
-            <a:avLst/>
-          </a:prstGeom>
-          <a:noFill/>
-        </p:spPr>
-        <p:txBody>
-          <a:bodyPr wrap="square">
-            <a:spAutoFit/>
-          </a:bodyPr>
-          <a:lstStyle/>
-          <a:p>
-            <a:pPr algn="l">
-              <a:defRPr sz="1100" b="0" i="0">
-                <a:solidFill>
-                  <a:srgbClr val="3A3A3C"/>
-                </a:solidFill>
-                <a:latin typeface="Calibri"/>
-              </a:defRPr>
-            </a:pPr>
-            <a:r>
-              <a:t>$1.5M</a:t>
-            </a:r>
-          </a:p>
-        </p:txBody>
-      </p:sp>
-      <p:sp>
-        <p:nvSpPr>
-          <p:cNvPr id="25" name="TextBox 24"/>
-          <p:cNvSpPr txBox="1"/>
-          <p:nvPr/>
-        </p:nvSpPr>
-        <p:spPr>
-          <a:xfrm>
-            <a:off x="6217920" y="2834640"/>
-            <a:ext cx="2743200" cy="274320"/>
-          </a:xfrm>
-          <a:prstGeom prst="rect">
-            <a:avLst/>
-          </a:prstGeom>
-          <a:noFill/>
-        </p:spPr>
-        <p:txBody>
-          <a:bodyPr wrap="square">
-            <a:spAutoFit/>
-          </a:bodyPr>
-          <a:lstStyle/>
-          <a:p>
-            <a:pPr algn="l">
-              <a:defRPr sz="1100" b="1" i="0">
-                <a:solidFill>
-                  <a:srgbClr val="1C1C1E"/>
-                </a:solidFill>
-                <a:latin typeface="Calibri"/>
-              </a:defRPr>
-            </a:pPr>
-            <a:r>
-              <a:t>$3.0M</a:t>
-            </a:r>
-          </a:p>
-        </p:txBody>
-      </p:sp>
-      <p:sp>
-        <p:nvSpPr>
-          <p:cNvPr id="26" name="TextBox 25"/>
-          <p:cNvSpPr txBox="1"/>
-          <p:nvPr/>
-        </p:nvSpPr>
-        <p:spPr>
-          <a:xfrm>
-            <a:off x="8961120" y="2834640"/>
-            <a:ext cx="2743200" cy="274320"/>
-          </a:xfrm>
-          <a:prstGeom prst="rect">
-            <a:avLst/>
-          </a:prstGeom>
-          <a:noFill/>
-        </p:spPr>
-        <p:txBody>
-          <a:bodyPr wrap="square">
-            <a:spAutoFit/>
-          </a:bodyPr>
-          <a:lstStyle/>
-          <a:p>
-            <a:pPr algn="l">
-              <a:defRPr sz="1100" b="0" i="0">
-                <a:solidFill>
-                  <a:srgbClr val="3A3A3C"/>
-                </a:solidFill>
-                <a:latin typeface="Calibri"/>
-              </a:defRPr>
-            </a:pPr>
-            <a:r>
-              <a:t>$4.5M</a:t>
-            </a:r>
-          </a:p>
-        </p:txBody>
-      </p:sp>
-      <p:sp>
-        <p:nvSpPr>
-          <p:cNvPr id="27" name="Rounded Rectangle 26"/>
+              <a:t>AXS and Hammerhead dealer support. One product owner, one integration engineer. Human approval on all outputs. Weekly quality reviews with defined rollback trigger.</a:t>
+            </a:r>
+          </a:p>
+        </p:txBody>
+      </p:sp>
+      <p:sp>
+        <p:nvSpPr>
+          <p:cNvPr id="9" name="Rounded Rectangle 8"/>
           <p:cNvSpPr/>
           <p:nvPr/>
         </p:nvSpPr>
         <p:spPr>
           <a:xfrm>
-            <a:off x="731520" y="3182112"/>
-            <a:ext cx="10515600" cy="347472"/>
+            <a:off x="731520" y="2788920"/>
+            <a:ext cx="10515600" cy="1188720"/>
           </a:xfrm>
           <a:prstGeom prst="roundRect">
             <a:avLst>
-              <a:gd name="adj" fmla="val 2000"/>
+              <a:gd name="adj" fmla="val 4000"/>
             </a:avLst>
           </a:prstGeom>
           <a:solidFill>
-            <a:srgbClr val="F0F0EE"/>
+            <a:srgbClr val="FFFFFF"/>
           </a:solidFill>
-          <a:ln>
-            <a:noFill/>
+          <a:ln w="12700">
+            <a:solidFill>
+              <a:srgbClr val="E0E0DE"/>
+            </a:solidFill>
           </a:ln>
         </p:spPr>
         <p:style>
@@ -20341,308 +20251,20 @@
       </p:sp>
       <p:sp>
         <p:nvSpPr>
-          <p:cNvPr id="28" name="TextBox 27"/>
-          <p:cNvSpPr txBox="1"/>
-          <p:nvPr/>
-        </p:nvSpPr>
-        <p:spPr>
-          <a:xfrm>
-            <a:off x="731520" y="3200400"/>
-            <a:ext cx="2743200" cy="274320"/>
-          </a:xfrm>
-          <a:prstGeom prst="rect">
-            <a:avLst/>
-          </a:prstGeom>
-          <a:noFill/>
-        </p:spPr>
-        <p:txBody>
-          <a:bodyPr wrap="square">
-            <a:spAutoFit/>
-          </a:bodyPr>
-          <a:lstStyle/>
-          <a:p>
-            <a:pPr algn="l">
-              <a:defRPr sz="1100" b="0" i="0">
-                <a:solidFill>
-                  <a:srgbClr val="3A3A3C"/>
-                </a:solidFill>
-                <a:latin typeface="Calibri"/>
-              </a:defRPr>
-            </a:pPr>
-            <a:r>
-              <a:t>Package size increase</a:t>
-            </a:r>
-          </a:p>
-        </p:txBody>
-      </p:sp>
-      <p:sp>
-        <p:nvSpPr>
-          <p:cNvPr id="29" name="TextBox 28"/>
-          <p:cNvSpPr txBox="1"/>
-          <p:nvPr/>
-        </p:nvSpPr>
-        <p:spPr>
-          <a:xfrm>
-            <a:off x="3474720" y="3200400"/>
-            <a:ext cx="2743200" cy="274320"/>
-          </a:xfrm>
-          <a:prstGeom prst="rect">
-            <a:avLst/>
-          </a:prstGeom>
-          <a:noFill/>
-        </p:spPr>
-        <p:txBody>
-          <a:bodyPr wrap="square">
-            <a:spAutoFit/>
-          </a:bodyPr>
-          <a:lstStyle/>
-          <a:p>
-            <a:pPr algn="l">
-              <a:defRPr sz="1100" b="0" i="0">
-                <a:solidFill>
-                  <a:srgbClr val="3A3A3C"/>
-                </a:solidFill>
-                <a:latin typeface="Calibri"/>
-              </a:defRPr>
-            </a:pPr>
-            <a:r>
-              <a:t>$2.0M</a:t>
-            </a:r>
-          </a:p>
-        </p:txBody>
-      </p:sp>
-      <p:sp>
-        <p:nvSpPr>
-          <p:cNvPr id="30" name="TextBox 29"/>
-          <p:cNvSpPr txBox="1"/>
-          <p:nvPr/>
-        </p:nvSpPr>
-        <p:spPr>
-          <a:xfrm>
-            <a:off x="6217920" y="3200400"/>
-            <a:ext cx="2743200" cy="274320"/>
-          </a:xfrm>
-          <a:prstGeom prst="rect">
-            <a:avLst/>
-          </a:prstGeom>
-          <a:noFill/>
-        </p:spPr>
-        <p:txBody>
-          <a:bodyPr wrap="square">
-            <a:spAutoFit/>
-          </a:bodyPr>
-          <a:lstStyle/>
-          <a:p>
-            <a:pPr algn="l">
-              <a:defRPr sz="1100" b="1" i="0">
-                <a:solidFill>
-                  <a:srgbClr val="1C1C1E"/>
-                </a:solidFill>
-                <a:latin typeface="Calibri"/>
-              </a:defRPr>
-            </a:pPr>
-            <a:r>
-              <a:t>$4.0M</a:t>
-            </a:r>
-          </a:p>
-        </p:txBody>
-      </p:sp>
-      <p:sp>
-        <p:nvSpPr>
-          <p:cNvPr id="31" name="TextBox 30"/>
-          <p:cNvSpPr txBox="1"/>
-          <p:nvPr/>
-        </p:nvSpPr>
-        <p:spPr>
-          <a:xfrm>
-            <a:off x="8961120" y="3200400"/>
-            <a:ext cx="2743200" cy="274320"/>
-          </a:xfrm>
-          <a:prstGeom prst="rect">
-            <a:avLst/>
-          </a:prstGeom>
-          <a:noFill/>
-        </p:spPr>
-        <p:txBody>
-          <a:bodyPr wrap="square">
-            <a:spAutoFit/>
-          </a:bodyPr>
-          <a:lstStyle/>
-          <a:p>
-            <a:pPr algn="l">
-              <a:defRPr sz="1100" b="0" i="0">
-                <a:solidFill>
-                  <a:srgbClr val="3A3A3C"/>
-                </a:solidFill>
-                <a:latin typeface="Calibri"/>
-              </a:defRPr>
-            </a:pPr>
-            <a:r>
-              <a:t>$8.0M</a:t>
-            </a:r>
-          </a:p>
-        </p:txBody>
-      </p:sp>
-      <p:sp>
-        <p:nvSpPr>
-          <p:cNvPr id="32" name="TextBox 31"/>
-          <p:cNvSpPr txBox="1"/>
-          <p:nvPr/>
-        </p:nvSpPr>
-        <p:spPr>
-          <a:xfrm>
-            <a:off x="731520" y="3566160"/>
-            <a:ext cx="2743200" cy="274320"/>
-          </a:xfrm>
-          <a:prstGeom prst="rect">
-            <a:avLst/>
-          </a:prstGeom>
-          <a:noFill/>
-        </p:spPr>
-        <p:txBody>
-          <a:bodyPr wrap="square">
-            <a:spAutoFit/>
-          </a:bodyPr>
-          <a:lstStyle/>
-          <a:p>
-            <a:pPr algn="l">
-              <a:defRPr sz="1100" b="0" i="0">
-                <a:solidFill>
-                  <a:srgbClr val="3A3A3C"/>
-                </a:solidFill>
-                <a:latin typeface="Calibri"/>
-              </a:defRPr>
-            </a:pPr>
-            <a:r>
-              <a:t>Proposal win-rate revenue</a:t>
-            </a:r>
-          </a:p>
-        </p:txBody>
-      </p:sp>
-      <p:sp>
-        <p:nvSpPr>
-          <p:cNvPr id="33" name="TextBox 32"/>
-          <p:cNvSpPr txBox="1"/>
-          <p:nvPr/>
-        </p:nvSpPr>
-        <p:spPr>
-          <a:xfrm>
-            <a:off x="3474720" y="3566160"/>
-            <a:ext cx="2743200" cy="274320"/>
-          </a:xfrm>
-          <a:prstGeom prst="rect">
-            <a:avLst/>
-          </a:prstGeom>
-          <a:noFill/>
-        </p:spPr>
-        <p:txBody>
-          <a:bodyPr wrap="square">
-            <a:spAutoFit/>
-          </a:bodyPr>
-          <a:lstStyle/>
-          <a:p>
-            <a:pPr algn="l">
-              <a:defRPr sz="1100" b="0" i="0">
-                <a:solidFill>
-                  <a:srgbClr val="3A3A3C"/>
-                </a:solidFill>
-                <a:latin typeface="Calibri"/>
-              </a:defRPr>
-            </a:pPr>
-            <a:r>
-              <a:t>$1.3M</a:t>
-            </a:r>
-          </a:p>
-        </p:txBody>
-      </p:sp>
-      <p:sp>
-        <p:nvSpPr>
-          <p:cNvPr id="34" name="TextBox 33"/>
-          <p:cNvSpPr txBox="1"/>
-          <p:nvPr/>
-        </p:nvSpPr>
-        <p:spPr>
-          <a:xfrm>
-            <a:off x="6217920" y="3566160"/>
-            <a:ext cx="2743200" cy="274320"/>
-          </a:xfrm>
-          <a:prstGeom prst="rect">
-            <a:avLst/>
-          </a:prstGeom>
-          <a:noFill/>
-        </p:spPr>
-        <p:txBody>
-          <a:bodyPr wrap="square">
-            <a:spAutoFit/>
-          </a:bodyPr>
-          <a:lstStyle/>
-          <a:p>
-            <a:pPr algn="l">
-              <a:defRPr sz="1100" b="1" i="0">
-                <a:solidFill>
-                  <a:srgbClr val="1C1C1E"/>
-                </a:solidFill>
-                <a:latin typeface="Calibri"/>
-              </a:defRPr>
-            </a:pPr>
-            <a:r>
-              <a:t>$2.5M</a:t>
-            </a:r>
-          </a:p>
-        </p:txBody>
-      </p:sp>
-      <p:sp>
-        <p:nvSpPr>
-          <p:cNvPr id="35" name="TextBox 34"/>
-          <p:cNvSpPr txBox="1"/>
-          <p:nvPr/>
-        </p:nvSpPr>
-        <p:spPr>
-          <a:xfrm>
-            <a:off x="8961120" y="3566160"/>
-            <a:ext cx="2743200" cy="274320"/>
-          </a:xfrm>
-          <a:prstGeom prst="rect">
-            <a:avLst/>
-          </a:prstGeom>
-          <a:noFill/>
-        </p:spPr>
-        <p:txBody>
-          <a:bodyPr wrap="square">
-            <a:spAutoFit/>
-          </a:bodyPr>
-          <a:lstStyle/>
-          <a:p>
-            <a:pPr algn="l">
-              <a:defRPr sz="1100" b="0" i="0">
-                <a:solidFill>
-                  <a:srgbClr val="3A3A3C"/>
-                </a:solidFill>
-                <a:latin typeface="Calibri"/>
-              </a:defRPr>
-            </a:pPr>
-            <a:r>
-              <a:t>$3.8M</a:t>
-            </a:r>
-          </a:p>
-        </p:txBody>
-      </p:sp>
-      <p:sp>
-        <p:nvSpPr>
-          <p:cNvPr id="36" name="Rectangle 35"/>
+          <p:cNvPr id="10" name="Oval 9"/>
           <p:cNvSpPr/>
           <p:nvPr/>
         </p:nvSpPr>
         <p:spPr>
           <a:xfrm>
-            <a:off x="731520" y="3931920"/>
-            <a:ext cx="10515600" cy="12700"/>
-          </a:xfrm>
-          <a:prstGeom prst="rect">
+            <a:off x="1097280" y="3017520"/>
+            <a:ext cx="457200" cy="457200"/>
+          </a:xfrm>
+          <a:prstGeom prst="ellipse">
             <a:avLst/>
           </a:prstGeom>
           <a:solidFill>
-            <a:srgbClr val="E0E0DE"/>
+            <a:srgbClr val="1C1C1E"/>
           </a:solidFill>
           <a:ln>
             <a:noFill/>
@@ -20666,34 +20288,214 @@
           <a:bodyPr rtlCol="0" anchor="ctr"/>
           <a:lstStyle/>
           <a:p>
+            <a:pPr algn="ctr">
+              <a:defRPr sz="1800" b="1">
+                <a:solidFill>
+                  <a:srgbClr val="F5F5F3"/>
+                </a:solidFill>
+              </a:defRPr>
+            </a:pPr>
+            <a:r>
+              <a:t>2</a:t>
+            </a:r>
+          </a:p>
+        </p:txBody>
+      </p:sp>
+      <p:sp>
+        <p:nvSpPr>
+          <p:cNvPr id="11" name="TextBox 10"/>
+          <p:cNvSpPr txBox="1"/>
+          <p:nvPr/>
+        </p:nvSpPr>
+        <p:spPr>
+          <a:xfrm>
+            <a:off x="1828800" y="2880360"/>
+            <a:ext cx="8961120" cy="320040"/>
+          </a:xfrm>
+          <a:prstGeom prst="rect">
+            <a:avLst/>
+          </a:prstGeom>
+          <a:noFill/>
+        </p:spPr>
+        <p:txBody>
+          <a:bodyPr wrap="square">
+            <a:spAutoFit/>
+          </a:bodyPr>
+          <a:lstStyle/>
+          <a:p>
+            <a:pPr algn="l">
+              <a:defRPr sz="1800" b="1" i="0">
+                <a:solidFill>
+                  <a:srgbClr val="1C1C1E"/>
+                </a:solidFill>
+                <a:latin typeface="Calibri"/>
+              </a:defRPr>
+            </a:pPr>
+            <a:r>
+              <a:t>Begin Data Infrastructure Planning</a:t>
+            </a:r>
+          </a:p>
+        </p:txBody>
+      </p:sp>
+      <p:sp>
+        <p:nvSpPr>
+          <p:cNvPr id="12" name="TextBox 11"/>
+          <p:cNvSpPr txBox="1"/>
+          <p:nvPr/>
+        </p:nvSpPr>
+        <p:spPr>
+          <a:xfrm>
+            <a:off x="1828800" y="3246120"/>
+            <a:ext cx="8961120" cy="548640"/>
+          </a:xfrm>
+          <a:prstGeom prst="rect">
+            <a:avLst/>
+          </a:prstGeom>
+          <a:noFill/>
+        </p:spPr>
+        <p:txBody>
+          <a:bodyPr wrap="square">
+            <a:spAutoFit/>
+          </a:bodyPr>
+          <a:lstStyle/>
+          <a:p>
+            <a:pPr algn="l">
+              <a:defRPr sz="1200" b="0" i="0">
+                <a:solidFill>
+                  <a:srgbClr val="3A3A3C"/>
+                </a:solidFill>
+                <a:latin typeface="Calibri"/>
+              </a:defRPr>
+            </a:pPr>
+            <a:r>
+              <a:t>Unified data layer connecting Shopify, support systems, and telemetry. Foundation for Phase 2 forecasting and Phase 4 AXS Intelligence platform.</a:t>
+            </a:r>
+          </a:p>
+        </p:txBody>
+      </p:sp>
+      <p:sp>
+        <p:nvSpPr>
+          <p:cNvPr id="13" name="Rounded Rectangle 12"/>
+          <p:cNvSpPr/>
+          <p:nvPr/>
+        </p:nvSpPr>
+        <p:spPr>
+          <a:xfrm>
+            <a:off x="731520" y="4206240"/>
+            <a:ext cx="10515600" cy="1188720"/>
+          </a:xfrm>
+          <a:prstGeom prst="roundRect">
+            <a:avLst>
+              <a:gd name="adj" fmla="val 4000"/>
+            </a:avLst>
+          </a:prstGeom>
+          <a:solidFill>
+            <a:srgbClr val="FFFFFF"/>
+          </a:solidFill>
+          <a:ln w="12700">
+            <a:solidFill>
+              <a:srgbClr val="E0E0DE"/>
+            </a:solidFill>
+          </a:ln>
+        </p:spPr>
+        <p:style>
+          <a:lnRef idx="1">
+            <a:schemeClr val="accent1"/>
+          </a:lnRef>
+          <a:fillRef idx="3">
+            <a:schemeClr val="accent1"/>
+          </a:fillRef>
+          <a:effectRef idx="2">
+            <a:schemeClr val="accent1"/>
+          </a:effectRef>
+          <a:fontRef idx="minor">
+            <a:schemeClr val="lt1"/>
+          </a:fontRef>
+        </p:style>
+        <p:txBody>
+          <a:bodyPr rtlCol="0" anchor="ctr"/>
+          <a:lstStyle/>
+          <a:p>
             <a:pPr algn="ctr"/>
           </a:p>
         </p:txBody>
       </p:sp>
       <p:sp>
         <p:nvSpPr>
-          <p:cNvPr id="37" name="TextBox 36"/>
-          <p:cNvSpPr txBox="1"/>
-          <p:nvPr/>
-        </p:nvSpPr>
-        <p:spPr>
-          <a:xfrm>
-            <a:off x="731520" y="4069080"/>
-            <a:ext cx="2743200" cy="274320"/>
-          </a:xfrm>
-          <a:prstGeom prst="rect">
-            <a:avLst/>
-          </a:prstGeom>
-          <a:noFill/>
-        </p:spPr>
-        <p:txBody>
-          <a:bodyPr wrap="square">
-            <a:spAutoFit/>
-          </a:bodyPr>
-          <a:lstStyle/>
-          <a:p>
-            <a:pPr algn="l">
-              <a:defRPr sz="1100" b="0" i="0">
+          <p:cNvPr id="14" name="Oval 13"/>
+          <p:cNvSpPr/>
+          <p:nvPr/>
+        </p:nvSpPr>
+        <p:spPr>
+          <a:xfrm>
+            <a:off x="1097280" y="4434840"/>
+            <a:ext cx="457200" cy="457200"/>
+          </a:xfrm>
+          <a:prstGeom prst="ellipse">
+            <a:avLst/>
+          </a:prstGeom>
+          <a:solidFill>
+            <a:srgbClr val="1C1C1E"/>
+          </a:solidFill>
+          <a:ln>
+            <a:noFill/>
+          </a:ln>
+        </p:spPr>
+        <p:style>
+          <a:lnRef idx="1">
+            <a:schemeClr val="accent1"/>
+          </a:lnRef>
+          <a:fillRef idx="3">
+            <a:schemeClr val="accent1"/>
+          </a:fillRef>
+          <a:effectRef idx="2">
+            <a:schemeClr val="accent1"/>
+          </a:effectRef>
+          <a:fontRef idx="minor">
+            <a:schemeClr val="lt1"/>
+          </a:fontRef>
+        </p:style>
+        <p:txBody>
+          <a:bodyPr rtlCol="0" anchor="ctr"/>
+          <a:lstStyle/>
+          <a:p>
+            <a:pPr algn="ctr">
+              <a:defRPr sz="1800" b="1">
+                <a:solidFill>
+                  <a:srgbClr val="F5F5F3"/>
+                </a:solidFill>
+              </a:defRPr>
+            </a:pPr>
+            <a:r>
+              <a:t>3</a:t>
+            </a:r>
+          </a:p>
+        </p:txBody>
+      </p:sp>
+      <p:sp>
+        <p:nvSpPr>
+          <p:cNvPr id="15" name="TextBox 14"/>
+          <p:cNvSpPr txBox="1"/>
+          <p:nvPr/>
+        </p:nvSpPr>
+        <p:spPr>
+          <a:xfrm>
+            <a:off x="1828800" y="4297680"/>
+            <a:ext cx="8961120" cy="320040"/>
+          </a:xfrm>
+          <a:prstGeom prst="rect">
+            <a:avLst/>
+          </a:prstGeom>
+          <a:noFill/>
+        </p:spPr>
+        <p:txBody>
+          <a:bodyPr wrap="square">
+            <a:spAutoFit/>
+          </a:bodyPr>
+          <a:lstStyle/>
+          <a:p>
+            <a:pPr algn="l">
+              <a:defRPr sz="1800" b="1" i="0">
                 <a:solidFill>
                   <a:srgbClr val="1C1C1E"/>
                 </a:solidFill>
@@ -20701,35 +20503,35 @@
               </a:defRPr>
             </a:pPr>
             <a:r>
-              <a:t>Gross value</a:t>
-            </a:r>
-          </a:p>
-        </p:txBody>
-      </p:sp>
-      <p:sp>
-        <p:nvSpPr>
-          <p:cNvPr id="38" name="TextBox 37"/>
-          <p:cNvSpPr txBox="1"/>
-          <p:nvPr/>
-        </p:nvSpPr>
-        <p:spPr>
-          <a:xfrm>
-            <a:off x="3474720" y="4069080"/>
-            <a:ext cx="2743200" cy="274320"/>
-          </a:xfrm>
-          <a:prstGeom prst="rect">
-            <a:avLst/>
-          </a:prstGeom>
-          <a:noFill/>
-        </p:spPr>
-        <p:txBody>
-          <a:bodyPr wrap="square">
-            <a:spAutoFit/>
-          </a:bodyPr>
-          <a:lstStyle/>
-          <a:p>
-            <a:pPr algn="l">
-              <a:defRPr sz="1100" b="0" i="0">
+              <a:t>Hold Sequencing Discipline</a:t>
+            </a:r>
+          </a:p>
+        </p:txBody>
+      </p:sp>
+      <p:sp>
+        <p:nvSpPr>
+          <p:cNvPr id="16" name="TextBox 15"/>
+          <p:cNvSpPr txBox="1"/>
+          <p:nvPr/>
+        </p:nvSpPr>
+        <p:spPr>
+          <a:xfrm>
+            <a:off x="1828800" y="4663440"/>
+            <a:ext cx="8961120" cy="548640"/>
+          </a:xfrm>
+          <a:prstGeom prst="rect">
+            <a:avLst/>
+          </a:prstGeom>
+          <a:noFill/>
+        </p:spPr>
+        <p:txBody>
+          <a:bodyPr wrap="square">
+            <a:spAutoFit/>
+          </a:bodyPr>
+          <a:lstStyle/>
+          <a:p>
+            <a:pPr algn="l">
+              <a:defRPr sz="1200" b="0" i="0">
                 <a:solidFill>
                   <a:srgbClr val="3A3A3C"/>
                 </a:solidFill>
@@ -20737,35 +20539,128 @@
               </a:defRPr>
             </a:pPr>
             <a:r>
-              <a:t>$6.1M</a:t>
-            </a:r>
-          </a:p>
-        </p:txBody>
-      </p:sp>
-      <p:sp>
-        <p:nvSpPr>
-          <p:cNvPr id="39" name="TextBox 38"/>
-          <p:cNvSpPr txBox="1"/>
-          <p:nvPr/>
-        </p:nvSpPr>
-        <p:spPr>
-          <a:xfrm>
-            <a:off x="6217920" y="4069080"/>
-            <a:ext cx="2743200" cy="274320"/>
-          </a:xfrm>
-          <a:prstGeom prst="rect">
-            <a:avLst/>
-          </a:prstGeom>
-          <a:noFill/>
-        </p:spPr>
-        <p:txBody>
-          <a:bodyPr wrap="square">
-            <a:spAutoFit/>
-          </a:bodyPr>
-          <a:lstStyle/>
-          <a:p>
-            <a:pPr algn="l">
-              <a:defRPr sz="1100" b="1" i="0">
+              <a:t>Bounded, well-defined problems first. Broader transformation after measured proof. The 90-day pilot produces data to justify or redirect every subsequent investment.</a:t>
+            </a:r>
+          </a:p>
+        </p:txBody>
+      </p:sp>
+      <p:sp>
+        <p:nvSpPr>
+          <p:cNvPr id="17" name="Rounded Rectangle 16"/>
+          <p:cNvSpPr/>
+          <p:nvPr/>
+        </p:nvSpPr>
+        <p:spPr>
+          <a:xfrm>
+            <a:off x="731520" y="5715000"/>
+            <a:ext cx="10515600" cy="548640"/>
+          </a:xfrm>
+          <a:prstGeom prst="roundRect">
+            <a:avLst>
+              <a:gd name="adj" fmla="val 10000"/>
+            </a:avLst>
+          </a:prstGeom>
+          <a:solidFill>
+            <a:srgbClr val="FFFFFF"/>
+          </a:solidFill>
+          <a:ln w="12700">
+            <a:solidFill>
+              <a:srgbClr val="E0E0DE"/>
+            </a:solidFill>
+          </a:ln>
+        </p:spPr>
+        <p:style>
+          <a:lnRef idx="1">
+            <a:schemeClr val="accent1"/>
+          </a:lnRef>
+          <a:fillRef idx="3">
+            <a:schemeClr val="accent1"/>
+          </a:fillRef>
+          <a:effectRef idx="2">
+            <a:schemeClr val="accent1"/>
+          </a:effectRef>
+          <a:fontRef idx="minor">
+            <a:schemeClr val="lt1"/>
+          </a:fontRef>
+        </p:style>
+        <p:txBody>
+          <a:bodyPr rtlCol="0" anchor="ctr"/>
+          <a:lstStyle/>
+          <a:p>
+            <a:pPr algn="ctr"/>
+          </a:p>
+        </p:txBody>
+      </p:sp>
+      <p:sp>
+        <p:nvSpPr>
+          <p:cNvPr id="18" name="Rectangle 17"/>
+          <p:cNvSpPr/>
+          <p:nvPr/>
+        </p:nvSpPr>
+        <p:spPr>
+          <a:xfrm>
+            <a:off x="731520" y="5715000"/>
+            <a:ext cx="50800" cy="548640"/>
+          </a:xfrm>
+          <a:prstGeom prst="rect">
+            <a:avLst/>
+          </a:prstGeom>
+          <a:solidFill>
+            <a:srgbClr val="E51937"/>
+          </a:solidFill>
+          <a:ln>
+            <a:noFill/>
+          </a:ln>
+        </p:spPr>
+        <p:style>
+          <a:lnRef idx="1">
+            <a:schemeClr val="accent1"/>
+          </a:lnRef>
+          <a:fillRef idx="3">
+            <a:schemeClr val="accent1"/>
+          </a:fillRef>
+          <a:effectRef idx="2">
+            <a:schemeClr val="accent1"/>
+          </a:effectRef>
+          <a:fontRef idx="minor">
+            <a:schemeClr val="lt1"/>
+          </a:fontRef>
+        </p:style>
+        <p:txBody>
+          <a:bodyPr rtlCol="0" anchor="ctr"/>
+          <a:lstStyle/>
+          <a:p>
+            <a:pPr algn="ctr"/>
+          </a:p>
+        </p:txBody>
+      </p:sp>
+      <p:sp>
+        <p:nvSpPr>
+          <p:cNvPr id="19" name="TextBox 18"/>
+          <p:cNvSpPr txBox="1"/>
+          <p:nvPr/>
+        </p:nvSpPr>
+        <p:spPr>
+          <a:xfrm>
+            <a:off x="1188720" y="5742432"/>
+            <a:ext cx="9601200" cy="502920"/>
+          </a:xfrm>
+          <a:prstGeom prst="rect">
+            <a:avLst/>
+          </a:prstGeom>
+          <a:noFill/>
+        </p:spPr>
+        <p:txBody>
+          <a:bodyPr wrap="square">
+            <a:spAutoFit/>
+          </a:bodyPr>
+          <a:lstStyle/>
+          <a:p>
+            <a:pPr>
+              <a:spcAft>
+                <a:spcPts val="260"/>
+              </a:spcAft>
+              <a:defRPr sz="1300" b="1">
                 <a:solidFill>
                   <a:srgbClr val="1C1C1E"/>
                 </a:solidFill>
@@ -20773,633 +20668,37 @@
               </a:defRPr>
             </a:pPr>
             <a:r>
-              <a:t>$12.9M</a:t>
-            </a:r>
-          </a:p>
-        </p:txBody>
-      </p:sp>
-      <p:sp>
-        <p:nvSpPr>
-          <p:cNvPr id="40" name="TextBox 39"/>
-          <p:cNvSpPr txBox="1"/>
-          <p:nvPr/>
-        </p:nvSpPr>
-        <p:spPr>
-          <a:xfrm>
-            <a:off x="8961120" y="4069080"/>
-            <a:ext cx="2743200" cy="274320"/>
-          </a:xfrm>
-          <a:prstGeom prst="rect">
-            <a:avLst/>
-          </a:prstGeom>
-          <a:noFill/>
-        </p:spPr>
-        <p:txBody>
-          <a:bodyPr wrap="square">
-            <a:spAutoFit/>
-          </a:bodyPr>
-          <a:lstStyle/>
-          <a:p>
-            <a:pPr algn="l">
-              <a:defRPr sz="1100" b="0" i="0">
-                <a:solidFill>
-                  <a:srgbClr val="3A3A3C"/>
-                </a:solidFill>
-                <a:latin typeface="Calibri"/>
-              </a:defRPr>
-            </a:pPr>
-            <a:r>
-              <a:t>$26.0M</a:t>
-            </a:r>
-          </a:p>
-        </p:txBody>
-      </p:sp>
-      <p:sp>
-        <p:nvSpPr>
-          <p:cNvPr id="41" name="TextBox 40"/>
-          <p:cNvSpPr txBox="1"/>
-          <p:nvPr/>
-        </p:nvSpPr>
-        <p:spPr>
-          <a:xfrm>
-            <a:off x="731520" y="4434840"/>
-            <a:ext cx="2743200" cy="274320"/>
-          </a:xfrm>
-          <a:prstGeom prst="rect">
-            <a:avLst/>
-          </a:prstGeom>
-          <a:noFill/>
-        </p:spPr>
-        <p:txBody>
-          <a:bodyPr wrap="square">
-            <a:spAutoFit/>
-          </a:bodyPr>
-          <a:lstStyle/>
-          <a:p>
-            <a:pPr algn="l">
-              <a:defRPr sz="1100" b="0" i="0">
-                <a:solidFill>
-                  <a:srgbClr val="1C1C1E"/>
-                </a:solidFill>
-                <a:latin typeface="Calibri"/>
-              </a:defRPr>
-            </a:pPr>
-            <a:r>
-              <a:t>Setup costs</a:t>
-            </a:r>
-          </a:p>
-        </p:txBody>
-      </p:sp>
-      <p:sp>
-        <p:nvSpPr>
-          <p:cNvPr id="42" name="TextBox 41"/>
-          <p:cNvSpPr txBox="1"/>
-          <p:nvPr/>
-        </p:nvSpPr>
-        <p:spPr>
-          <a:xfrm>
-            <a:off x="3474720" y="4434840"/>
-            <a:ext cx="2743200" cy="274320"/>
-          </a:xfrm>
-          <a:prstGeom prst="rect">
-            <a:avLst/>
-          </a:prstGeom>
-          <a:noFill/>
-        </p:spPr>
-        <p:txBody>
-          <a:bodyPr wrap="square">
-            <a:spAutoFit/>
-          </a:bodyPr>
-          <a:lstStyle/>
-          <a:p>
-            <a:pPr algn="l">
-              <a:defRPr sz="1100" b="0" i="0">
-                <a:solidFill>
-                  <a:srgbClr val="3A3A3C"/>
-                </a:solidFill>
-                <a:latin typeface="Calibri"/>
-              </a:defRPr>
-            </a:pPr>
-            <a:r>
-              <a:t>($1.2M)</a:t>
-            </a:r>
-          </a:p>
-        </p:txBody>
-      </p:sp>
-      <p:sp>
-        <p:nvSpPr>
-          <p:cNvPr id="43" name="TextBox 42"/>
-          <p:cNvSpPr txBox="1"/>
-          <p:nvPr/>
-        </p:nvSpPr>
-        <p:spPr>
-          <a:xfrm>
-            <a:off x="6217920" y="4434840"/>
-            <a:ext cx="2743200" cy="274320"/>
-          </a:xfrm>
-          <a:prstGeom prst="rect">
-            <a:avLst/>
-          </a:prstGeom>
-          <a:noFill/>
-        </p:spPr>
-        <p:txBody>
-          <a:bodyPr wrap="square">
-            <a:spAutoFit/>
-          </a:bodyPr>
-          <a:lstStyle/>
-          <a:p>
-            <a:pPr algn="l">
-              <a:defRPr sz="1100" b="1" i="0">
-                <a:solidFill>
-                  <a:srgbClr val="1C1C1E"/>
-                </a:solidFill>
-                <a:latin typeface="Calibri"/>
-              </a:defRPr>
-            </a:pPr>
-            <a:r>
-              <a:t>($2.0M)</a:t>
-            </a:r>
-          </a:p>
-        </p:txBody>
-      </p:sp>
-      <p:sp>
-        <p:nvSpPr>
-          <p:cNvPr id="44" name="TextBox 43"/>
-          <p:cNvSpPr txBox="1"/>
-          <p:nvPr/>
-        </p:nvSpPr>
-        <p:spPr>
-          <a:xfrm>
-            <a:off x="8961120" y="4434840"/>
-            <a:ext cx="2743200" cy="274320"/>
-          </a:xfrm>
-          <a:prstGeom prst="rect">
-            <a:avLst/>
-          </a:prstGeom>
-          <a:noFill/>
-        </p:spPr>
-        <p:txBody>
-          <a:bodyPr wrap="square">
-            <a:spAutoFit/>
-          </a:bodyPr>
-          <a:lstStyle/>
-          <a:p>
-            <a:pPr algn="l">
-              <a:defRPr sz="1100" b="0" i="0">
-                <a:solidFill>
-                  <a:srgbClr val="3A3A3C"/>
-                </a:solidFill>
-                <a:latin typeface="Calibri"/>
-              </a:defRPr>
-            </a:pPr>
-            <a:r>
-              <a:t>($2.5M)</a:t>
-            </a:r>
-          </a:p>
-        </p:txBody>
-      </p:sp>
-      <p:sp>
-        <p:nvSpPr>
-          <p:cNvPr id="45" name="TextBox 44"/>
-          <p:cNvSpPr txBox="1"/>
-          <p:nvPr/>
-        </p:nvSpPr>
-        <p:spPr>
-          <a:xfrm>
-            <a:off x="731520" y="4800600"/>
-            <a:ext cx="2743200" cy="274320"/>
-          </a:xfrm>
-          <a:prstGeom prst="rect">
-            <a:avLst/>
-          </a:prstGeom>
-          <a:noFill/>
-        </p:spPr>
-        <p:txBody>
-          <a:bodyPr wrap="square">
-            <a:spAutoFit/>
-          </a:bodyPr>
-          <a:lstStyle/>
-          <a:p>
-            <a:pPr algn="l">
-              <a:defRPr sz="1100" b="0" i="0">
-                <a:solidFill>
-                  <a:srgbClr val="1C1C1E"/>
-                </a:solidFill>
-                <a:latin typeface="Calibri"/>
-              </a:defRPr>
-            </a:pPr>
-            <a:r>
-              <a:t>Operating costs</a:t>
-            </a:r>
-          </a:p>
-        </p:txBody>
-      </p:sp>
-      <p:sp>
-        <p:nvSpPr>
-          <p:cNvPr id="46" name="TextBox 45"/>
-          <p:cNvSpPr txBox="1"/>
-          <p:nvPr/>
-        </p:nvSpPr>
-        <p:spPr>
-          <a:xfrm>
-            <a:off x="3474720" y="4800600"/>
-            <a:ext cx="2743200" cy="274320"/>
-          </a:xfrm>
-          <a:prstGeom prst="rect">
-            <a:avLst/>
-          </a:prstGeom>
-          <a:noFill/>
-        </p:spPr>
-        <p:txBody>
-          <a:bodyPr wrap="square">
-            <a:spAutoFit/>
-          </a:bodyPr>
-          <a:lstStyle/>
-          <a:p>
-            <a:pPr algn="l">
-              <a:defRPr sz="1100" b="0" i="0">
-                <a:solidFill>
-                  <a:srgbClr val="3A3A3C"/>
-                </a:solidFill>
-                <a:latin typeface="Calibri"/>
-              </a:defRPr>
-            </a:pPr>
-            <a:r>
-              <a:t>($0.4M)</a:t>
-            </a:r>
-          </a:p>
-        </p:txBody>
-      </p:sp>
-      <p:sp>
-        <p:nvSpPr>
-          <p:cNvPr id="47" name="TextBox 46"/>
-          <p:cNvSpPr txBox="1"/>
-          <p:nvPr/>
-        </p:nvSpPr>
-        <p:spPr>
-          <a:xfrm>
-            <a:off x="6217920" y="4800600"/>
-            <a:ext cx="2743200" cy="274320"/>
-          </a:xfrm>
-          <a:prstGeom prst="rect">
-            <a:avLst/>
-          </a:prstGeom>
-          <a:noFill/>
-        </p:spPr>
-        <p:txBody>
-          <a:bodyPr wrap="square">
-            <a:spAutoFit/>
-          </a:bodyPr>
-          <a:lstStyle/>
-          <a:p>
-            <a:pPr algn="l">
-              <a:defRPr sz="1100" b="1" i="0">
-                <a:solidFill>
-                  <a:srgbClr val="1C1C1E"/>
-                </a:solidFill>
-                <a:latin typeface="Calibri"/>
-              </a:defRPr>
-            </a:pPr>
-            <a:r>
-              <a:t>($0.7M)</a:t>
-            </a:r>
-          </a:p>
-        </p:txBody>
-      </p:sp>
-      <p:sp>
-        <p:nvSpPr>
-          <p:cNvPr id="48" name="TextBox 47"/>
-          <p:cNvSpPr txBox="1"/>
-          <p:nvPr/>
-        </p:nvSpPr>
-        <p:spPr>
-          <a:xfrm>
-            <a:off x="8961120" y="4800600"/>
-            <a:ext cx="2743200" cy="274320"/>
-          </a:xfrm>
-          <a:prstGeom prst="rect">
-            <a:avLst/>
-          </a:prstGeom>
-          <a:noFill/>
-        </p:spPr>
-        <p:txBody>
-          <a:bodyPr wrap="square">
-            <a:spAutoFit/>
-          </a:bodyPr>
-          <a:lstStyle/>
-          <a:p>
-            <a:pPr algn="l">
-              <a:defRPr sz="1100" b="0" i="0">
-                <a:solidFill>
-                  <a:srgbClr val="3A3A3C"/>
-                </a:solidFill>
-                <a:latin typeface="Calibri"/>
-              </a:defRPr>
-            </a:pPr>
-            <a:r>
-              <a:t>($1.0M)</a:t>
-            </a:r>
-          </a:p>
-        </p:txBody>
-      </p:sp>
-      <p:sp>
-        <p:nvSpPr>
-          <p:cNvPr id="49" name="TextBox 48"/>
-          <p:cNvSpPr txBox="1"/>
-          <p:nvPr/>
-        </p:nvSpPr>
-        <p:spPr>
-          <a:xfrm>
-            <a:off x="731520" y="5166360"/>
-            <a:ext cx="2743200" cy="274320"/>
-          </a:xfrm>
-          <a:prstGeom prst="rect">
-            <a:avLst/>
-          </a:prstGeom>
-          <a:noFill/>
-        </p:spPr>
-        <p:txBody>
-          <a:bodyPr wrap="square">
-            <a:spAutoFit/>
-          </a:bodyPr>
-          <a:lstStyle/>
-          <a:p>
-            <a:pPr algn="l">
-              <a:defRPr sz="1100" b="1" i="0">
-                <a:solidFill>
-                  <a:srgbClr val="1C1C1E"/>
-                </a:solidFill>
-                <a:latin typeface="Calibri"/>
-              </a:defRPr>
-            </a:pPr>
-            <a:r>
-              <a:t>Net Year-1 value</a:t>
-            </a:r>
-          </a:p>
-        </p:txBody>
-      </p:sp>
-      <p:sp>
-        <p:nvSpPr>
-          <p:cNvPr id="50" name="TextBox 49"/>
-          <p:cNvSpPr txBox="1"/>
-          <p:nvPr/>
-        </p:nvSpPr>
-        <p:spPr>
-          <a:xfrm>
-            <a:off x="3474720" y="5166360"/>
-            <a:ext cx="2743200" cy="274320"/>
-          </a:xfrm>
-          <a:prstGeom prst="rect">
-            <a:avLst/>
-          </a:prstGeom>
-          <a:noFill/>
-        </p:spPr>
-        <p:txBody>
-          <a:bodyPr wrap="square">
-            <a:spAutoFit/>
-          </a:bodyPr>
-          <a:lstStyle/>
-          <a:p>
-            <a:pPr algn="l">
-              <a:defRPr sz="1100" b="1" i="0">
-                <a:solidFill>
-                  <a:srgbClr val="1C1C1E"/>
-                </a:solidFill>
-                <a:latin typeface="Calibri"/>
-              </a:defRPr>
-            </a:pPr>
-            <a:r>
-              <a:t>$4.5M</a:t>
-            </a:r>
-          </a:p>
-        </p:txBody>
-      </p:sp>
-      <p:sp>
-        <p:nvSpPr>
-          <p:cNvPr id="51" name="TextBox 50"/>
-          <p:cNvSpPr txBox="1"/>
-          <p:nvPr/>
-        </p:nvSpPr>
-        <p:spPr>
-          <a:xfrm>
-            <a:off x="6217920" y="5166360"/>
-            <a:ext cx="2743200" cy="274320"/>
-          </a:xfrm>
-          <a:prstGeom prst="rect">
-            <a:avLst/>
-          </a:prstGeom>
-          <a:noFill/>
-        </p:spPr>
-        <p:txBody>
-          <a:bodyPr wrap="square">
-            <a:spAutoFit/>
-          </a:bodyPr>
-          <a:lstStyle/>
-          <a:p>
-            <a:pPr algn="l">
-              <a:defRPr sz="1100" b="1" i="0">
-                <a:solidFill>
-                  <a:srgbClr val="1C1C1E"/>
-                </a:solidFill>
-                <a:latin typeface="Calibri"/>
-              </a:defRPr>
-            </a:pPr>
-            <a:r>
-              <a:t>$10.2M</a:t>
-            </a:r>
-          </a:p>
-        </p:txBody>
-      </p:sp>
-      <p:sp>
-        <p:nvSpPr>
-          <p:cNvPr id="52" name="TextBox 51"/>
-          <p:cNvSpPr txBox="1"/>
-          <p:nvPr/>
-        </p:nvSpPr>
-        <p:spPr>
-          <a:xfrm>
-            <a:off x="8961120" y="5166360"/>
-            <a:ext cx="2743200" cy="274320"/>
-          </a:xfrm>
-          <a:prstGeom prst="rect">
-            <a:avLst/>
-          </a:prstGeom>
-          <a:noFill/>
-        </p:spPr>
-        <p:txBody>
-          <a:bodyPr wrap="square">
-            <a:spAutoFit/>
-          </a:bodyPr>
-          <a:lstStyle/>
-          <a:p>
-            <a:pPr algn="l">
-              <a:defRPr sz="1100" b="1" i="0">
-                <a:solidFill>
-                  <a:srgbClr val="1C1C1E"/>
-                </a:solidFill>
-                <a:latin typeface="Calibri"/>
-              </a:defRPr>
-            </a:pPr>
-            <a:r>
-              <a:t>$22.5M</a:t>
-            </a:r>
-          </a:p>
-        </p:txBody>
-      </p:sp>
-      <p:sp>
-        <p:nvSpPr>
-          <p:cNvPr id="53" name="TextBox 52"/>
-          <p:cNvSpPr txBox="1"/>
-          <p:nvPr/>
-        </p:nvSpPr>
-        <p:spPr>
-          <a:xfrm>
-            <a:off x="731520" y="5532120"/>
-            <a:ext cx="2743200" cy="274320"/>
-          </a:xfrm>
-          <a:prstGeom prst="rect">
-            <a:avLst/>
-          </a:prstGeom>
-          <a:noFill/>
-        </p:spPr>
-        <p:txBody>
-          <a:bodyPr wrap="square">
-            <a:spAutoFit/>
-          </a:bodyPr>
-          <a:lstStyle/>
-          <a:p>
-            <a:pPr algn="l">
-              <a:defRPr sz="1100" b="1" i="0">
-                <a:solidFill>
-                  <a:srgbClr val="1C1C1E"/>
-                </a:solidFill>
-                <a:latin typeface="Calibri"/>
-              </a:defRPr>
-            </a:pPr>
-            <a:r>
-              <a:t>Return on spend</a:t>
-            </a:r>
-          </a:p>
-        </p:txBody>
-      </p:sp>
-      <p:sp>
-        <p:nvSpPr>
-          <p:cNvPr id="54" name="TextBox 53"/>
-          <p:cNvSpPr txBox="1"/>
-          <p:nvPr/>
-        </p:nvSpPr>
-        <p:spPr>
-          <a:xfrm>
-            <a:off x="3474720" y="5532120"/>
-            <a:ext cx="2743200" cy="274320"/>
-          </a:xfrm>
-          <a:prstGeom prst="rect">
-            <a:avLst/>
-          </a:prstGeom>
-          <a:noFill/>
-        </p:spPr>
-        <p:txBody>
-          <a:bodyPr wrap="square">
-            <a:spAutoFit/>
-          </a:bodyPr>
-          <a:lstStyle/>
-          <a:p>
-            <a:pPr algn="l">
-              <a:defRPr sz="1100" b="1" i="0">
-                <a:solidFill>
-                  <a:srgbClr val="1C1C1E"/>
-                </a:solidFill>
-                <a:latin typeface="Calibri"/>
-              </a:defRPr>
-            </a:pPr>
-            <a:r>
-              <a:t>2.8x</a:t>
-            </a:r>
-          </a:p>
-        </p:txBody>
-      </p:sp>
-      <p:sp>
-        <p:nvSpPr>
-          <p:cNvPr id="55" name="TextBox 54"/>
-          <p:cNvSpPr txBox="1"/>
-          <p:nvPr/>
-        </p:nvSpPr>
-        <p:spPr>
-          <a:xfrm>
-            <a:off x="6217920" y="5532120"/>
-            <a:ext cx="2743200" cy="274320"/>
-          </a:xfrm>
-          <a:prstGeom prst="rect">
-            <a:avLst/>
-          </a:prstGeom>
-          <a:noFill/>
-        </p:spPr>
-        <p:txBody>
-          <a:bodyPr wrap="square">
-            <a:spAutoFit/>
-          </a:bodyPr>
-          <a:lstStyle/>
-          <a:p>
-            <a:pPr algn="l">
-              <a:defRPr sz="1100" b="1" i="0">
-                <a:solidFill>
-                  <a:srgbClr val="1C1C1E"/>
-                </a:solidFill>
-                <a:latin typeface="Calibri"/>
-              </a:defRPr>
-            </a:pPr>
-            <a:r>
-              <a:t>3.8x</a:t>
-            </a:r>
-          </a:p>
-        </p:txBody>
-      </p:sp>
-      <p:sp>
-        <p:nvSpPr>
-          <p:cNvPr id="56" name="TextBox 55"/>
-          <p:cNvSpPr txBox="1"/>
-          <p:nvPr/>
-        </p:nvSpPr>
-        <p:spPr>
-          <a:xfrm>
-            <a:off x="8961120" y="5532120"/>
-            <a:ext cx="2743200" cy="274320"/>
-          </a:xfrm>
-          <a:prstGeom prst="rect">
-            <a:avLst/>
-          </a:prstGeom>
-          <a:noFill/>
-        </p:spPr>
-        <p:txBody>
-          <a:bodyPr wrap="square">
-            <a:spAutoFit/>
-          </a:bodyPr>
-          <a:lstStyle/>
-          <a:p>
-            <a:pPr algn="l">
-              <a:defRPr sz="1100" b="1" i="0">
-                <a:solidFill>
-                  <a:srgbClr val="1C1C1E"/>
-                </a:solidFill>
-                <a:latin typeface="Calibri"/>
-              </a:defRPr>
-            </a:pPr>
-            <a:r>
-              <a:t>6.4x</a:t>
-            </a:r>
-          </a:p>
-        </p:txBody>
-      </p:sp>
-      <p:sp>
-        <p:nvSpPr>
-          <p:cNvPr id="57" name="TextBox 56"/>
-          <p:cNvSpPr txBox="1"/>
-          <p:nvPr/>
-        </p:nvSpPr>
-        <p:spPr>
-          <a:xfrm>
-            <a:off x="731520" y="6400800"/>
-            <a:ext cx="9144000" cy="274320"/>
+              <a:t>Expected Year-1 return: 3.8x on $2.7M spend</a:t>
+            </a:r>
+          </a:p>
+          <a:p>
+            <a:pPr>
+              <a:spcAft>
+                <a:spcPts val="220"/>
+              </a:spcAft>
+              <a:defRPr sz="1100" b="0">
+                <a:solidFill>
+                  <a:srgbClr val="767676"/>
+                </a:solidFill>
+                <a:latin typeface="Calibri"/>
+              </a:defRPr>
+            </a:pPr>
+            <a:r>
+              <a:t>Downside bounded by 90-day pilot  |  Upside scales with SRAM's data advantage</a:t>
+            </a:r>
+          </a:p>
+        </p:txBody>
+      </p:sp>
+      <p:sp>
+        <p:nvSpPr>
+          <p:cNvPr id="20" name="TextBox 19"/>
+          <p:cNvSpPr txBox="1"/>
+          <p:nvPr/>
+        </p:nvSpPr>
+        <p:spPr>
+          <a:xfrm>
+            <a:off x="731520" y="6446520"/>
+            <a:ext cx="4572000" cy="274320"/>
           </a:xfrm>
           <a:prstGeom prst="rect">
             <a:avLst/>
@@ -21421,7 +20720,43 @@
               </a:defRPr>
             </a:pPr>
             <a:r>
-              <a:t>APPENDIX A1</a:t>
+              <a:t>SRAM AI Adoption Playbook</a:t>
+            </a:r>
+          </a:p>
+        </p:txBody>
+      </p:sp>
+      <p:sp>
+        <p:nvSpPr>
+          <p:cNvPr id="21" name="TextBox 20"/>
+          <p:cNvSpPr txBox="1"/>
+          <p:nvPr/>
+        </p:nvSpPr>
+        <p:spPr>
+          <a:xfrm>
+            <a:off x="10515600" y="6446520"/>
+            <a:ext cx="1371600" cy="274320"/>
+          </a:xfrm>
+          <a:prstGeom prst="rect">
+            <a:avLst/>
+          </a:prstGeom>
+          <a:noFill/>
+        </p:spPr>
+        <p:txBody>
+          <a:bodyPr wrap="square">
+            <a:spAutoFit/>
+          </a:bodyPr>
+          <a:lstStyle/>
+          <a:p>
+            <a:pPr algn="r">
+              <a:defRPr sz="800" b="0" i="0">
+                <a:solidFill>
+                  <a:srgbClr val="767676"/>
+                </a:solidFill>
+                <a:latin typeface="Calibri"/>
+              </a:defRPr>
+            </a:pPr>
+            <a:r>
+              <a:t>11</a:t>
             </a:r>
           </a:p>
         </p:txBody>
@@ -21519,7 +20854,7 @@
               </a:defRPr>
             </a:pPr>
             <a:r>
-              <a:t>Interview with Jordan Hartsell, VP Digital Products</a:t>
+              <a:t>Financial detail across three scenarios</a:t>
             </a:r>
           </a:p>
         </p:txBody>
@@ -21575,22 +20910,22 @@
         </p:nvSpPr>
         <p:spPr>
           <a:xfrm>
-            <a:off x="731520" y="1234440"/>
-            <a:ext cx="10058400" cy="274320"/>
-          </a:xfrm>
-          <a:prstGeom prst="rect">
-            <a:avLst/>
-          </a:prstGeom>
-          <a:noFill/>
-        </p:spPr>
-        <p:txBody>
-          <a:bodyPr wrap="square">
-            <a:spAutoFit/>
-          </a:bodyPr>
-          <a:lstStyle/>
-          <a:p>
-            <a:pPr algn="l">
-              <a:defRPr sz="1200" b="0" i="0">
+            <a:off x="731520" y="1371600"/>
+            <a:ext cx="2743200" cy="274320"/>
+          </a:xfrm>
+          <a:prstGeom prst="rect">
+            <a:avLst/>
+          </a:prstGeom>
+          <a:noFill/>
+        </p:spPr>
+        <p:txBody>
+          <a:bodyPr wrap="square">
+            <a:spAutoFit/>
+          </a:bodyPr>
+          <a:lstStyle/>
+          <a:p>
+            <a:pPr algn="l">
+              <a:defRPr sz="1100" b="1" i="0">
                 <a:solidFill>
                   <a:srgbClr val="767676"/>
                 </a:solidFill>
@@ -21598,34 +20933,140 @@
               </a:defRPr>
             </a:pPr>
             <a:r>
-              <a:t>45-minute Zoom call  |  March 2026  |  Key quotes and insights</a:t>
-            </a:r>
-          </a:p>
-        </p:txBody>
-      </p:sp>
-      <p:sp>
-        <p:nvSpPr>
-          <p:cNvPr id="6" name="Rounded Rectangle 5"/>
+              <a:t>Category</a:t>
+            </a:r>
+          </a:p>
+        </p:txBody>
+      </p:sp>
+      <p:sp>
+        <p:nvSpPr>
+          <p:cNvPr id="6" name="TextBox 5"/>
+          <p:cNvSpPr txBox="1"/>
+          <p:nvPr/>
+        </p:nvSpPr>
+        <p:spPr>
+          <a:xfrm>
+            <a:off x="3474720" y="1371600"/>
+            <a:ext cx="2743200" cy="274320"/>
+          </a:xfrm>
+          <a:prstGeom prst="rect">
+            <a:avLst/>
+          </a:prstGeom>
+          <a:noFill/>
+        </p:spPr>
+        <p:txBody>
+          <a:bodyPr wrap="square">
+            <a:spAutoFit/>
+          </a:bodyPr>
+          <a:lstStyle/>
+          <a:p>
+            <a:pPr algn="l">
+              <a:defRPr sz="1100" b="1" i="0">
+                <a:solidFill>
+                  <a:srgbClr val="767676"/>
+                </a:solidFill>
+                <a:latin typeface="Calibri"/>
+              </a:defRPr>
+            </a:pPr>
+            <a:r>
+              <a:t>Conservative</a:t>
+            </a:r>
+          </a:p>
+        </p:txBody>
+      </p:sp>
+      <p:sp>
+        <p:nvSpPr>
+          <p:cNvPr id="7" name="TextBox 6"/>
+          <p:cNvSpPr txBox="1"/>
+          <p:nvPr/>
+        </p:nvSpPr>
+        <p:spPr>
+          <a:xfrm>
+            <a:off x="6217920" y="1371600"/>
+            <a:ext cx="2743200" cy="274320"/>
+          </a:xfrm>
+          <a:prstGeom prst="rect">
+            <a:avLst/>
+          </a:prstGeom>
+          <a:noFill/>
+        </p:spPr>
+        <p:txBody>
+          <a:bodyPr wrap="square">
+            <a:spAutoFit/>
+          </a:bodyPr>
+          <a:lstStyle/>
+          <a:p>
+            <a:pPr algn="l">
+              <a:defRPr sz="1100" b="1" i="0">
+                <a:solidFill>
+                  <a:srgbClr val="767676"/>
+                </a:solidFill>
+                <a:latin typeface="Calibri"/>
+              </a:defRPr>
+            </a:pPr>
+            <a:r>
+              <a:t>Expected</a:t>
+            </a:r>
+          </a:p>
+        </p:txBody>
+      </p:sp>
+      <p:sp>
+        <p:nvSpPr>
+          <p:cNvPr id="8" name="TextBox 7"/>
+          <p:cNvSpPr txBox="1"/>
+          <p:nvPr/>
+        </p:nvSpPr>
+        <p:spPr>
+          <a:xfrm>
+            <a:off x="8961120" y="1371600"/>
+            <a:ext cx="2743200" cy="274320"/>
+          </a:xfrm>
+          <a:prstGeom prst="rect">
+            <a:avLst/>
+          </a:prstGeom>
+          <a:noFill/>
+        </p:spPr>
+        <p:txBody>
+          <a:bodyPr wrap="square">
+            <a:spAutoFit/>
+          </a:bodyPr>
+          <a:lstStyle/>
+          <a:p>
+            <a:pPr algn="l">
+              <a:defRPr sz="1100" b="1" i="0">
+                <a:solidFill>
+                  <a:srgbClr val="767676"/>
+                </a:solidFill>
+                <a:latin typeface="Calibri"/>
+              </a:defRPr>
+            </a:pPr>
+            <a:r>
+              <a:t>Upside</a:t>
+            </a:r>
+          </a:p>
+        </p:txBody>
+      </p:sp>
+      <p:sp>
+        <p:nvSpPr>
+          <p:cNvPr id="9" name="Rounded Rectangle 8"/>
           <p:cNvSpPr/>
           <p:nvPr/>
         </p:nvSpPr>
         <p:spPr>
           <a:xfrm>
-            <a:off x="731520" y="1691640"/>
-            <a:ext cx="10789920" cy="1005840"/>
+            <a:off x="731520" y="1719072"/>
+            <a:ext cx="10515600" cy="347472"/>
           </a:xfrm>
           <a:prstGeom prst="roundRect">
             <a:avLst>
-              <a:gd name="adj" fmla="val 4000"/>
+              <a:gd name="adj" fmla="val 2000"/>
             </a:avLst>
           </a:prstGeom>
           <a:solidFill>
-            <a:srgbClr val="FFFFFF"/>
+            <a:srgbClr val="F0F0EE"/>
           </a:solidFill>
-          <a:ln w="12700">
-            <a:solidFill>
-              <a:srgbClr val="E0E0DE"/>
-            </a:solidFill>
+          <a:ln>
+            <a:noFill/>
           </a:ln>
         </p:spPr>
         <p:style>
@@ -21652,20 +21093,310 @@
       </p:sp>
       <p:sp>
         <p:nvSpPr>
-          <p:cNvPr id="7" name="Rectangle 6"/>
+          <p:cNvPr id="10" name="TextBox 9"/>
+          <p:cNvSpPr txBox="1"/>
+          <p:nvPr/>
+        </p:nvSpPr>
+        <p:spPr>
+          <a:xfrm>
+            <a:off x="731520" y="1737360"/>
+            <a:ext cx="2743200" cy="274320"/>
+          </a:xfrm>
+          <a:prstGeom prst="rect">
+            <a:avLst/>
+          </a:prstGeom>
+          <a:noFill/>
+        </p:spPr>
+        <p:txBody>
+          <a:bodyPr wrap="square">
+            <a:spAutoFit/>
+          </a:bodyPr>
+          <a:lstStyle/>
+          <a:p>
+            <a:pPr algn="l">
+              <a:defRPr sz="1100" b="0" i="0">
+                <a:solidFill>
+                  <a:srgbClr val="3A3A3C"/>
+                </a:solidFill>
+                <a:latin typeface="Calibri"/>
+              </a:defRPr>
+            </a:pPr>
+            <a:r>
+              <a:t>Support assistant savings</a:t>
+            </a:r>
+          </a:p>
+        </p:txBody>
+      </p:sp>
+      <p:sp>
+        <p:nvSpPr>
+          <p:cNvPr id="11" name="TextBox 10"/>
+          <p:cNvSpPr txBox="1"/>
+          <p:nvPr/>
+        </p:nvSpPr>
+        <p:spPr>
+          <a:xfrm>
+            <a:off x="3474720" y="1737360"/>
+            <a:ext cx="2743200" cy="274320"/>
+          </a:xfrm>
+          <a:prstGeom prst="rect">
+            <a:avLst/>
+          </a:prstGeom>
+          <a:noFill/>
+        </p:spPr>
+        <p:txBody>
+          <a:bodyPr wrap="square">
+            <a:spAutoFit/>
+          </a:bodyPr>
+          <a:lstStyle/>
+          <a:p>
+            <a:pPr algn="l">
+              <a:defRPr sz="1100" b="0" i="0">
+                <a:solidFill>
+                  <a:srgbClr val="3A3A3C"/>
+                </a:solidFill>
+                <a:latin typeface="Calibri"/>
+              </a:defRPr>
+            </a:pPr>
+            <a:r>
+              <a:t>$0.5M</a:t>
+            </a:r>
+          </a:p>
+        </p:txBody>
+      </p:sp>
+      <p:sp>
+        <p:nvSpPr>
+          <p:cNvPr id="12" name="TextBox 11"/>
+          <p:cNvSpPr txBox="1"/>
+          <p:nvPr/>
+        </p:nvSpPr>
+        <p:spPr>
+          <a:xfrm>
+            <a:off x="6217920" y="1737360"/>
+            <a:ext cx="2743200" cy="274320"/>
+          </a:xfrm>
+          <a:prstGeom prst="rect">
+            <a:avLst/>
+          </a:prstGeom>
+          <a:noFill/>
+        </p:spPr>
+        <p:txBody>
+          <a:bodyPr wrap="square">
+            <a:spAutoFit/>
+          </a:bodyPr>
+          <a:lstStyle/>
+          <a:p>
+            <a:pPr algn="l">
+              <a:defRPr sz="1100" b="1" i="0">
+                <a:solidFill>
+                  <a:srgbClr val="1C1C1E"/>
+                </a:solidFill>
+                <a:latin typeface="Calibri"/>
+              </a:defRPr>
+            </a:pPr>
+            <a:r>
+              <a:t>$1.6M</a:t>
+            </a:r>
+          </a:p>
+        </p:txBody>
+      </p:sp>
+      <p:sp>
+        <p:nvSpPr>
+          <p:cNvPr id="13" name="TextBox 12"/>
+          <p:cNvSpPr txBox="1"/>
+          <p:nvPr/>
+        </p:nvSpPr>
+        <p:spPr>
+          <a:xfrm>
+            <a:off x="8961120" y="1737360"/>
+            <a:ext cx="2743200" cy="274320"/>
+          </a:xfrm>
+          <a:prstGeom prst="rect">
+            <a:avLst/>
+          </a:prstGeom>
+          <a:noFill/>
+        </p:spPr>
+        <p:txBody>
+          <a:bodyPr wrap="square">
+            <a:spAutoFit/>
+          </a:bodyPr>
+          <a:lstStyle/>
+          <a:p>
+            <a:pPr algn="l">
+              <a:defRPr sz="1100" b="0" i="0">
+                <a:solidFill>
+                  <a:srgbClr val="3A3A3C"/>
+                </a:solidFill>
+                <a:latin typeface="Calibri"/>
+              </a:defRPr>
+            </a:pPr>
+            <a:r>
+              <a:t>$4.3M</a:t>
+            </a:r>
+          </a:p>
+        </p:txBody>
+      </p:sp>
+      <p:sp>
+        <p:nvSpPr>
+          <p:cNvPr id="14" name="TextBox 13"/>
+          <p:cNvSpPr txBox="1"/>
+          <p:nvPr/>
+        </p:nvSpPr>
+        <p:spPr>
+          <a:xfrm>
+            <a:off x="731520" y="2103120"/>
+            <a:ext cx="2743200" cy="274320"/>
+          </a:xfrm>
+          <a:prstGeom prst="rect">
+            <a:avLst/>
+          </a:prstGeom>
+          <a:noFill/>
+        </p:spPr>
+        <p:txBody>
+          <a:bodyPr wrap="square">
+            <a:spAutoFit/>
+          </a:bodyPr>
+          <a:lstStyle/>
+          <a:p>
+            <a:pPr algn="l">
+              <a:defRPr sz="1100" b="0" i="0">
+                <a:solidFill>
+                  <a:srgbClr val="3A3A3C"/>
+                </a:solidFill>
+                <a:latin typeface="Calibri"/>
+              </a:defRPr>
+            </a:pPr>
+            <a:r>
+              <a:t>Forecasting + inventory</a:t>
+            </a:r>
+          </a:p>
+        </p:txBody>
+      </p:sp>
+      <p:sp>
+        <p:nvSpPr>
+          <p:cNvPr id="15" name="TextBox 14"/>
+          <p:cNvSpPr txBox="1"/>
+          <p:nvPr/>
+        </p:nvSpPr>
+        <p:spPr>
+          <a:xfrm>
+            <a:off x="3474720" y="2103120"/>
+            <a:ext cx="2743200" cy="274320"/>
+          </a:xfrm>
+          <a:prstGeom prst="rect">
+            <a:avLst/>
+          </a:prstGeom>
+          <a:noFill/>
+        </p:spPr>
+        <p:txBody>
+          <a:bodyPr wrap="square">
+            <a:spAutoFit/>
+          </a:bodyPr>
+          <a:lstStyle/>
+          <a:p>
+            <a:pPr algn="l">
+              <a:defRPr sz="1100" b="0" i="0">
+                <a:solidFill>
+                  <a:srgbClr val="3A3A3C"/>
+                </a:solidFill>
+                <a:latin typeface="Calibri"/>
+              </a:defRPr>
+            </a:pPr>
+            <a:r>
+              <a:t>$0.7M</a:t>
+            </a:r>
+          </a:p>
+        </p:txBody>
+      </p:sp>
+      <p:sp>
+        <p:nvSpPr>
+          <p:cNvPr id="16" name="TextBox 15"/>
+          <p:cNvSpPr txBox="1"/>
+          <p:nvPr/>
+        </p:nvSpPr>
+        <p:spPr>
+          <a:xfrm>
+            <a:off x="6217920" y="2103120"/>
+            <a:ext cx="2743200" cy="274320"/>
+          </a:xfrm>
+          <a:prstGeom prst="rect">
+            <a:avLst/>
+          </a:prstGeom>
+          <a:noFill/>
+        </p:spPr>
+        <p:txBody>
+          <a:bodyPr wrap="square">
+            <a:spAutoFit/>
+          </a:bodyPr>
+          <a:lstStyle/>
+          <a:p>
+            <a:pPr algn="l">
+              <a:defRPr sz="1100" b="1" i="0">
+                <a:solidFill>
+                  <a:srgbClr val="1C1C1E"/>
+                </a:solidFill>
+                <a:latin typeface="Calibri"/>
+              </a:defRPr>
+            </a:pPr>
+            <a:r>
+              <a:t>$1.6M</a:t>
+            </a:r>
+          </a:p>
+        </p:txBody>
+      </p:sp>
+      <p:sp>
+        <p:nvSpPr>
+          <p:cNvPr id="17" name="TextBox 16"/>
+          <p:cNvSpPr txBox="1"/>
+          <p:nvPr/>
+        </p:nvSpPr>
+        <p:spPr>
+          <a:xfrm>
+            <a:off x="8961120" y="2103120"/>
+            <a:ext cx="2743200" cy="274320"/>
+          </a:xfrm>
+          <a:prstGeom prst="rect">
+            <a:avLst/>
+          </a:prstGeom>
+          <a:noFill/>
+        </p:spPr>
+        <p:txBody>
+          <a:bodyPr wrap="square">
+            <a:spAutoFit/>
+          </a:bodyPr>
+          <a:lstStyle/>
+          <a:p>
+            <a:pPr algn="l">
+              <a:defRPr sz="1100" b="0" i="0">
+                <a:solidFill>
+                  <a:srgbClr val="3A3A3C"/>
+                </a:solidFill>
+                <a:latin typeface="Calibri"/>
+              </a:defRPr>
+            </a:pPr>
+            <a:r>
+              <a:t>$4.5M</a:t>
+            </a:r>
+          </a:p>
+        </p:txBody>
+      </p:sp>
+      <p:sp>
+        <p:nvSpPr>
+          <p:cNvPr id="18" name="Rounded Rectangle 17"/>
           <p:cNvSpPr/>
           <p:nvPr/>
         </p:nvSpPr>
         <p:spPr>
           <a:xfrm>
-            <a:off x="731520" y="1691640"/>
-            <a:ext cx="50800" cy="1005840"/>
-          </a:xfrm>
-          <a:prstGeom prst="rect">
-            <a:avLst/>
+            <a:off x="731520" y="2450592"/>
+            <a:ext cx="10515600" cy="347472"/>
+          </a:xfrm>
+          <a:prstGeom prst="roundRect">
+            <a:avLst>
+              <a:gd name="adj" fmla="val 2000"/>
+            </a:avLst>
           </a:prstGeom>
           <a:solidFill>
-            <a:srgbClr val="767676"/>
+            <a:srgbClr val="F0F0EE"/>
           </a:solidFill>
           <a:ln>
             <a:noFill/>
@@ -21695,64 +21426,28 @@
       </p:sp>
       <p:sp>
         <p:nvSpPr>
-          <p:cNvPr id="8" name="TextBox 7"/>
-          <p:cNvSpPr txBox="1"/>
-          <p:nvPr/>
-        </p:nvSpPr>
-        <p:spPr>
-          <a:xfrm>
-            <a:off x="1097280" y="1737360"/>
-            <a:ext cx="1828800" cy="182880"/>
-          </a:xfrm>
-          <a:prstGeom prst="rect">
-            <a:avLst/>
-          </a:prstGeom>
-          <a:noFill/>
-        </p:spPr>
-        <p:txBody>
-          <a:bodyPr wrap="square">
-            <a:spAutoFit/>
-          </a:bodyPr>
-          <a:lstStyle/>
-          <a:p>
-            <a:pPr algn="l">
-              <a:defRPr sz="900" b="1" i="0">
-                <a:solidFill>
-                  <a:srgbClr val="767676"/>
-                </a:solidFill>
-                <a:latin typeface="Calibri"/>
-              </a:defRPr>
-            </a:pPr>
-            <a:r>
-              <a:t>ON DATA READINESS</a:t>
-            </a:r>
-          </a:p>
-        </p:txBody>
-      </p:sp>
-      <p:sp>
-        <p:nvSpPr>
-          <p:cNvPr id="9" name="TextBox 8"/>
-          <p:cNvSpPr txBox="1"/>
-          <p:nvPr/>
-        </p:nvSpPr>
-        <p:spPr>
-          <a:xfrm>
-            <a:off x="1097280" y="1947672"/>
-            <a:ext cx="7315200" cy="548640"/>
-          </a:xfrm>
-          <a:prstGeom prst="rect">
-            <a:avLst/>
-          </a:prstGeom>
-          <a:noFill/>
-        </p:spPr>
-        <p:txBody>
-          <a:bodyPr wrap="square">
-            <a:spAutoFit/>
-          </a:bodyPr>
-          <a:lstStyle/>
-          <a:p>
-            <a:pPr algn="l">
-              <a:defRPr sz="1100" b="0" i="1">
+          <p:cNvPr id="19" name="TextBox 18"/>
+          <p:cNvSpPr txBox="1"/>
+          <p:nvPr/>
+        </p:nvSpPr>
+        <p:spPr>
+          <a:xfrm>
+            <a:off x="731520" y="2468880"/>
+            <a:ext cx="2743200" cy="274320"/>
+          </a:xfrm>
+          <a:prstGeom prst="rect">
+            <a:avLst/>
+          </a:prstGeom>
+          <a:noFill/>
+        </p:spPr>
+        <p:txBody>
+          <a:bodyPr wrap="square">
+            <a:spAutoFit/>
+          </a:bodyPr>
+          <a:lstStyle/>
+          <a:p>
+            <a:pPr algn="l">
+              <a:defRPr sz="1100" b="0" i="0">
                 <a:solidFill>
                   <a:srgbClr val="3A3A3C"/>
                 </a:solidFill>
@@ -21760,35 +21455,71 @@
               </a:defRPr>
             </a:pPr>
             <a:r>
-              <a:t>“We have good data in pockets and messy data everywhere else. If I wanted to build a support AI today, I could get it to work well for AXS and Hammerhead. The moment a dealer asks about a RockShox fork on a 2019 frame with a third-party brake, I start to sweat.”</a:t>
-            </a:r>
-          </a:p>
-        </p:txBody>
-      </p:sp>
-      <p:sp>
-        <p:nvSpPr>
-          <p:cNvPr id="10" name="TextBox 9"/>
-          <p:cNvSpPr txBox="1"/>
-          <p:nvPr/>
-        </p:nvSpPr>
-        <p:spPr>
-          <a:xfrm>
-            <a:off x="8686800" y="2011680"/>
-            <a:ext cx="2560320" cy="457200"/>
-          </a:xfrm>
-          <a:prstGeom prst="rect">
-            <a:avLst/>
-          </a:prstGeom>
-          <a:noFill/>
-        </p:spPr>
-        <p:txBody>
-          <a:bodyPr wrap="square">
-            <a:spAutoFit/>
-          </a:bodyPr>
-          <a:lstStyle/>
-          <a:p>
-            <a:pPr algn="l">
-              <a:defRPr sz="1000" b="1" i="0">
+              <a:t>Documentation + translation</a:t>
+            </a:r>
+          </a:p>
+        </p:txBody>
+      </p:sp>
+      <p:sp>
+        <p:nvSpPr>
+          <p:cNvPr id="20" name="TextBox 19"/>
+          <p:cNvSpPr txBox="1"/>
+          <p:nvPr/>
+        </p:nvSpPr>
+        <p:spPr>
+          <a:xfrm>
+            <a:off x="3474720" y="2468880"/>
+            <a:ext cx="2743200" cy="274320"/>
+          </a:xfrm>
+          <a:prstGeom prst="rect">
+            <a:avLst/>
+          </a:prstGeom>
+          <a:noFill/>
+        </p:spPr>
+        <p:txBody>
+          <a:bodyPr wrap="square">
+            <a:spAutoFit/>
+          </a:bodyPr>
+          <a:lstStyle/>
+          <a:p>
+            <a:pPr algn="l">
+              <a:defRPr sz="1100" b="0" i="0">
+                <a:solidFill>
+                  <a:srgbClr val="3A3A3C"/>
+                </a:solidFill>
+                <a:latin typeface="Calibri"/>
+              </a:defRPr>
+            </a:pPr>
+            <a:r>
+              <a:t>$0.1M</a:t>
+            </a:r>
+          </a:p>
+        </p:txBody>
+      </p:sp>
+      <p:sp>
+        <p:nvSpPr>
+          <p:cNvPr id="21" name="TextBox 20"/>
+          <p:cNvSpPr txBox="1"/>
+          <p:nvPr/>
+        </p:nvSpPr>
+        <p:spPr>
+          <a:xfrm>
+            <a:off x="6217920" y="2468880"/>
+            <a:ext cx="2743200" cy="274320"/>
+          </a:xfrm>
+          <a:prstGeom prst="rect">
+            <a:avLst/>
+          </a:prstGeom>
+          <a:noFill/>
+        </p:spPr>
+        <p:txBody>
+          <a:bodyPr wrap="square">
+            <a:spAutoFit/>
+          </a:bodyPr>
+          <a:lstStyle/>
+          <a:p>
+            <a:pPr algn="l">
+              <a:defRPr sz="1100" b="1" i="0">
                 <a:solidFill>
                   <a:srgbClr val="1C1C1E"/>
                 </a:solidFill>
@@ -21796,34 +21527,212 @@
               </a:defRPr>
             </a:pPr>
             <a:r>
-              <a:t>→ Validates bounded pilot scope</a:t>
-            </a:r>
-          </a:p>
-        </p:txBody>
-      </p:sp>
-      <p:sp>
-        <p:nvSpPr>
-          <p:cNvPr id="11" name="Rounded Rectangle 10"/>
+              <a:t>$0.24M</a:t>
+            </a:r>
+          </a:p>
+        </p:txBody>
+      </p:sp>
+      <p:sp>
+        <p:nvSpPr>
+          <p:cNvPr id="22" name="TextBox 21"/>
+          <p:cNvSpPr txBox="1"/>
+          <p:nvPr/>
+        </p:nvSpPr>
+        <p:spPr>
+          <a:xfrm>
+            <a:off x="8961120" y="2468880"/>
+            <a:ext cx="2743200" cy="274320"/>
+          </a:xfrm>
+          <a:prstGeom prst="rect">
+            <a:avLst/>
+          </a:prstGeom>
+          <a:noFill/>
+        </p:spPr>
+        <p:txBody>
+          <a:bodyPr wrap="square">
+            <a:spAutoFit/>
+          </a:bodyPr>
+          <a:lstStyle/>
+          <a:p>
+            <a:pPr algn="l">
+              <a:defRPr sz="1100" b="0" i="0">
+                <a:solidFill>
+                  <a:srgbClr val="3A3A3C"/>
+                </a:solidFill>
+                <a:latin typeface="Calibri"/>
+              </a:defRPr>
+            </a:pPr>
+            <a:r>
+              <a:t>$0.9M</a:t>
+            </a:r>
+          </a:p>
+        </p:txBody>
+      </p:sp>
+      <p:sp>
+        <p:nvSpPr>
+          <p:cNvPr id="23" name="TextBox 22"/>
+          <p:cNvSpPr txBox="1"/>
+          <p:nvPr/>
+        </p:nvSpPr>
+        <p:spPr>
+          <a:xfrm>
+            <a:off x="731520" y="2834640"/>
+            <a:ext cx="2743200" cy="274320"/>
+          </a:xfrm>
+          <a:prstGeom prst="rect">
+            <a:avLst/>
+          </a:prstGeom>
+          <a:noFill/>
+        </p:spPr>
+        <p:txBody>
+          <a:bodyPr wrap="square">
+            <a:spAutoFit/>
+          </a:bodyPr>
+          <a:lstStyle/>
+          <a:p>
+            <a:pPr algn="l">
+              <a:defRPr sz="1100" b="0" i="0">
+                <a:solidFill>
+                  <a:srgbClr val="3A3A3C"/>
+                </a:solidFill>
+                <a:latin typeface="Calibri"/>
+              </a:defRPr>
+            </a:pPr>
+            <a:r>
+              <a:t>Customer retention revenue</a:t>
+            </a:r>
+          </a:p>
+        </p:txBody>
+      </p:sp>
+      <p:sp>
+        <p:nvSpPr>
+          <p:cNvPr id="24" name="TextBox 23"/>
+          <p:cNvSpPr txBox="1"/>
+          <p:nvPr/>
+        </p:nvSpPr>
+        <p:spPr>
+          <a:xfrm>
+            <a:off x="3474720" y="2834640"/>
+            <a:ext cx="2743200" cy="274320"/>
+          </a:xfrm>
+          <a:prstGeom prst="rect">
+            <a:avLst/>
+          </a:prstGeom>
+          <a:noFill/>
+        </p:spPr>
+        <p:txBody>
+          <a:bodyPr wrap="square">
+            <a:spAutoFit/>
+          </a:bodyPr>
+          <a:lstStyle/>
+          <a:p>
+            <a:pPr algn="l">
+              <a:defRPr sz="1100" b="0" i="0">
+                <a:solidFill>
+                  <a:srgbClr val="3A3A3C"/>
+                </a:solidFill>
+                <a:latin typeface="Calibri"/>
+              </a:defRPr>
+            </a:pPr>
+            <a:r>
+              <a:t>$1.5M</a:t>
+            </a:r>
+          </a:p>
+        </p:txBody>
+      </p:sp>
+      <p:sp>
+        <p:nvSpPr>
+          <p:cNvPr id="25" name="TextBox 24"/>
+          <p:cNvSpPr txBox="1"/>
+          <p:nvPr/>
+        </p:nvSpPr>
+        <p:spPr>
+          <a:xfrm>
+            <a:off x="6217920" y="2834640"/>
+            <a:ext cx="2743200" cy="274320"/>
+          </a:xfrm>
+          <a:prstGeom prst="rect">
+            <a:avLst/>
+          </a:prstGeom>
+          <a:noFill/>
+        </p:spPr>
+        <p:txBody>
+          <a:bodyPr wrap="square">
+            <a:spAutoFit/>
+          </a:bodyPr>
+          <a:lstStyle/>
+          <a:p>
+            <a:pPr algn="l">
+              <a:defRPr sz="1100" b="1" i="0">
+                <a:solidFill>
+                  <a:srgbClr val="1C1C1E"/>
+                </a:solidFill>
+                <a:latin typeface="Calibri"/>
+              </a:defRPr>
+            </a:pPr>
+            <a:r>
+              <a:t>$3.0M</a:t>
+            </a:r>
+          </a:p>
+        </p:txBody>
+      </p:sp>
+      <p:sp>
+        <p:nvSpPr>
+          <p:cNvPr id="26" name="TextBox 25"/>
+          <p:cNvSpPr txBox="1"/>
+          <p:nvPr/>
+        </p:nvSpPr>
+        <p:spPr>
+          <a:xfrm>
+            <a:off x="8961120" y="2834640"/>
+            <a:ext cx="2743200" cy="274320"/>
+          </a:xfrm>
+          <a:prstGeom prst="rect">
+            <a:avLst/>
+          </a:prstGeom>
+          <a:noFill/>
+        </p:spPr>
+        <p:txBody>
+          <a:bodyPr wrap="square">
+            <a:spAutoFit/>
+          </a:bodyPr>
+          <a:lstStyle/>
+          <a:p>
+            <a:pPr algn="l">
+              <a:defRPr sz="1100" b="0" i="0">
+                <a:solidFill>
+                  <a:srgbClr val="3A3A3C"/>
+                </a:solidFill>
+                <a:latin typeface="Calibri"/>
+              </a:defRPr>
+            </a:pPr>
+            <a:r>
+              <a:t>$4.5M</a:t>
+            </a:r>
+          </a:p>
+        </p:txBody>
+      </p:sp>
+      <p:sp>
+        <p:nvSpPr>
+          <p:cNvPr id="27" name="Rounded Rectangle 26"/>
           <p:cNvSpPr/>
           <p:nvPr/>
         </p:nvSpPr>
         <p:spPr>
           <a:xfrm>
-            <a:off x="731520" y="2880360"/>
-            <a:ext cx="10789920" cy="1005840"/>
+            <a:off x="731520" y="3182112"/>
+            <a:ext cx="10515600" cy="347472"/>
           </a:xfrm>
           <a:prstGeom prst="roundRect">
             <a:avLst>
-              <a:gd name="adj" fmla="val 4000"/>
+              <a:gd name="adj" fmla="val 2000"/>
             </a:avLst>
           </a:prstGeom>
           <a:solidFill>
-            <a:srgbClr val="FFFFFF"/>
+            <a:srgbClr val="F0F0EE"/>
           </a:solidFill>
-          <a:ln w="12700">
-            <a:solidFill>
-              <a:srgbClr val="E0E0DE"/>
-            </a:solidFill>
+          <a:ln>
+            <a:noFill/>
           </a:ln>
         </p:spPr>
         <p:style>
@@ -21850,20 +21759,308 @@
       </p:sp>
       <p:sp>
         <p:nvSpPr>
-          <p:cNvPr id="12" name="Rectangle 11"/>
+          <p:cNvPr id="28" name="TextBox 27"/>
+          <p:cNvSpPr txBox="1"/>
+          <p:nvPr/>
+        </p:nvSpPr>
+        <p:spPr>
+          <a:xfrm>
+            <a:off x="731520" y="3200400"/>
+            <a:ext cx="2743200" cy="274320"/>
+          </a:xfrm>
+          <a:prstGeom prst="rect">
+            <a:avLst/>
+          </a:prstGeom>
+          <a:noFill/>
+        </p:spPr>
+        <p:txBody>
+          <a:bodyPr wrap="square">
+            <a:spAutoFit/>
+          </a:bodyPr>
+          <a:lstStyle/>
+          <a:p>
+            <a:pPr algn="l">
+              <a:defRPr sz="1100" b="0" i="0">
+                <a:solidFill>
+                  <a:srgbClr val="3A3A3C"/>
+                </a:solidFill>
+                <a:latin typeface="Calibri"/>
+              </a:defRPr>
+            </a:pPr>
+            <a:r>
+              <a:t>Package size increase</a:t>
+            </a:r>
+          </a:p>
+        </p:txBody>
+      </p:sp>
+      <p:sp>
+        <p:nvSpPr>
+          <p:cNvPr id="29" name="TextBox 28"/>
+          <p:cNvSpPr txBox="1"/>
+          <p:nvPr/>
+        </p:nvSpPr>
+        <p:spPr>
+          <a:xfrm>
+            <a:off x="3474720" y="3200400"/>
+            <a:ext cx="2743200" cy="274320"/>
+          </a:xfrm>
+          <a:prstGeom prst="rect">
+            <a:avLst/>
+          </a:prstGeom>
+          <a:noFill/>
+        </p:spPr>
+        <p:txBody>
+          <a:bodyPr wrap="square">
+            <a:spAutoFit/>
+          </a:bodyPr>
+          <a:lstStyle/>
+          <a:p>
+            <a:pPr algn="l">
+              <a:defRPr sz="1100" b="0" i="0">
+                <a:solidFill>
+                  <a:srgbClr val="3A3A3C"/>
+                </a:solidFill>
+                <a:latin typeface="Calibri"/>
+              </a:defRPr>
+            </a:pPr>
+            <a:r>
+              <a:t>$2.0M</a:t>
+            </a:r>
+          </a:p>
+        </p:txBody>
+      </p:sp>
+      <p:sp>
+        <p:nvSpPr>
+          <p:cNvPr id="30" name="TextBox 29"/>
+          <p:cNvSpPr txBox="1"/>
+          <p:nvPr/>
+        </p:nvSpPr>
+        <p:spPr>
+          <a:xfrm>
+            <a:off x="6217920" y="3200400"/>
+            <a:ext cx="2743200" cy="274320"/>
+          </a:xfrm>
+          <a:prstGeom prst="rect">
+            <a:avLst/>
+          </a:prstGeom>
+          <a:noFill/>
+        </p:spPr>
+        <p:txBody>
+          <a:bodyPr wrap="square">
+            <a:spAutoFit/>
+          </a:bodyPr>
+          <a:lstStyle/>
+          <a:p>
+            <a:pPr algn="l">
+              <a:defRPr sz="1100" b="1" i="0">
+                <a:solidFill>
+                  <a:srgbClr val="1C1C1E"/>
+                </a:solidFill>
+                <a:latin typeface="Calibri"/>
+              </a:defRPr>
+            </a:pPr>
+            <a:r>
+              <a:t>$4.0M</a:t>
+            </a:r>
+          </a:p>
+        </p:txBody>
+      </p:sp>
+      <p:sp>
+        <p:nvSpPr>
+          <p:cNvPr id="31" name="TextBox 30"/>
+          <p:cNvSpPr txBox="1"/>
+          <p:nvPr/>
+        </p:nvSpPr>
+        <p:spPr>
+          <a:xfrm>
+            <a:off x="8961120" y="3200400"/>
+            <a:ext cx="2743200" cy="274320"/>
+          </a:xfrm>
+          <a:prstGeom prst="rect">
+            <a:avLst/>
+          </a:prstGeom>
+          <a:noFill/>
+        </p:spPr>
+        <p:txBody>
+          <a:bodyPr wrap="square">
+            <a:spAutoFit/>
+          </a:bodyPr>
+          <a:lstStyle/>
+          <a:p>
+            <a:pPr algn="l">
+              <a:defRPr sz="1100" b="0" i="0">
+                <a:solidFill>
+                  <a:srgbClr val="3A3A3C"/>
+                </a:solidFill>
+                <a:latin typeface="Calibri"/>
+              </a:defRPr>
+            </a:pPr>
+            <a:r>
+              <a:t>$8.0M</a:t>
+            </a:r>
+          </a:p>
+        </p:txBody>
+      </p:sp>
+      <p:sp>
+        <p:nvSpPr>
+          <p:cNvPr id="32" name="TextBox 31"/>
+          <p:cNvSpPr txBox="1"/>
+          <p:nvPr/>
+        </p:nvSpPr>
+        <p:spPr>
+          <a:xfrm>
+            <a:off x="731520" y="3566160"/>
+            <a:ext cx="2743200" cy="274320"/>
+          </a:xfrm>
+          <a:prstGeom prst="rect">
+            <a:avLst/>
+          </a:prstGeom>
+          <a:noFill/>
+        </p:spPr>
+        <p:txBody>
+          <a:bodyPr wrap="square">
+            <a:spAutoFit/>
+          </a:bodyPr>
+          <a:lstStyle/>
+          <a:p>
+            <a:pPr algn="l">
+              <a:defRPr sz="1100" b="0" i="0">
+                <a:solidFill>
+                  <a:srgbClr val="3A3A3C"/>
+                </a:solidFill>
+                <a:latin typeface="Calibri"/>
+              </a:defRPr>
+            </a:pPr>
+            <a:r>
+              <a:t>Proposal win-rate revenue</a:t>
+            </a:r>
+          </a:p>
+        </p:txBody>
+      </p:sp>
+      <p:sp>
+        <p:nvSpPr>
+          <p:cNvPr id="33" name="TextBox 32"/>
+          <p:cNvSpPr txBox="1"/>
+          <p:nvPr/>
+        </p:nvSpPr>
+        <p:spPr>
+          <a:xfrm>
+            <a:off x="3474720" y="3566160"/>
+            <a:ext cx="2743200" cy="274320"/>
+          </a:xfrm>
+          <a:prstGeom prst="rect">
+            <a:avLst/>
+          </a:prstGeom>
+          <a:noFill/>
+        </p:spPr>
+        <p:txBody>
+          <a:bodyPr wrap="square">
+            <a:spAutoFit/>
+          </a:bodyPr>
+          <a:lstStyle/>
+          <a:p>
+            <a:pPr algn="l">
+              <a:defRPr sz="1100" b="0" i="0">
+                <a:solidFill>
+                  <a:srgbClr val="3A3A3C"/>
+                </a:solidFill>
+                <a:latin typeface="Calibri"/>
+              </a:defRPr>
+            </a:pPr>
+            <a:r>
+              <a:t>$1.3M</a:t>
+            </a:r>
+          </a:p>
+        </p:txBody>
+      </p:sp>
+      <p:sp>
+        <p:nvSpPr>
+          <p:cNvPr id="34" name="TextBox 33"/>
+          <p:cNvSpPr txBox="1"/>
+          <p:nvPr/>
+        </p:nvSpPr>
+        <p:spPr>
+          <a:xfrm>
+            <a:off x="6217920" y="3566160"/>
+            <a:ext cx="2743200" cy="274320"/>
+          </a:xfrm>
+          <a:prstGeom prst="rect">
+            <a:avLst/>
+          </a:prstGeom>
+          <a:noFill/>
+        </p:spPr>
+        <p:txBody>
+          <a:bodyPr wrap="square">
+            <a:spAutoFit/>
+          </a:bodyPr>
+          <a:lstStyle/>
+          <a:p>
+            <a:pPr algn="l">
+              <a:defRPr sz="1100" b="1" i="0">
+                <a:solidFill>
+                  <a:srgbClr val="1C1C1E"/>
+                </a:solidFill>
+                <a:latin typeface="Calibri"/>
+              </a:defRPr>
+            </a:pPr>
+            <a:r>
+              <a:t>$2.5M</a:t>
+            </a:r>
+          </a:p>
+        </p:txBody>
+      </p:sp>
+      <p:sp>
+        <p:nvSpPr>
+          <p:cNvPr id="35" name="TextBox 34"/>
+          <p:cNvSpPr txBox="1"/>
+          <p:nvPr/>
+        </p:nvSpPr>
+        <p:spPr>
+          <a:xfrm>
+            <a:off x="8961120" y="3566160"/>
+            <a:ext cx="2743200" cy="274320"/>
+          </a:xfrm>
+          <a:prstGeom prst="rect">
+            <a:avLst/>
+          </a:prstGeom>
+          <a:noFill/>
+        </p:spPr>
+        <p:txBody>
+          <a:bodyPr wrap="square">
+            <a:spAutoFit/>
+          </a:bodyPr>
+          <a:lstStyle/>
+          <a:p>
+            <a:pPr algn="l">
+              <a:defRPr sz="1100" b="0" i="0">
+                <a:solidFill>
+                  <a:srgbClr val="3A3A3C"/>
+                </a:solidFill>
+                <a:latin typeface="Calibri"/>
+              </a:defRPr>
+            </a:pPr>
+            <a:r>
+              <a:t>$3.8M</a:t>
+            </a:r>
+          </a:p>
+        </p:txBody>
+      </p:sp>
+      <p:sp>
+        <p:nvSpPr>
+          <p:cNvPr id="36" name="Rectangle 35"/>
           <p:cNvSpPr/>
           <p:nvPr/>
         </p:nvSpPr>
         <p:spPr>
           <a:xfrm>
-            <a:off x="731520" y="2880360"/>
-            <a:ext cx="50800" cy="1005840"/>
+            <a:off x="731520" y="3931920"/>
+            <a:ext cx="10515600" cy="12700"/>
           </a:xfrm>
           <a:prstGeom prst="rect">
             <a:avLst/>
           </a:prstGeom>
           <a:solidFill>
-            <a:srgbClr val="767676"/>
+            <a:srgbClr val="E0E0DE"/>
           </a:solidFill>
           <a:ln>
             <a:noFill/>
@@ -21893,64 +22090,64 @@
       </p:sp>
       <p:sp>
         <p:nvSpPr>
-          <p:cNvPr id="13" name="TextBox 12"/>
-          <p:cNvSpPr txBox="1"/>
-          <p:nvPr/>
-        </p:nvSpPr>
-        <p:spPr>
-          <a:xfrm>
-            <a:off x="1097280" y="2926080"/>
-            <a:ext cx="1828800" cy="182880"/>
-          </a:xfrm>
-          <a:prstGeom prst="rect">
-            <a:avLst/>
-          </a:prstGeom>
-          <a:noFill/>
-        </p:spPr>
-        <p:txBody>
-          <a:bodyPr wrap="square">
-            <a:spAutoFit/>
-          </a:bodyPr>
-          <a:lstStyle/>
-          <a:p>
-            <a:pPr algn="l">
-              <a:defRPr sz="900" b="1" i="0">
-                <a:solidFill>
-                  <a:srgbClr val="767676"/>
-                </a:solidFill>
-                <a:latin typeface="Calibri"/>
-              </a:defRPr>
-            </a:pPr>
-            <a:r>
-              <a:t>ON ADOPTION BARRIERS</a:t>
-            </a:r>
-          </a:p>
-        </p:txBody>
-      </p:sp>
-      <p:sp>
-        <p:nvSpPr>
-          <p:cNvPr id="14" name="TextBox 13"/>
-          <p:cNvSpPr txBox="1"/>
-          <p:nvPr/>
-        </p:nvSpPr>
-        <p:spPr>
-          <a:xfrm>
-            <a:off x="1097280" y="3136392"/>
-            <a:ext cx="7315200" cy="548640"/>
-          </a:xfrm>
-          <a:prstGeom prst="rect">
-            <a:avLst/>
-          </a:prstGeom>
-          <a:noFill/>
-        </p:spPr>
-        <p:txBody>
-          <a:bodyPr wrap="square">
-            <a:spAutoFit/>
-          </a:bodyPr>
-          <a:lstStyle/>
-          <a:p>
-            <a:pPr algn="l">
-              <a:defRPr sz="1100" b="0" i="1">
+          <p:cNvPr id="37" name="TextBox 36"/>
+          <p:cNvSpPr txBox="1"/>
+          <p:nvPr/>
+        </p:nvSpPr>
+        <p:spPr>
+          <a:xfrm>
+            <a:off x="731520" y="4069080"/>
+            <a:ext cx="2743200" cy="274320"/>
+          </a:xfrm>
+          <a:prstGeom prst="rect">
+            <a:avLst/>
+          </a:prstGeom>
+          <a:noFill/>
+        </p:spPr>
+        <p:txBody>
+          <a:bodyPr wrap="square">
+            <a:spAutoFit/>
+          </a:bodyPr>
+          <a:lstStyle/>
+          <a:p>
+            <a:pPr algn="l">
+              <a:defRPr sz="1100" b="0" i="0">
+                <a:solidFill>
+                  <a:srgbClr val="1C1C1E"/>
+                </a:solidFill>
+                <a:latin typeface="Calibri"/>
+              </a:defRPr>
+            </a:pPr>
+            <a:r>
+              <a:t>Gross value</a:t>
+            </a:r>
+          </a:p>
+        </p:txBody>
+      </p:sp>
+      <p:sp>
+        <p:nvSpPr>
+          <p:cNvPr id="38" name="TextBox 37"/>
+          <p:cNvSpPr txBox="1"/>
+          <p:nvPr/>
+        </p:nvSpPr>
+        <p:spPr>
+          <a:xfrm>
+            <a:off x="3474720" y="4069080"/>
+            <a:ext cx="2743200" cy="274320"/>
+          </a:xfrm>
+          <a:prstGeom prst="rect">
+            <a:avLst/>
+          </a:prstGeom>
+          <a:noFill/>
+        </p:spPr>
+        <p:txBody>
+          <a:bodyPr wrap="square">
+            <a:spAutoFit/>
+          </a:bodyPr>
+          <a:lstStyle/>
+          <a:p>
+            <a:pPr algn="l">
+              <a:defRPr sz="1100" b="0" i="0">
                 <a:solidFill>
                   <a:srgbClr val="3A3A3C"/>
                 </a:solidFill>
@@ -21958,35 +22155,35 @@
               </a:defRPr>
             </a:pPr>
             <a:r>
-              <a:t>“The resistance comes from customer-facing teams because they worry AI will produce confident-sounding wrong answers that damage dealer relationships they have spent years building.”</a:t>
-            </a:r>
-          </a:p>
-        </p:txBody>
-      </p:sp>
-      <p:sp>
-        <p:nvSpPr>
-          <p:cNvPr id="15" name="TextBox 14"/>
-          <p:cNvSpPr txBox="1"/>
-          <p:nvPr/>
-        </p:nvSpPr>
-        <p:spPr>
-          <a:xfrm>
-            <a:off x="8686800" y="3200400"/>
-            <a:ext cx="2560320" cy="457200"/>
-          </a:xfrm>
-          <a:prstGeom prst="rect">
-            <a:avLst/>
-          </a:prstGeom>
-          <a:noFill/>
-        </p:spPr>
-        <p:txBody>
-          <a:bodyPr wrap="square">
-            <a:spAutoFit/>
-          </a:bodyPr>
-          <a:lstStyle/>
-          <a:p>
-            <a:pPr algn="l">
-              <a:defRPr sz="1000" b="1" i="0">
+              <a:t>$6.1M</a:t>
+            </a:r>
+          </a:p>
+        </p:txBody>
+      </p:sp>
+      <p:sp>
+        <p:nvSpPr>
+          <p:cNvPr id="39" name="TextBox 38"/>
+          <p:cNvSpPr txBox="1"/>
+          <p:nvPr/>
+        </p:nvSpPr>
+        <p:spPr>
+          <a:xfrm>
+            <a:off x="6217920" y="4069080"/>
+            <a:ext cx="2743200" cy="274320"/>
+          </a:xfrm>
+          <a:prstGeom prst="rect">
+            <a:avLst/>
+          </a:prstGeom>
+          <a:noFill/>
+        </p:spPr>
+        <p:txBody>
+          <a:bodyPr wrap="square">
+            <a:spAutoFit/>
+          </a:bodyPr>
+          <a:lstStyle/>
+          <a:p>
+            <a:pPr algn="l">
+              <a:defRPr sz="1100" b="1" i="0">
                 <a:solidFill>
                   <a:srgbClr val="1C1C1E"/>
                 </a:solidFill>
@@ -21994,161 +22191,35 @@
               </a:defRPr>
             </a:pPr>
             <a:r>
-              <a:t>→ Human-in-the-loop is mandatory</a:t>
-            </a:r>
-          </a:p>
-        </p:txBody>
-      </p:sp>
-      <p:sp>
-        <p:nvSpPr>
-          <p:cNvPr id="16" name="Rounded Rectangle 15"/>
-          <p:cNvSpPr/>
-          <p:nvPr/>
-        </p:nvSpPr>
-        <p:spPr>
-          <a:xfrm>
-            <a:off x="731520" y="4069080"/>
-            <a:ext cx="10789920" cy="1005840"/>
-          </a:xfrm>
-          <a:prstGeom prst="roundRect">
-            <a:avLst>
-              <a:gd name="adj" fmla="val 4000"/>
-            </a:avLst>
-          </a:prstGeom>
-          <a:solidFill>
-            <a:srgbClr val="FFFFFF"/>
-          </a:solidFill>
-          <a:ln w="12700">
-            <a:solidFill>
-              <a:srgbClr val="E0E0DE"/>
-            </a:solidFill>
-          </a:ln>
-        </p:spPr>
-        <p:style>
-          <a:lnRef idx="1">
-            <a:schemeClr val="accent1"/>
-          </a:lnRef>
-          <a:fillRef idx="3">
-            <a:schemeClr val="accent1"/>
-          </a:fillRef>
-          <a:effectRef idx="2">
-            <a:schemeClr val="accent1"/>
-          </a:effectRef>
-          <a:fontRef idx="minor">
-            <a:schemeClr val="lt1"/>
-          </a:fontRef>
-        </p:style>
-        <p:txBody>
-          <a:bodyPr rtlCol="0" anchor="ctr"/>
-          <a:lstStyle/>
-          <a:p>
-            <a:pPr algn="ctr"/>
-          </a:p>
-        </p:txBody>
-      </p:sp>
-      <p:sp>
-        <p:nvSpPr>
-          <p:cNvPr id="17" name="Rectangle 16"/>
-          <p:cNvSpPr/>
-          <p:nvPr/>
-        </p:nvSpPr>
-        <p:spPr>
-          <a:xfrm>
-            <a:off x="731520" y="4069080"/>
-            <a:ext cx="50800" cy="1005840"/>
-          </a:xfrm>
-          <a:prstGeom prst="rect">
-            <a:avLst/>
-          </a:prstGeom>
-          <a:solidFill>
-            <a:srgbClr val="767676"/>
-          </a:solidFill>
-          <a:ln>
-            <a:noFill/>
-          </a:ln>
-        </p:spPr>
-        <p:style>
-          <a:lnRef idx="1">
-            <a:schemeClr val="accent1"/>
-          </a:lnRef>
-          <a:fillRef idx="3">
-            <a:schemeClr val="accent1"/>
-          </a:fillRef>
-          <a:effectRef idx="2">
-            <a:schemeClr val="accent1"/>
-          </a:effectRef>
-          <a:fontRef idx="minor">
-            <a:schemeClr val="lt1"/>
-          </a:fontRef>
-        </p:style>
-        <p:txBody>
-          <a:bodyPr rtlCol="0" anchor="ctr"/>
-          <a:lstStyle/>
-          <a:p>
-            <a:pPr algn="ctr"/>
-          </a:p>
-        </p:txBody>
-      </p:sp>
-      <p:sp>
-        <p:nvSpPr>
-          <p:cNvPr id="18" name="TextBox 17"/>
-          <p:cNvSpPr txBox="1"/>
-          <p:nvPr/>
-        </p:nvSpPr>
-        <p:spPr>
-          <a:xfrm>
-            <a:off x="1097280" y="4114800"/>
-            <a:ext cx="1828800" cy="182880"/>
-          </a:xfrm>
-          <a:prstGeom prst="rect">
-            <a:avLst/>
-          </a:prstGeom>
-          <a:noFill/>
-        </p:spPr>
-        <p:txBody>
-          <a:bodyPr wrap="square">
-            <a:spAutoFit/>
-          </a:bodyPr>
-          <a:lstStyle/>
-          <a:p>
-            <a:pPr algn="l">
-              <a:defRPr sz="900" b="1" i="0">
-                <a:solidFill>
-                  <a:srgbClr val="767676"/>
-                </a:solidFill>
-                <a:latin typeface="Calibri"/>
-              </a:defRPr>
-            </a:pPr>
-            <a:r>
-              <a:t>ON COMPETITIVE ADVANTAGE</a:t>
-            </a:r>
-          </a:p>
-        </p:txBody>
-      </p:sp>
-      <p:sp>
-        <p:nvSpPr>
-          <p:cNvPr id="19" name="TextBox 18"/>
-          <p:cNvSpPr txBox="1"/>
-          <p:nvPr/>
-        </p:nvSpPr>
-        <p:spPr>
-          <a:xfrm>
-            <a:off x="1097280" y="4325112"/>
-            <a:ext cx="7315200" cy="548640"/>
-          </a:xfrm>
-          <a:prstGeom prst="rect">
-            <a:avLst/>
-          </a:prstGeom>
-          <a:noFill/>
-        </p:spPr>
-        <p:txBody>
-          <a:bodyPr wrap="square">
-            <a:spAutoFit/>
-          </a:bodyPr>
-          <a:lstStyle/>
-          <a:p>
-            <a:pPr algn="l">
-              <a:defRPr sz="1100" b="0" i="1">
+              <a:t>$12.9M</a:t>
+            </a:r>
+          </a:p>
+        </p:txBody>
+      </p:sp>
+      <p:sp>
+        <p:nvSpPr>
+          <p:cNvPr id="40" name="TextBox 39"/>
+          <p:cNvSpPr txBox="1"/>
+          <p:nvPr/>
+        </p:nvSpPr>
+        <p:spPr>
+          <a:xfrm>
+            <a:off x="8961120" y="4069080"/>
+            <a:ext cx="2743200" cy="274320"/>
+          </a:xfrm>
+          <a:prstGeom prst="rect">
+            <a:avLst/>
+          </a:prstGeom>
+          <a:noFill/>
+        </p:spPr>
+        <p:txBody>
+          <a:bodyPr wrap="square">
+            <a:spAutoFit/>
+          </a:bodyPr>
+          <a:lstStyle/>
+          <a:p>
+            <a:pPr algn="l">
+              <a:defRPr sz="1100" b="0" i="0">
                 <a:solidFill>
                   <a:srgbClr val="3A3A3C"/>
                 </a:solidFill>
@@ -22156,35 +22227,35 @@
               </a:defRPr>
             </a:pPr>
             <a:r>
-              <a:t>“A Shimano rider uses the app to check compatibility. A Hammerhead rider uses it to train, navigate, and communicate with their component stack. That is a fundamentally different data relationship.”</a:t>
-            </a:r>
-          </a:p>
-        </p:txBody>
-      </p:sp>
-      <p:sp>
-        <p:nvSpPr>
-          <p:cNvPr id="20" name="TextBox 19"/>
-          <p:cNvSpPr txBox="1"/>
-          <p:nvPr/>
-        </p:nvSpPr>
-        <p:spPr>
-          <a:xfrm>
-            <a:off x="8686800" y="4389120"/>
-            <a:ext cx="2560320" cy="457200"/>
-          </a:xfrm>
-          <a:prstGeom prst="rect">
-            <a:avLst/>
-          </a:prstGeom>
-          <a:noFill/>
-        </p:spPr>
-        <p:txBody>
-          <a:bodyPr wrap="square">
-            <a:spAutoFit/>
-          </a:bodyPr>
-          <a:lstStyle/>
-          <a:p>
-            <a:pPr algn="l">
-              <a:defRPr sz="1000" b="1" i="0">
+              <a:t>$26.0M</a:t>
+            </a:r>
+          </a:p>
+        </p:txBody>
+      </p:sp>
+      <p:sp>
+        <p:nvSpPr>
+          <p:cNvPr id="41" name="TextBox 40"/>
+          <p:cNvSpPr txBox="1"/>
+          <p:nvPr/>
+        </p:nvSpPr>
+        <p:spPr>
+          <a:xfrm>
+            <a:off x="731520" y="4434840"/>
+            <a:ext cx="2743200" cy="274320"/>
+          </a:xfrm>
+          <a:prstGeom prst="rect">
+            <a:avLst/>
+          </a:prstGeom>
+          <a:noFill/>
+        </p:spPr>
+        <p:txBody>
+          <a:bodyPr wrap="square">
+            <a:spAutoFit/>
+          </a:bodyPr>
+          <a:lstStyle/>
+          <a:p>
+            <a:pPr algn="l">
+              <a:defRPr sz="1100" b="0" i="0">
                 <a:solidFill>
                   <a:srgbClr val="1C1C1E"/>
                 </a:solidFill>
@@ -22192,161 +22263,35 @@
               </a:defRPr>
             </a:pPr>
             <a:r>
-              <a:t>→ Hammerhead is SRAM's real AI moat</a:t>
-            </a:r>
-          </a:p>
-        </p:txBody>
-      </p:sp>
-      <p:sp>
-        <p:nvSpPr>
-          <p:cNvPr id="21" name="Rounded Rectangle 20"/>
-          <p:cNvSpPr/>
-          <p:nvPr/>
-        </p:nvSpPr>
-        <p:spPr>
-          <a:xfrm>
-            <a:off x="731520" y="5257800"/>
-            <a:ext cx="10789920" cy="1005840"/>
-          </a:xfrm>
-          <a:prstGeom prst="roundRect">
-            <a:avLst>
-              <a:gd name="adj" fmla="val 4000"/>
-            </a:avLst>
-          </a:prstGeom>
-          <a:solidFill>
-            <a:srgbClr val="FFFFFF"/>
-          </a:solidFill>
-          <a:ln w="12700">
-            <a:solidFill>
-              <a:srgbClr val="E0E0DE"/>
-            </a:solidFill>
-          </a:ln>
-        </p:spPr>
-        <p:style>
-          <a:lnRef idx="1">
-            <a:schemeClr val="accent1"/>
-          </a:lnRef>
-          <a:fillRef idx="3">
-            <a:schemeClr val="accent1"/>
-          </a:fillRef>
-          <a:effectRef idx="2">
-            <a:schemeClr val="accent1"/>
-          </a:effectRef>
-          <a:fontRef idx="minor">
-            <a:schemeClr val="lt1"/>
-          </a:fontRef>
-        </p:style>
-        <p:txBody>
-          <a:bodyPr rtlCol="0" anchor="ctr"/>
-          <a:lstStyle/>
-          <a:p>
-            <a:pPr algn="ctr"/>
-          </a:p>
-        </p:txBody>
-      </p:sp>
-      <p:sp>
-        <p:nvSpPr>
-          <p:cNvPr id="22" name="Rectangle 21"/>
-          <p:cNvSpPr/>
-          <p:nvPr/>
-        </p:nvSpPr>
-        <p:spPr>
-          <a:xfrm>
-            <a:off x="731520" y="5257800"/>
-            <a:ext cx="50800" cy="1005840"/>
-          </a:xfrm>
-          <a:prstGeom prst="rect">
-            <a:avLst/>
-          </a:prstGeom>
-          <a:solidFill>
-            <a:srgbClr val="767676"/>
-          </a:solidFill>
-          <a:ln>
-            <a:noFill/>
-          </a:ln>
-        </p:spPr>
-        <p:style>
-          <a:lnRef idx="1">
-            <a:schemeClr val="accent1"/>
-          </a:lnRef>
-          <a:fillRef idx="3">
-            <a:schemeClr val="accent1"/>
-          </a:fillRef>
-          <a:effectRef idx="2">
-            <a:schemeClr val="accent1"/>
-          </a:effectRef>
-          <a:fontRef idx="minor">
-            <a:schemeClr val="lt1"/>
-          </a:fontRef>
-        </p:style>
-        <p:txBody>
-          <a:bodyPr rtlCol="0" anchor="ctr"/>
-          <a:lstStyle/>
-          <a:p>
-            <a:pPr algn="ctr"/>
-          </a:p>
-        </p:txBody>
-      </p:sp>
-      <p:sp>
-        <p:nvSpPr>
-          <p:cNvPr id="23" name="TextBox 22"/>
-          <p:cNvSpPr txBox="1"/>
-          <p:nvPr/>
-        </p:nvSpPr>
-        <p:spPr>
-          <a:xfrm>
-            <a:off x="1097280" y="5303520"/>
-            <a:ext cx="1828800" cy="182880"/>
-          </a:xfrm>
-          <a:prstGeom prst="rect">
-            <a:avLst/>
-          </a:prstGeom>
-          <a:noFill/>
-        </p:spPr>
-        <p:txBody>
-          <a:bodyPr wrap="square">
-            <a:spAutoFit/>
-          </a:bodyPr>
-          <a:lstStyle/>
-          <a:p>
-            <a:pPr algn="l">
-              <a:defRPr sz="900" b="1" i="0">
-                <a:solidFill>
-                  <a:srgbClr val="767676"/>
-                </a:solidFill>
-                <a:latin typeface="Calibri"/>
-              </a:defRPr>
-            </a:pPr>
-            <a:r>
-              <a:t>ON SUCCESS CRITERIA</a:t>
-            </a:r>
-          </a:p>
-        </p:txBody>
-      </p:sp>
-      <p:sp>
-        <p:nvSpPr>
-          <p:cNvPr id="24" name="TextBox 23"/>
-          <p:cNvSpPr txBox="1"/>
-          <p:nvPr/>
-        </p:nvSpPr>
-        <p:spPr>
-          <a:xfrm>
-            <a:off x="1097280" y="5513832"/>
-            <a:ext cx="7315200" cy="548640"/>
-          </a:xfrm>
-          <a:prstGeom prst="rect">
-            <a:avLst/>
-          </a:prstGeom>
-          <a:noFill/>
-        </p:spPr>
-        <p:txBody>
-          <a:bodyPr wrap="square">
-            <a:spAutoFit/>
-          </a:bodyPr>
-          <a:lstStyle/>
-          <a:p>
-            <a:pPr algn="l">
-              <a:defRPr sz="1100" b="0" i="1">
+              <a:t>Setup costs</a:t>
+            </a:r>
+          </a:p>
+        </p:txBody>
+      </p:sp>
+      <p:sp>
+        <p:nvSpPr>
+          <p:cNvPr id="42" name="TextBox 41"/>
+          <p:cNvSpPr txBox="1"/>
+          <p:nvPr/>
+        </p:nvSpPr>
+        <p:spPr>
+          <a:xfrm>
+            <a:off x="3474720" y="4434840"/>
+            <a:ext cx="2743200" cy="274320"/>
+          </a:xfrm>
+          <a:prstGeom prst="rect">
+            <a:avLst/>
+          </a:prstGeom>
+          <a:noFill/>
+        </p:spPr>
+        <p:txBody>
+          <a:bodyPr wrap="square">
+            <a:spAutoFit/>
+          </a:bodyPr>
+          <a:lstStyle/>
+          <a:p>
+            <a:pPr algn="l">
+              <a:defRPr sz="1100" b="0" i="0">
                 <a:solidFill>
                   <a:srgbClr val="3A3A3C"/>
                 </a:solidFill>
@@ -22354,35 +22299,35 @@
               </a:defRPr>
             </a:pPr>
             <a:r>
-              <a:t>“I want one workflow measurably faster, measurably more accurate, with no regression in dealer satisfaction scores.”</a:t>
-            </a:r>
-          </a:p>
-        </p:txBody>
-      </p:sp>
-      <p:sp>
-        <p:nvSpPr>
-          <p:cNvPr id="25" name="TextBox 24"/>
-          <p:cNvSpPr txBox="1"/>
-          <p:nvPr/>
-        </p:nvSpPr>
-        <p:spPr>
-          <a:xfrm>
-            <a:off x="8686800" y="5577840"/>
-            <a:ext cx="2560320" cy="457200"/>
-          </a:xfrm>
-          <a:prstGeom prst="rect">
-            <a:avLst/>
-          </a:prstGeom>
-          <a:noFill/>
-        </p:spPr>
-        <p:txBody>
-          <a:bodyPr wrap="square">
-            <a:spAutoFit/>
-          </a:bodyPr>
-          <a:lstStyle/>
-          <a:p>
-            <a:pPr algn="l">
-              <a:defRPr sz="1000" b="1" i="0">
+              <a:t>($1.2M)</a:t>
+            </a:r>
+          </a:p>
+        </p:txBody>
+      </p:sp>
+      <p:sp>
+        <p:nvSpPr>
+          <p:cNvPr id="43" name="TextBox 42"/>
+          <p:cNvSpPr txBox="1"/>
+          <p:nvPr/>
+        </p:nvSpPr>
+        <p:spPr>
+          <a:xfrm>
+            <a:off x="6217920" y="4434840"/>
+            <a:ext cx="2743200" cy="274320"/>
+          </a:xfrm>
+          <a:prstGeom prst="rect">
+            <a:avLst/>
+          </a:prstGeom>
+          <a:noFill/>
+        </p:spPr>
+        <p:txBody>
+          <a:bodyPr wrap="square">
+            <a:spAutoFit/>
+          </a:bodyPr>
+          <a:lstStyle/>
+          <a:p>
+            <a:pPr algn="l">
+              <a:defRPr sz="1100" b="1" i="0">
                 <a:solidFill>
                   <a:srgbClr val="1C1C1E"/>
                 </a:solidFill>
@@ -22390,14 +22335,482 @@
               </a:defRPr>
             </a:pPr>
             <a:r>
-              <a:t>→ Aligns with our 90-day pilot targets</a:t>
-            </a:r>
-          </a:p>
-        </p:txBody>
-      </p:sp>
-      <p:sp>
-        <p:nvSpPr>
-          <p:cNvPr id="26" name="TextBox 25"/>
+              <a:t>($2.0M)</a:t>
+            </a:r>
+          </a:p>
+        </p:txBody>
+      </p:sp>
+      <p:sp>
+        <p:nvSpPr>
+          <p:cNvPr id="44" name="TextBox 43"/>
+          <p:cNvSpPr txBox="1"/>
+          <p:nvPr/>
+        </p:nvSpPr>
+        <p:spPr>
+          <a:xfrm>
+            <a:off x="8961120" y="4434840"/>
+            <a:ext cx="2743200" cy="274320"/>
+          </a:xfrm>
+          <a:prstGeom prst="rect">
+            <a:avLst/>
+          </a:prstGeom>
+          <a:noFill/>
+        </p:spPr>
+        <p:txBody>
+          <a:bodyPr wrap="square">
+            <a:spAutoFit/>
+          </a:bodyPr>
+          <a:lstStyle/>
+          <a:p>
+            <a:pPr algn="l">
+              <a:defRPr sz="1100" b="0" i="0">
+                <a:solidFill>
+                  <a:srgbClr val="3A3A3C"/>
+                </a:solidFill>
+                <a:latin typeface="Calibri"/>
+              </a:defRPr>
+            </a:pPr>
+            <a:r>
+              <a:t>($2.5M)</a:t>
+            </a:r>
+          </a:p>
+        </p:txBody>
+      </p:sp>
+      <p:sp>
+        <p:nvSpPr>
+          <p:cNvPr id="45" name="TextBox 44"/>
+          <p:cNvSpPr txBox="1"/>
+          <p:nvPr/>
+        </p:nvSpPr>
+        <p:spPr>
+          <a:xfrm>
+            <a:off x="731520" y="4800600"/>
+            <a:ext cx="2743200" cy="274320"/>
+          </a:xfrm>
+          <a:prstGeom prst="rect">
+            <a:avLst/>
+          </a:prstGeom>
+          <a:noFill/>
+        </p:spPr>
+        <p:txBody>
+          <a:bodyPr wrap="square">
+            <a:spAutoFit/>
+          </a:bodyPr>
+          <a:lstStyle/>
+          <a:p>
+            <a:pPr algn="l">
+              <a:defRPr sz="1100" b="0" i="0">
+                <a:solidFill>
+                  <a:srgbClr val="1C1C1E"/>
+                </a:solidFill>
+                <a:latin typeface="Calibri"/>
+              </a:defRPr>
+            </a:pPr>
+            <a:r>
+              <a:t>Operating costs</a:t>
+            </a:r>
+          </a:p>
+        </p:txBody>
+      </p:sp>
+      <p:sp>
+        <p:nvSpPr>
+          <p:cNvPr id="46" name="TextBox 45"/>
+          <p:cNvSpPr txBox="1"/>
+          <p:nvPr/>
+        </p:nvSpPr>
+        <p:spPr>
+          <a:xfrm>
+            <a:off x="3474720" y="4800600"/>
+            <a:ext cx="2743200" cy="274320"/>
+          </a:xfrm>
+          <a:prstGeom prst="rect">
+            <a:avLst/>
+          </a:prstGeom>
+          <a:noFill/>
+        </p:spPr>
+        <p:txBody>
+          <a:bodyPr wrap="square">
+            <a:spAutoFit/>
+          </a:bodyPr>
+          <a:lstStyle/>
+          <a:p>
+            <a:pPr algn="l">
+              <a:defRPr sz="1100" b="0" i="0">
+                <a:solidFill>
+                  <a:srgbClr val="3A3A3C"/>
+                </a:solidFill>
+                <a:latin typeface="Calibri"/>
+              </a:defRPr>
+            </a:pPr>
+            <a:r>
+              <a:t>($0.4M)</a:t>
+            </a:r>
+          </a:p>
+        </p:txBody>
+      </p:sp>
+      <p:sp>
+        <p:nvSpPr>
+          <p:cNvPr id="47" name="TextBox 46"/>
+          <p:cNvSpPr txBox="1"/>
+          <p:nvPr/>
+        </p:nvSpPr>
+        <p:spPr>
+          <a:xfrm>
+            <a:off x="6217920" y="4800600"/>
+            <a:ext cx="2743200" cy="274320"/>
+          </a:xfrm>
+          <a:prstGeom prst="rect">
+            <a:avLst/>
+          </a:prstGeom>
+          <a:noFill/>
+        </p:spPr>
+        <p:txBody>
+          <a:bodyPr wrap="square">
+            <a:spAutoFit/>
+          </a:bodyPr>
+          <a:lstStyle/>
+          <a:p>
+            <a:pPr algn="l">
+              <a:defRPr sz="1100" b="1" i="0">
+                <a:solidFill>
+                  <a:srgbClr val="1C1C1E"/>
+                </a:solidFill>
+                <a:latin typeface="Calibri"/>
+              </a:defRPr>
+            </a:pPr>
+            <a:r>
+              <a:t>($0.7M)</a:t>
+            </a:r>
+          </a:p>
+        </p:txBody>
+      </p:sp>
+      <p:sp>
+        <p:nvSpPr>
+          <p:cNvPr id="48" name="TextBox 47"/>
+          <p:cNvSpPr txBox="1"/>
+          <p:nvPr/>
+        </p:nvSpPr>
+        <p:spPr>
+          <a:xfrm>
+            <a:off x="8961120" y="4800600"/>
+            <a:ext cx="2743200" cy="274320"/>
+          </a:xfrm>
+          <a:prstGeom prst="rect">
+            <a:avLst/>
+          </a:prstGeom>
+          <a:noFill/>
+        </p:spPr>
+        <p:txBody>
+          <a:bodyPr wrap="square">
+            <a:spAutoFit/>
+          </a:bodyPr>
+          <a:lstStyle/>
+          <a:p>
+            <a:pPr algn="l">
+              <a:defRPr sz="1100" b="0" i="0">
+                <a:solidFill>
+                  <a:srgbClr val="3A3A3C"/>
+                </a:solidFill>
+                <a:latin typeface="Calibri"/>
+              </a:defRPr>
+            </a:pPr>
+            <a:r>
+              <a:t>($1.0M)</a:t>
+            </a:r>
+          </a:p>
+        </p:txBody>
+      </p:sp>
+      <p:sp>
+        <p:nvSpPr>
+          <p:cNvPr id="49" name="TextBox 48"/>
+          <p:cNvSpPr txBox="1"/>
+          <p:nvPr/>
+        </p:nvSpPr>
+        <p:spPr>
+          <a:xfrm>
+            <a:off x="731520" y="5166360"/>
+            <a:ext cx="2743200" cy="274320"/>
+          </a:xfrm>
+          <a:prstGeom prst="rect">
+            <a:avLst/>
+          </a:prstGeom>
+          <a:noFill/>
+        </p:spPr>
+        <p:txBody>
+          <a:bodyPr wrap="square">
+            <a:spAutoFit/>
+          </a:bodyPr>
+          <a:lstStyle/>
+          <a:p>
+            <a:pPr algn="l">
+              <a:defRPr sz="1100" b="1" i="0">
+                <a:solidFill>
+                  <a:srgbClr val="1C1C1E"/>
+                </a:solidFill>
+                <a:latin typeface="Calibri"/>
+              </a:defRPr>
+            </a:pPr>
+            <a:r>
+              <a:t>Net Year-1 value</a:t>
+            </a:r>
+          </a:p>
+        </p:txBody>
+      </p:sp>
+      <p:sp>
+        <p:nvSpPr>
+          <p:cNvPr id="50" name="TextBox 49"/>
+          <p:cNvSpPr txBox="1"/>
+          <p:nvPr/>
+        </p:nvSpPr>
+        <p:spPr>
+          <a:xfrm>
+            <a:off x="3474720" y="5166360"/>
+            <a:ext cx="2743200" cy="274320"/>
+          </a:xfrm>
+          <a:prstGeom prst="rect">
+            <a:avLst/>
+          </a:prstGeom>
+          <a:noFill/>
+        </p:spPr>
+        <p:txBody>
+          <a:bodyPr wrap="square">
+            <a:spAutoFit/>
+          </a:bodyPr>
+          <a:lstStyle/>
+          <a:p>
+            <a:pPr algn="l">
+              <a:defRPr sz="1100" b="1" i="0">
+                <a:solidFill>
+                  <a:srgbClr val="1C1C1E"/>
+                </a:solidFill>
+                <a:latin typeface="Calibri"/>
+              </a:defRPr>
+            </a:pPr>
+            <a:r>
+              <a:t>$4.5M</a:t>
+            </a:r>
+          </a:p>
+        </p:txBody>
+      </p:sp>
+      <p:sp>
+        <p:nvSpPr>
+          <p:cNvPr id="51" name="TextBox 50"/>
+          <p:cNvSpPr txBox="1"/>
+          <p:nvPr/>
+        </p:nvSpPr>
+        <p:spPr>
+          <a:xfrm>
+            <a:off x="6217920" y="5166360"/>
+            <a:ext cx="2743200" cy="274320"/>
+          </a:xfrm>
+          <a:prstGeom prst="rect">
+            <a:avLst/>
+          </a:prstGeom>
+          <a:noFill/>
+        </p:spPr>
+        <p:txBody>
+          <a:bodyPr wrap="square">
+            <a:spAutoFit/>
+          </a:bodyPr>
+          <a:lstStyle/>
+          <a:p>
+            <a:pPr algn="l">
+              <a:defRPr sz="1100" b="1" i="0">
+                <a:solidFill>
+                  <a:srgbClr val="1C1C1E"/>
+                </a:solidFill>
+                <a:latin typeface="Calibri"/>
+              </a:defRPr>
+            </a:pPr>
+            <a:r>
+              <a:t>$10.2M</a:t>
+            </a:r>
+          </a:p>
+        </p:txBody>
+      </p:sp>
+      <p:sp>
+        <p:nvSpPr>
+          <p:cNvPr id="52" name="TextBox 51"/>
+          <p:cNvSpPr txBox="1"/>
+          <p:nvPr/>
+        </p:nvSpPr>
+        <p:spPr>
+          <a:xfrm>
+            <a:off x="8961120" y="5166360"/>
+            <a:ext cx="2743200" cy="274320"/>
+          </a:xfrm>
+          <a:prstGeom prst="rect">
+            <a:avLst/>
+          </a:prstGeom>
+          <a:noFill/>
+        </p:spPr>
+        <p:txBody>
+          <a:bodyPr wrap="square">
+            <a:spAutoFit/>
+          </a:bodyPr>
+          <a:lstStyle/>
+          <a:p>
+            <a:pPr algn="l">
+              <a:defRPr sz="1100" b="1" i="0">
+                <a:solidFill>
+                  <a:srgbClr val="1C1C1E"/>
+                </a:solidFill>
+                <a:latin typeface="Calibri"/>
+              </a:defRPr>
+            </a:pPr>
+            <a:r>
+              <a:t>$22.5M</a:t>
+            </a:r>
+          </a:p>
+        </p:txBody>
+      </p:sp>
+      <p:sp>
+        <p:nvSpPr>
+          <p:cNvPr id="53" name="TextBox 52"/>
+          <p:cNvSpPr txBox="1"/>
+          <p:nvPr/>
+        </p:nvSpPr>
+        <p:spPr>
+          <a:xfrm>
+            <a:off x="731520" y="5532120"/>
+            <a:ext cx="2743200" cy="274320"/>
+          </a:xfrm>
+          <a:prstGeom prst="rect">
+            <a:avLst/>
+          </a:prstGeom>
+          <a:noFill/>
+        </p:spPr>
+        <p:txBody>
+          <a:bodyPr wrap="square">
+            <a:spAutoFit/>
+          </a:bodyPr>
+          <a:lstStyle/>
+          <a:p>
+            <a:pPr algn="l">
+              <a:defRPr sz="1100" b="1" i="0">
+                <a:solidFill>
+                  <a:srgbClr val="1C1C1E"/>
+                </a:solidFill>
+                <a:latin typeface="Calibri"/>
+              </a:defRPr>
+            </a:pPr>
+            <a:r>
+              <a:t>Return on spend</a:t>
+            </a:r>
+          </a:p>
+        </p:txBody>
+      </p:sp>
+      <p:sp>
+        <p:nvSpPr>
+          <p:cNvPr id="54" name="TextBox 53"/>
+          <p:cNvSpPr txBox="1"/>
+          <p:nvPr/>
+        </p:nvSpPr>
+        <p:spPr>
+          <a:xfrm>
+            <a:off x="3474720" y="5532120"/>
+            <a:ext cx="2743200" cy="274320"/>
+          </a:xfrm>
+          <a:prstGeom prst="rect">
+            <a:avLst/>
+          </a:prstGeom>
+          <a:noFill/>
+        </p:spPr>
+        <p:txBody>
+          <a:bodyPr wrap="square">
+            <a:spAutoFit/>
+          </a:bodyPr>
+          <a:lstStyle/>
+          <a:p>
+            <a:pPr algn="l">
+              <a:defRPr sz="1100" b="1" i="0">
+                <a:solidFill>
+                  <a:srgbClr val="1C1C1E"/>
+                </a:solidFill>
+                <a:latin typeface="Calibri"/>
+              </a:defRPr>
+            </a:pPr>
+            <a:r>
+              <a:t>2.8x</a:t>
+            </a:r>
+          </a:p>
+        </p:txBody>
+      </p:sp>
+      <p:sp>
+        <p:nvSpPr>
+          <p:cNvPr id="55" name="TextBox 54"/>
+          <p:cNvSpPr txBox="1"/>
+          <p:nvPr/>
+        </p:nvSpPr>
+        <p:spPr>
+          <a:xfrm>
+            <a:off x="6217920" y="5532120"/>
+            <a:ext cx="2743200" cy="274320"/>
+          </a:xfrm>
+          <a:prstGeom prst="rect">
+            <a:avLst/>
+          </a:prstGeom>
+          <a:noFill/>
+        </p:spPr>
+        <p:txBody>
+          <a:bodyPr wrap="square">
+            <a:spAutoFit/>
+          </a:bodyPr>
+          <a:lstStyle/>
+          <a:p>
+            <a:pPr algn="l">
+              <a:defRPr sz="1100" b="1" i="0">
+                <a:solidFill>
+                  <a:srgbClr val="1C1C1E"/>
+                </a:solidFill>
+                <a:latin typeface="Calibri"/>
+              </a:defRPr>
+            </a:pPr>
+            <a:r>
+              <a:t>3.8x</a:t>
+            </a:r>
+          </a:p>
+        </p:txBody>
+      </p:sp>
+      <p:sp>
+        <p:nvSpPr>
+          <p:cNvPr id="56" name="TextBox 55"/>
+          <p:cNvSpPr txBox="1"/>
+          <p:nvPr/>
+        </p:nvSpPr>
+        <p:spPr>
+          <a:xfrm>
+            <a:off x="8961120" y="5532120"/>
+            <a:ext cx="2743200" cy="274320"/>
+          </a:xfrm>
+          <a:prstGeom prst="rect">
+            <a:avLst/>
+          </a:prstGeom>
+          <a:noFill/>
+        </p:spPr>
+        <p:txBody>
+          <a:bodyPr wrap="square">
+            <a:spAutoFit/>
+          </a:bodyPr>
+          <a:lstStyle/>
+          <a:p>
+            <a:pPr algn="l">
+              <a:defRPr sz="1100" b="1" i="0">
+                <a:solidFill>
+                  <a:srgbClr val="1C1C1E"/>
+                </a:solidFill>
+                <a:latin typeface="Calibri"/>
+              </a:defRPr>
+            </a:pPr>
+            <a:r>
+              <a:t>6.4x</a:t>
+            </a:r>
+          </a:p>
+        </p:txBody>
+      </p:sp>
+      <p:sp>
+        <p:nvSpPr>
+          <p:cNvPr id="57" name="TextBox 56"/>
           <p:cNvSpPr txBox="1"/>
           <p:nvPr/>
         </p:nvSpPr>
@@ -22426,7 +22839,7 @@
               </a:defRPr>
             </a:pPr>
             <a:r>
-              <a:t>APPENDIX A2</a:t>
+              <a:t>APPENDIX A1</a:t>
             </a:r>
           </a:p>
         </p:txBody>
@@ -22524,6 +22937,1011 @@
               </a:defRPr>
             </a:pPr>
             <a:r>
+              <a:t>Interview with Jordan Hartsell, VP Digital Products</a:t>
+            </a:r>
+          </a:p>
+        </p:txBody>
+      </p:sp>
+      <p:sp>
+        <p:nvSpPr>
+          <p:cNvPr id="4" name="Rectangle 3"/>
+          <p:cNvSpPr/>
+          <p:nvPr/>
+        </p:nvSpPr>
+        <p:spPr>
+          <a:xfrm>
+            <a:off x="731520" y="1051560"/>
+            <a:ext cx="731520" cy="38100"/>
+          </a:xfrm>
+          <a:prstGeom prst="rect">
+            <a:avLst/>
+          </a:prstGeom>
+          <a:solidFill>
+            <a:srgbClr val="E51937"/>
+          </a:solidFill>
+          <a:ln>
+            <a:noFill/>
+          </a:ln>
+        </p:spPr>
+        <p:style>
+          <a:lnRef idx="1">
+            <a:schemeClr val="accent1"/>
+          </a:lnRef>
+          <a:fillRef idx="3">
+            <a:schemeClr val="accent1"/>
+          </a:fillRef>
+          <a:effectRef idx="2">
+            <a:schemeClr val="accent1"/>
+          </a:effectRef>
+          <a:fontRef idx="minor">
+            <a:schemeClr val="lt1"/>
+          </a:fontRef>
+        </p:style>
+        <p:txBody>
+          <a:bodyPr rtlCol="0" anchor="ctr"/>
+          <a:lstStyle/>
+          <a:p>
+            <a:pPr algn="ctr"/>
+          </a:p>
+        </p:txBody>
+      </p:sp>
+      <p:sp>
+        <p:nvSpPr>
+          <p:cNvPr id="5" name="TextBox 4"/>
+          <p:cNvSpPr txBox="1"/>
+          <p:nvPr/>
+        </p:nvSpPr>
+        <p:spPr>
+          <a:xfrm>
+            <a:off x="731520" y="1234440"/>
+            <a:ext cx="10058400" cy="274320"/>
+          </a:xfrm>
+          <a:prstGeom prst="rect">
+            <a:avLst/>
+          </a:prstGeom>
+          <a:noFill/>
+        </p:spPr>
+        <p:txBody>
+          <a:bodyPr wrap="square">
+            <a:spAutoFit/>
+          </a:bodyPr>
+          <a:lstStyle/>
+          <a:p>
+            <a:pPr algn="l">
+              <a:defRPr sz="1200" b="0" i="0">
+                <a:solidFill>
+                  <a:srgbClr val="767676"/>
+                </a:solidFill>
+                <a:latin typeface="Calibri"/>
+              </a:defRPr>
+            </a:pPr>
+            <a:r>
+              <a:t>45-minute Zoom call  |  March 2026  |  Key quotes and insights</a:t>
+            </a:r>
+          </a:p>
+        </p:txBody>
+      </p:sp>
+      <p:sp>
+        <p:nvSpPr>
+          <p:cNvPr id="6" name="Rounded Rectangle 5"/>
+          <p:cNvSpPr/>
+          <p:nvPr/>
+        </p:nvSpPr>
+        <p:spPr>
+          <a:xfrm>
+            <a:off x="731520" y="1691640"/>
+            <a:ext cx="10789920" cy="1005840"/>
+          </a:xfrm>
+          <a:prstGeom prst="roundRect">
+            <a:avLst>
+              <a:gd name="adj" fmla="val 4000"/>
+            </a:avLst>
+          </a:prstGeom>
+          <a:solidFill>
+            <a:srgbClr val="FFFFFF"/>
+          </a:solidFill>
+          <a:ln w="12700">
+            <a:solidFill>
+              <a:srgbClr val="E0E0DE"/>
+            </a:solidFill>
+          </a:ln>
+        </p:spPr>
+        <p:style>
+          <a:lnRef idx="1">
+            <a:schemeClr val="accent1"/>
+          </a:lnRef>
+          <a:fillRef idx="3">
+            <a:schemeClr val="accent1"/>
+          </a:fillRef>
+          <a:effectRef idx="2">
+            <a:schemeClr val="accent1"/>
+          </a:effectRef>
+          <a:fontRef idx="minor">
+            <a:schemeClr val="lt1"/>
+          </a:fontRef>
+        </p:style>
+        <p:txBody>
+          <a:bodyPr rtlCol="0" anchor="ctr"/>
+          <a:lstStyle/>
+          <a:p>
+            <a:pPr algn="ctr"/>
+          </a:p>
+        </p:txBody>
+      </p:sp>
+      <p:sp>
+        <p:nvSpPr>
+          <p:cNvPr id="7" name="Rectangle 6"/>
+          <p:cNvSpPr/>
+          <p:nvPr/>
+        </p:nvSpPr>
+        <p:spPr>
+          <a:xfrm>
+            <a:off x="731520" y="1691640"/>
+            <a:ext cx="50800" cy="1005840"/>
+          </a:xfrm>
+          <a:prstGeom prst="rect">
+            <a:avLst/>
+          </a:prstGeom>
+          <a:solidFill>
+            <a:srgbClr val="767676"/>
+          </a:solidFill>
+          <a:ln>
+            <a:noFill/>
+          </a:ln>
+        </p:spPr>
+        <p:style>
+          <a:lnRef idx="1">
+            <a:schemeClr val="accent1"/>
+          </a:lnRef>
+          <a:fillRef idx="3">
+            <a:schemeClr val="accent1"/>
+          </a:fillRef>
+          <a:effectRef idx="2">
+            <a:schemeClr val="accent1"/>
+          </a:effectRef>
+          <a:fontRef idx="minor">
+            <a:schemeClr val="lt1"/>
+          </a:fontRef>
+        </p:style>
+        <p:txBody>
+          <a:bodyPr rtlCol="0" anchor="ctr"/>
+          <a:lstStyle/>
+          <a:p>
+            <a:pPr algn="ctr"/>
+          </a:p>
+        </p:txBody>
+      </p:sp>
+      <p:sp>
+        <p:nvSpPr>
+          <p:cNvPr id="8" name="TextBox 7"/>
+          <p:cNvSpPr txBox="1"/>
+          <p:nvPr/>
+        </p:nvSpPr>
+        <p:spPr>
+          <a:xfrm>
+            <a:off x="1097280" y="1737360"/>
+            <a:ext cx="1828800" cy="182880"/>
+          </a:xfrm>
+          <a:prstGeom prst="rect">
+            <a:avLst/>
+          </a:prstGeom>
+          <a:noFill/>
+        </p:spPr>
+        <p:txBody>
+          <a:bodyPr wrap="square">
+            <a:spAutoFit/>
+          </a:bodyPr>
+          <a:lstStyle/>
+          <a:p>
+            <a:pPr algn="l">
+              <a:defRPr sz="900" b="1" i="0">
+                <a:solidFill>
+                  <a:srgbClr val="767676"/>
+                </a:solidFill>
+                <a:latin typeface="Calibri"/>
+              </a:defRPr>
+            </a:pPr>
+            <a:r>
+              <a:t>ON DATA READINESS</a:t>
+            </a:r>
+          </a:p>
+        </p:txBody>
+      </p:sp>
+      <p:sp>
+        <p:nvSpPr>
+          <p:cNvPr id="9" name="TextBox 8"/>
+          <p:cNvSpPr txBox="1"/>
+          <p:nvPr/>
+        </p:nvSpPr>
+        <p:spPr>
+          <a:xfrm>
+            <a:off x="1097280" y="1947672"/>
+            <a:ext cx="7315200" cy="548640"/>
+          </a:xfrm>
+          <a:prstGeom prst="rect">
+            <a:avLst/>
+          </a:prstGeom>
+          <a:noFill/>
+        </p:spPr>
+        <p:txBody>
+          <a:bodyPr wrap="square">
+            <a:spAutoFit/>
+          </a:bodyPr>
+          <a:lstStyle/>
+          <a:p>
+            <a:pPr algn="l">
+              <a:defRPr sz="1100" b="0" i="1">
+                <a:solidFill>
+                  <a:srgbClr val="3A3A3C"/>
+                </a:solidFill>
+                <a:latin typeface="Calibri"/>
+              </a:defRPr>
+            </a:pPr>
+            <a:r>
+              <a:t>“We have good data in pockets and messy data everywhere else. If I wanted to build a support AI today, I could get it to work well for AXS and Hammerhead. The moment a dealer asks about a RockShox fork on a 2019 frame with a third-party brake, I start to sweat.”</a:t>
+            </a:r>
+          </a:p>
+        </p:txBody>
+      </p:sp>
+      <p:sp>
+        <p:nvSpPr>
+          <p:cNvPr id="10" name="TextBox 9"/>
+          <p:cNvSpPr txBox="1"/>
+          <p:nvPr/>
+        </p:nvSpPr>
+        <p:spPr>
+          <a:xfrm>
+            <a:off x="8686800" y="2011680"/>
+            <a:ext cx="2560320" cy="457200"/>
+          </a:xfrm>
+          <a:prstGeom prst="rect">
+            <a:avLst/>
+          </a:prstGeom>
+          <a:noFill/>
+        </p:spPr>
+        <p:txBody>
+          <a:bodyPr wrap="square">
+            <a:spAutoFit/>
+          </a:bodyPr>
+          <a:lstStyle/>
+          <a:p>
+            <a:pPr algn="l">
+              <a:defRPr sz="1000" b="1" i="0">
+                <a:solidFill>
+                  <a:srgbClr val="1C1C1E"/>
+                </a:solidFill>
+                <a:latin typeface="Calibri"/>
+              </a:defRPr>
+            </a:pPr>
+            <a:r>
+              <a:t>→ Validates bounded pilot scope</a:t>
+            </a:r>
+          </a:p>
+        </p:txBody>
+      </p:sp>
+      <p:sp>
+        <p:nvSpPr>
+          <p:cNvPr id="11" name="Rounded Rectangle 10"/>
+          <p:cNvSpPr/>
+          <p:nvPr/>
+        </p:nvSpPr>
+        <p:spPr>
+          <a:xfrm>
+            <a:off x="731520" y="2880360"/>
+            <a:ext cx="10789920" cy="1005840"/>
+          </a:xfrm>
+          <a:prstGeom prst="roundRect">
+            <a:avLst>
+              <a:gd name="adj" fmla="val 4000"/>
+            </a:avLst>
+          </a:prstGeom>
+          <a:solidFill>
+            <a:srgbClr val="FFFFFF"/>
+          </a:solidFill>
+          <a:ln w="12700">
+            <a:solidFill>
+              <a:srgbClr val="E0E0DE"/>
+            </a:solidFill>
+          </a:ln>
+        </p:spPr>
+        <p:style>
+          <a:lnRef idx="1">
+            <a:schemeClr val="accent1"/>
+          </a:lnRef>
+          <a:fillRef idx="3">
+            <a:schemeClr val="accent1"/>
+          </a:fillRef>
+          <a:effectRef idx="2">
+            <a:schemeClr val="accent1"/>
+          </a:effectRef>
+          <a:fontRef idx="minor">
+            <a:schemeClr val="lt1"/>
+          </a:fontRef>
+        </p:style>
+        <p:txBody>
+          <a:bodyPr rtlCol="0" anchor="ctr"/>
+          <a:lstStyle/>
+          <a:p>
+            <a:pPr algn="ctr"/>
+          </a:p>
+        </p:txBody>
+      </p:sp>
+      <p:sp>
+        <p:nvSpPr>
+          <p:cNvPr id="12" name="Rectangle 11"/>
+          <p:cNvSpPr/>
+          <p:nvPr/>
+        </p:nvSpPr>
+        <p:spPr>
+          <a:xfrm>
+            <a:off x="731520" y="2880360"/>
+            <a:ext cx="50800" cy="1005840"/>
+          </a:xfrm>
+          <a:prstGeom prst="rect">
+            <a:avLst/>
+          </a:prstGeom>
+          <a:solidFill>
+            <a:srgbClr val="767676"/>
+          </a:solidFill>
+          <a:ln>
+            <a:noFill/>
+          </a:ln>
+        </p:spPr>
+        <p:style>
+          <a:lnRef idx="1">
+            <a:schemeClr val="accent1"/>
+          </a:lnRef>
+          <a:fillRef idx="3">
+            <a:schemeClr val="accent1"/>
+          </a:fillRef>
+          <a:effectRef idx="2">
+            <a:schemeClr val="accent1"/>
+          </a:effectRef>
+          <a:fontRef idx="minor">
+            <a:schemeClr val="lt1"/>
+          </a:fontRef>
+        </p:style>
+        <p:txBody>
+          <a:bodyPr rtlCol="0" anchor="ctr"/>
+          <a:lstStyle/>
+          <a:p>
+            <a:pPr algn="ctr"/>
+          </a:p>
+        </p:txBody>
+      </p:sp>
+      <p:sp>
+        <p:nvSpPr>
+          <p:cNvPr id="13" name="TextBox 12"/>
+          <p:cNvSpPr txBox="1"/>
+          <p:nvPr/>
+        </p:nvSpPr>
+        <p:spPr>
+          <a:xfrm>
+            <a:off x="1097280" y="2926080"/>
+            <a:ext cx="1828800" cy="182880"/>
+          </a:xfrm>
+          <a:prstGeom prst="rect">
+            <a:avLst/>
+          </a:prstGeom>
+          <a:noFill/>
+        </p:spPr>
+        <p:txBody>
+          <a:bodyPr wrap="square">
+            <a:spAutoFit/>
+          </a:bodyPr>
+          <a:lstStyle/>
+          <a:p>
+            <a:pPr algn="l">
+              <a:defRPr sz="900" b="1" i="0">
+                <a:solidFill>
+                  <a:srgbClr val="767676"/>
+                </a:solidFill>
+                <a:latin typeface="Calibri"/>
+              </a:defRPr>
+            </a:pPr>
+            <a:r>
+              <a:t>ON ADOPTION BARRIERS</a:t>
+            </a:r>
+          </a:p>
+        </p:txBody>
+      </p:sp>
+      <p:sp>
+        <p:nvSpPr>
+          <p:cNvPr id="14" name="TextBox 13"/>
+          <p:cNvSpPr txBox="1"/>
+          <p:nvPr/>
+        </p:nvSpPr>
+        <p:spPr>
+          <a:xfrm>
+            <a:off x="1097280" y="3136392"/>
+            <a:ext cx="7315200" cy="548640"/>
+          </a:xfrm>
+          <a:prstGeom prst="rect">
+            <a:avLst/>
+          </a:prstGeom>
+          <a:noFill/>
+        </p:spPr>
+        <p:txBody>
+          <a:bodyPr wrap="square">
+            <a:spAutoFit/>
+          </a:bodyPr>
+          <a:lstStyle/>
+          <a:p>
+            <a:pPr algn="l">
+              <a:defRPr sz="1100" b="0" i="1">
+                <a:solidFill>
+                  <a:srgbClr val="3A3A3C"/>
+                </a:solidFill>
+                <a:latin typeface="Calibri"/>
+              </a:defRPr>
+            </a:pPr>
+            <a:r>
+              <a:t>“The resistance comes from customer-facing teams because they worry AI will produce confident-sounding wrong answers that damage dealer relationships they have spent years building.”</a:t>
+            </a:r>
+          </a:p>
+        </p:txBody>
+      </p:sp>
+      <p:sp>
+        <p:nvSpPr>
+          <p:cNvPr id="15" name="TextBox 14"/>
+          <p:cNvSpPr txBox="1"/>
+          <p:nvPr/>
+        </p:nvSpPr>
+        <p:spPr>
+          <a:xfrm>
+            <a:off x="8686800" y="3200400"/>
+            <a:ext cx="2560320" cy="457200"/>
+          </a:xfrm>
+          <a:prstGeom prst="rect">
+            <a:avLst/>
+          </a:prstGeom>
+          <a:noFill/>
+        </p:spPr>
+        <p:txBody>
+          <a:bodyPr wrap="square">
+            <a:spAutoFit/>
+          </a:bodyPr>
+          <a:lstStyle/>
+          <a:p>
+            <a:pPr algn="l">
+              <a:defRPr sz="1000" b="1" i="0">
+                <a:solidFill>
+                  <a:srgbClr val="1C1C1E"/>
+                </a:solidFill>
+                <a:latin typeface="Calibri"/>
+              </a:defRPr>
+            </a:pPr>
+            <a:r>
+              <a:t>→ Human-in-the-loop is mandatory</a:t>
+            </a:r>
+          </a:p>
+        </p:txBody>
+      </p:sp>
+      <p:sp>
+        <p:nvSpPr>
+          <p:cNvPr id="16" name="Rounded Rectangle 15"/>
+          <p:cNvSpPr/>
+          <p:nvPr/>
+        </p:nvSpPr>
+        <p:spPr>
+          <a:xfrm>
+            <a:off x="731520" y="4069080"/>
+            <a:ext cx="10789920" cy="1005840"/>
+          </a:xfrm>
+          <a:prstGeom prst="roundRect">
+            <a:avLst>
+              <a:gd name="adj" fmla="val 4000"/>
+            </a:avLst>
+          </a:prstGeom>
+          <a:solidFill>
+            <a:srgbClr val="FFFFFF"/>
+          </a:solidFill>
+          <a:ln w="12700">
+            <a:solidFill>
+              <a:srgbClr val="E0E0DE"/>
+            </a:solidFill>
+          </a:ln>
+        </p:spPr>
+        <p:style>
+          <a:lnRef idx="1">
+            <a:schemeClr val="accent1"/>
+          </a:lnRef>
+          <a:fillRef idx="3">
+            <a:schemeClr val="accent1"/>
+          </a:fillRef>
+          <a:effectRef idx="2">
+            <a:schemeClr val="accent1"/>
+          </a:effectRef>
+          <a:fontRef idx="minor">
+            <a:schemeClr val="lt1"/>
+          </a:fontRef>
+        </p:style>
+        <p:txBody>
+          <a:bodyPr rtlCol="0" anchor="ctr"/>
+          <a:lstStyle/>
+          <a:p>
+            <a:pPr algn="ctr"/>
+          </a:p>
+        </p:txBody>
+      </p:sp>
+      <p:sp>
+        <p:nvSpPr>
+          <p:cNvPr id="17" name="Rectangle 16"/>
+          <p:cNvSpPr/>
+          <p:nvPr/>
+        </p:nvSpPr>
+        <p:spPr>
+          <a:xfrm>
+            <a:off x="731520" y="4069080"/>
+            <a:ext cx="50800" cy="1005840"/>
+          </a:xfrm>
+          <a:prstGeom prst="rect">
+            <a:avLst/>
+          </a:prstGeom>
+          <a:solidFill>
+            <a:srgbClr val="767676"/>
+          </a:solidFill>
+          <a:ln>
+            <a:noFill/>
+          </a:ln>
+        </p:spPr>
+        <p:style>
+          <a:lnRef idx="1">
+            <a:schemeClr val="accent1"/>
+          </a:lnRef>
+          <a:fillRef idx="3">
+            <a:schemeClr val="accent1"/>
+          </a:fillRef>
+          <a:effectRef idx="2">
+            <a:schemeClr val="accent1"/>
+          </a:effectRef>
+          <a:fontRef idx="minor">
+            <a:schemeClr val="lt1"/>
+          </a:fontRef>
+        </p:style>
+        <p:txBody>
+          <a:bodyPr rtlCol="0" anchor="ctr"/>
+          <a:lstStyle/>
+          <a:p>
+            <a:pPr algn="ctr"/>
+          </a:p>
+        </p:txBody>
+      </p:sp>
+      <p:sp>
+        <p:nvSpPr>
+          <p:cNvPr id="18" name="TextBox 17"/>
+          <p:cNvSpPr txBox="1"/>
+          <p:nvPr/>
+        </p:nvSpPr>
+        <p:spPr>
+          <a:xfrm>
+            <a:off x="1097280" y="4114800"/>
+            <a:ext cx="1828800" cy="182880"/>
+          </a:xfrm>
+          <a:prstGeom prst="rect">
+            <a:avLst/>
+          </a:prstGeom>
+          <a:noFill/>
+        </p:spPr>
+        <p:txBody>
+          <a:bodyPr wrap="square">
+            <a:spAutoFit/>
+          </a:bodyPr>
+          <a:lstStyle/>
+          <a:p>
+            <a:pPr algn="l">
+              <a:defRPr sz="900" b="1" i="0">
+                <a:solidFill>
+                  <a:srgbClr val="767676"/>
+                </a:solidFill>
+                <a:latin typeface="Calibri"/>
+              </a:defRPr>
+            </a:pPr>
+            <a:r>
+              <a:t>ON COMPETITIVE ADVANTAGE</a:t>
+            </a:r>
+          </a:p>
+        </p:txBody>
+      </p:sp>
+      <p:sp>
+        <p:nvSpPr>
+          <p:cNvPr id="19" name="TextBox 18"/>
+          <p:cNvSpPr txBox="1"/>
+          <p:nvPr/>
+        </p:nvSpPr>
+        <p:spPr>
+          <a:xfrm>
+            <a:off x="1097280" y="4325112"/>
+            <a:ext cx="7315200" cy="548640"/>
+          </a:xfrm>
+          <a:prstGeom prst="rect">
+            <a:avLst/>
+          </a:prstGeom>
+          <a:noFill/>
+        </p:spPr>
+        <p:txBody>
+          <a:bodyPr wrap="square">
+            <a:spAutoFit/>
+          </a:bodyPr>
+          <a:lstStyle/>
+          <a:p>
+            <a:pPr algn="l">
+              <a:defRPr sz="1100" b="0" i="1">
+                <a:solidFill>
+                  <a:srgbClr val="3A3A3C"/>
+                </a:solidFill>
+                <a:latin typeface="Calibri"/>
+              </a:defRPr>
+            </a:pPr>
+            <a:r>
+              <a:t>“A Shimano rider uses the app to check compatibility. A Hammerhead rider uses it to train, navigate, and communicate with their component stack. That is a fundamentally different data relationship.”</a:t>
+            </a:r>
+          </a:p>
+        </p:txBody>
+      </p:sp>
+      <p:sp>
+        <p:nvSpPr>
+          <p:cNvPr id="20" name="TextBox 19"/>
+          <p:cNvSpPr txBox="1"/>
+          <p:nvPr/>
+        </p:nvSpPr>
+        <p:spPr>
+          <a:xfrm>
+            <a:off x="8686800" y="4389120"/>
+            <a:ext cx="2560320" cy="457200"/>
+          </a:xfrm>
+          <a:prstGeom prst="rect">
+            <a:avLst/>
+          </a:prstGeom>
+          <a:noFill/>
+        </p:spPr>
+        <p:txBody>
+          <a:bodyPr wrap="square">
+            <a:spAutoFit/>
+          </a:bodyPr>
+          <a:lstStyle/>
+          <a:p>
+            <a:pPr algn="l">
+              <a:defRPr sz="1000" b="1" i="0">
+                <a:solidFill>
+                  <a:srgbClr val="1C1C1E"/>
+                </a:solidFill>
+                <a:latin typeface="Calibri"/>
+              </a:defRPr>
+            </a:pPr>
+            <a:r>
+              <a:t>→ Hammerhead is SRAM's real AI moat</a:t>
+            </a:r>
+          </a:p>
+        </p:txBody>
+      </p:sp>
+      <p:sp>
+        <p:nvSpPr>
+          <p:cNvPr id="21" name="Rounded Rectangle 20"/>
+          <p:cNvSpPr/>
+          <p:nvPr/>
+        </p:nvSpPr>
+        <p:spPr>
+          <a:xfrm>
+            <a:off x="731520" y="5257800"/>
+            <a:ext cx="10789920" cy="1005840"/>
+          </a:xfrm>
+          <a:prstGeom prst="roundRect">
+            <a:avLst>
+              <a:gd name="adj" fmla="val 4000"/>
+            </a:avLst>
+          </a:prstGeom>
+          <a:solidFill>
+            <a:srgbClr val="FFFFFF"/>
+          </a:solidFill>
+          <a:ln w="12700">
+            <a:solidFill>
+              <a:srgbClr val="E0E0DE"/>
+            </a:solidFill>
+          </a:ln>
+        </p:spPr>
+        <p:style>
+          <a:lnRef idx="1">
+            <a:schemeClr val="accent1"/>
+          </a:lnRef>
+          <a:fillRef idx="3">
+            <a:schemeClr val="accent1"/>
+          </a:fillRef>
+          <a:effectRef idx="2">
+            <a:schemeClr val="accent1"/>
+          </a:effectRef>
+          <a:fontRef idx="minor">
+            <a:schemeClr val="lt1"/>
+          </a:fontRef>
+        </p:style>
+        <p:txBody>
+          <a:bodyPr rtlCol="0" anchor="ctr"/>
+          <a:lstStyle/>
+          <a:p>
+            <a:pPr algn="ctr"/>
+          </a:p>
+        </p:txBody>
+      </p:sp>
+      <p:sp>
+        <p:nvSpPr>
+          <p:cNvPr id="22" name="Rectangle 21"/>
+          <p:cNvSpPr/>
+          <p:nvPr/>
+        </p:nvSpPr>
+        <p:spPr>
+          <a:xfrm>
+            <a:off x="731520" y="5257800"/>
+            <a:ext cx="50800" cy="1005840"/>
+          </a:xfrm>
+          <a:prstGeom prst="rect">
+            <a:avLst/>
+          </a:prstGeom>
+          <a:solidFill>
+            <a:srgbClr val="767676"/>
+          </a:solidFill>
+          <a:ln>
+            <a:noFill/>
+          </a:ln>
+        </p:spPr>
+        <p:style>
+          <a:lnRef idx="1">
+            <a:schemeClr val="accent1"/>
+          </a:lnRef>
+          <a:fillRef idx="3">
+            <a:schemeClr val="accent1"/>
+          </a:fillRef>
+          <a:effectRef idx="2">
+            <a:schemeClr val="accent1"/>
+          </a:effectRef>
+          <a:fontRef idx="minor">
+            <a:schemeClr val="lt1"/>
+          </a:fontRef>
+        </p:style>
+        <p:txBody>
+          <a:bodyPr rtlCol="0" anchor="ctr"/>
+          <a:lstStyle/>
+          <a:p>
+            <a:pPr algn="ctr"/>
+          </a:p>
+        </p:txBody>
+      </p:sp>
+      <p:sp>
+        <p:nvSpPr>
+          <p:cNvPr id="23" name="TextBox 22"/>
+          <p:cNvSpPr txBox="1"/>
+          <p:nvPr/>
+        </p:nvSpPr>
+        <p:spPr>
+          <a:xfrm>
+            <a:off x="1097280" y="5303520"/>
+            <a:ext cx="1828800" cy="182880"/>
+          </a:xfrm>
+          <a:prstGeom prst="rect">
+            <a:avLst/>
+          </a:prstGeom>
+          <a:noFill/>
+        </p:spPr>
+        <p:txBody>
+          <a:bodyPr wrap="square">
+            <a:spAutoFit/>
+          </a:bodyPr>
+          <a:lstStyle/>
+          <a:p>
+            <a:pPr algn="l">
+              <a:defRPr sz="900" b="1" i="0">
+                <a:solidFill>
+                  <a:srgbClr val="767676"/>
+                </a:solidFill>
+                <a:latin typeface="Calibri"/>
+              </a:defRPr>
+            </a:pPr>
+            <a:r>
+              <a:t>ON SUCCESS CRITERIA</a:t>
+            </a:r>
+          </a:p>
+        </p:txBody>
+      </p:sp>
+      <p:sp>
+        <p:nvSpPr>
+          <p:cNvPr id="24" name="TextBox 23"/>
+          <p:cNvSpPr txBox="1"/>
+          <p:nvPr/>
+        </p:nvSpPr>
+        <p:spPr>
+          <a:xfrm>
+            <a:off x="1097280" y="5513832"/>
+            <a:ext cx="7315200" cy="548640"/>
+          </a:xfrm>
+          <a:prstGeom prst="rect">
+            <a:avLst/>
+          </a:prstGeom>
+          <a:noFill/>
+        </p:spPr>
+        <p:txBody>
+          <a:bodyPr wrap="square">
+            <a:spAutoFit/>
+          </a:bodyPr>
+          <a:lstStyle/>
+          <a:p>
+            <a:pPr algn="l">
+              <a:defRPr sz="1100" b="0" i="1">
+                <a:solidFill>
+                  <a:srgbClr val="3A3A3C"/>
+                </a:solidFill>
+                <a:latin typeface="Calibri"/>
+              </a:defRPr>
+            </a:pPr>
+            <a:r>
+              <a:t>“I want one workflow measurably faster, measurably more accurate, with no regression in dealer satisfaction scores.”</a:t>
+            </a:r>
+          </a:p>
+        </p:txBody>
+      </p:sp>
+      <p:sp>
+        <p:nvSpPr>
+          <p:cNvPr id="25" name="TextBox 24"/>
+          <p:cNvSpPr txBox="1"/>
+          <p:nvPr/>
+        </p:nvSpPr>
+        <p:spPr>
+          <a:xfrm>
+            <a:off x="8686800" y="5577840"/>
+            <a:ext cx="2560320" cy="457200"/>
+          </a:xfrm>
+          <a:prstGeom prst="rect">
+            <a:avLst/>
+          </a:prstGeom>
+          <a:noFill/>
+        </p:spPr>
+        <p:txBody>
+          <a:bodyPr wrap="square">
+            <a:spAutoFit/>
+          </a:bodyPr>
+          <a:lstStyle/>
+          <a:p>
+            <a:pPr algn="l">
+              <a:defRPr sz="1000" b="1" i="0">
+                <a:solidFill>
+                  <a:srgbClr val="1C1C1E"/>
+                </a:solidFill>
+                <a:latin typeface="Calibri"/>
+              </a:defRPr>
+            </a:pPr>
+            <a:r>
+              <a:t>→ Aligns with our 90-day pilot targets</a:t>
+            </a:r>
+          </a:p>
+        </p:txBody>
+      </p:sp>
+      <p:sp>
+        <p:nvSpPr>
+          <p:cNvPr id="26" name="TextBox 25"/>
+          <p:cNvSpPr txBox="1"/>
+          <p:nvPr/>
+        </p:nvSpPr>
+        <p:spPr>
+          <a:xfrm>
+            <a:off x="731520" y="6400800"/>
+            <a:ext cx="9144000" cy="274320"/>
+          </a:xfrm>
+          <a:prstGeom prst="rect">
+            <a:avLst/>
+          </a:prstGeom>
+          <a:noFill/>
+        </p:spPr>
+        <p:txBody>
+          <a:bodyPr wrap="square">
+            <a:spAutoFit/>
+          </a:bodyPr>
+          <a:lstStyle/>
+          <a:p>
+            <a:pPr algn="l">
+              <a:defRPr sz="800" b="0" i="0">
+                <a:solidFill>
+                  <a:srgbClr val="767676"/>
+                </a:solidFill>
+                <a:latin typeface="Calibri"/>
+              </a:defRPr>
+            </a:pPr>
+            <a:r>
+              <a:t>APPENDIX A2</a:t>
+            </a:r>
+          </a:p>
+        </p:txBody>
+      </p:sp>
+    </p:spTree>
+  </p:cSld>
+  <p:clrMapOvr>
+    <a:masterClrMapping/>
+  </p:clrMapOvr>
+</p:sld>
+</file>
+
+<file path=ppt/slides/slide27.xml><?xml version="1.0" encoding="utf-8"?>
+<p:sld xmlns:a="http://schemas.openxmlformats.org/drawingml/2006/main" xmlns:p="http://schemas.openxmlformats.org/presentationml/2006/main" xmlns:r="http://schemas.openxmlformats.org/officeDocument/2006/relationships">
+  <p:cSld>
+    <p:bg>
+      <p:bgPr>
+        <a:solidFill>
+          <a:srgbClr val="F5F5F3"/>
+        </a:solidFill>
+        <a:effectLst/>
+      </p:bgPr>
+    </p:bg>
+    <p:spTree>
+      <p:nvGrpSpPr>
+        <p:cNvPr id="1" name=""/>
+        <p:cNvGrpSpPr/>
+        <p:nvPr/>
+      </p:nvGrpSpPr>
+      <p:grpSpPr/>
+      <p:sp>
+        <p:nvSpPr>
+          <p:cNvPr id="2" name="TextBox 1"/>
+          <p:cNvSpPr txBox="1"/>
+          <p:nvPr/>
+        </p:nvSpPr>
+        <p:spPr>
+          <a:xfrm>
+            <a:off x="731520" y="274320"/>
+            <a:ext cx="5486400" cy="228600"/>
+          </a:xfrm>
+          <a:prstGeom prst="rect">
+            <a:avLst/>
+          </a:prstGeom>
+          <a:noFill/>
+        </p:spPr>
+        <p:txBody>
+          <a:bodyPr wrap="square">
+            <a:spAutoFit/>
+          </a:bodyPr>
+          <a:lstStyle/>
+          <a:p>
+            <a:pPr algn="l">
+              <a:defRPr sz="1100" b="1" i="0">
+                <a:solidFill>
+                  <a:srgbClr val="767676"/>
+                </a:solidFill>
+                <a:latin typeface="Calibri"/>
+              </a:defRPr>
+            </a:pPr>
+            <a:r>
+              <a:t>APPENDIX</a:t>
+            </a:r>
+          </a:p>
+        </p:txBody>
+      </p:sp>
+      <p:sp>
+        <p:nvSpPr>
+          <p:cNvPr id="3" name="TextBox 2"/>
+          <p:cNvSpPr txBox="1"/>
+          <p:nvPr/>
+        </p:nvSpPr>
+        <p:spPr>
+          <a:xfrm>
+            <a:off x="731520" y="548640"/>
+            <a:ext cx="10515600" cy="502920"/>
+          </a:xfrm>
+          <a:prstGeom prst="rect">
+            <a:avLst/>
+          </a:prstGeom>
+          <a:noFill/>
+        </p:spPr>
+        <p:txBody>
+          <a:bodyPr wrap="square">
+            <a:spAutoFit/>
+          </a:bodyPr>
+          <a:lstStyle/>
+          <a:p>
+            <a:pPr algn="l">
+              <a:defRPr sz="2600" b="1" i="0">
+                <a:solidFill>
+                  <a:srgbClr val="1C1C1E"/>
+                </a:solidFill>
+                <a:latin typeface="Calibri"/>
+              </a:defRPr>
+            </a:pPr>
+            <a:r>
               <a:t>Phasing, talent, and organizational enablers</a:t>
             </a:r>
           </a:p>
@@ -23842,7 +25260,7 @@
               </a:defRPr>
             </a:pPr>
             <a:r>
-              <a:t>7</a:t>
+              <a:t>6</a:t>
             </a:r>
           </a:p>
         </p:txBody>

--- a/deliverables/SRAM_AI_Adoption_Playbook.pptx
+++ b/deliverables/SRAM_AI_Adoption_Playbook.pptx
@@ -3274,6 +3274,35 @@
             </a:pPr>
             <a:r>
               <a:t>Prepared for Executive Leadership  |  March 2026</a:t>
+            </a:r>
+          </a:p>
+          <a:p>
+            <a:pPr>
+              <a:spcAft>
+                <a:spcPts val="360"/>
+              </a:spcAft>
+              <a:defRPr sz="600" b="0">
+                <a:solidFill>
+                  <a:srgbClr val="767676"/>
+                </a:solidFill>
+                <a:latin typeface="Calibri"/>
+              </a:defRPr>
+            </a:pPr>
+          </a:p>
+          <a:p>
+            <a:pPr>
+              <a:spcAft>
+                <a:spcPts val="780"/>
+              </a:spcAft>
+              <a:defRPr sz="1300" b="0">
+                <a:solidFill>
+                  <a:srgbClr val="767676"/>
+                </a:solidFill>
+                <a:latin typeface="Calibri"/>
+              </a:defRPr>
+            </a:pPr>
+            <a:r>
+              <a:t>Donovan Palmer, Ed Kreienberg, Will Zheng</a:t>
             </a:r>
           </a:p>
         </p:txBody>
